--- a/docs/MediScan-AI_Kich_Ban_Thuyet_Trinh.pptx
+++ b/docs/MediScan-AI_Kich_Ban_Thuyet_Trinh.pptx
@@ -21,9 +21,11 @@
     <p:sldId id="269" r:id="rId15"/>
     <p:sldId id="270" r:id="rId16"/>
     <p:sldId id="271" r:id="rId17"/>
+    <p:sldId id="272" r:id="rId18"/>
+    <p:sldId id="273" r:id="rId19"/>
   </p:sldIdLst>
   <p:notesMasterIdLst>
-    <p:notesMasterId r:id="rId18"/>
+    <p:notesMasterId r:id="rId20"/>
   </p:notesMasterIdLst>
   <p:sldSz cx="12191695" cy="6858000"/>
   <p:notesSz cx="6858000" cy="12191695"/>
@@ -605,7 +607,7 @@
           <a:p>
             <a:r>
               <a:rPr lang="en-US" dirty="0"/>
-              <a:t>Điểm mấu chốt: dự án chưa có dữ liệu lâm sàng gán nhãn thật, nên nhóm dùng kỹ thuật distillation — chưng cất tri thức. Viết tay 20 luật mờ chuyên gia làm giáo viên, sinh 8000 mẫu tổng hợp cho giáo viên chấm điểm, rồi huấn luyện ANFIS 80 epoch để tái tạo lại đúng đầu ra đó. Nếu file trọng số lỗi, hệ thống tự động fallback về hệ luật viết tay. Đây là câu trả lời chuẩn khi bị hỏi ANFIS train trên dữ liệu gì.</a:t>
+              <a:t>Đi sâu hơn vào cách ANFIS tính toán: Lớp 1 mờ hoá từng đầu vào qua 3 hàm Gauss. Lớp 2 nhân các mức độ thuộc về theo từng tổ hợp luật, tối đa 243 luật, mỗi luật ra một độ mạnh kích hoạt. Lớp 3 chuẩn hoá các độ mạnh này thành tỉ trọng cộng lại bằng 1. Lớp 4 — khác với ANFIS đơn giản chỉ dùng hằng số, mạng này dùng hệ quả tuyến tính kiểu Takagi-Sugeno, hệ số học bằng bình phương tối thiểu. Lớp 5 cộng có trọng số tất cả để ra điểm cuối cùng. Đây là kiến trúc ANFIS kinh điển của Jang, học kiểu hybrid.</a:t>
             </a:r>
             <a:endParaRPr lang="en-US" dirty="0"/>
           </a:p>
@@ -693,7 +695,7 @@
           <a:p>
             <a:r>
               <a:rPr lang="en-US" dirty="0"/>
-              <a:t>Đây là slide quan trọng nhất. Ảnh X-quang vào hệ thống, được tiền xử lý cho rõ hơn, sau đó chạy song song 2 phương pháp: YOLOv11 dò vùng nghi gãy và Fractal đo độ gồ ghề viền xương. Hai kết quả được gộp lại bằng NMS và trích thành 9 đặc trưng số. ANFIS lấy các đặc trưng đó để chấm điểm rủi ro từ 0 đến 100 và phân loại mức độ. Cuối cùng hệ thống trả về ảnh đã khoanh vùng cùng điểm số và mô tả để bác sĩ tham khảo.</a:t>
+              <a:t>edge_irregularity đo độ gồ ghề viền vùng nghi ngờ — viền càng bất thường càng giống đường gãy thật. bone_contrast đo độ tương phản ảnh sau CLAHE — ảnh rõ thì đánh giá tin cậy hơn. yolo_confidence là độ tự tin cao nhất của YOLO. region_burden đo gánh nặng tổn thương — vùng lớn hoặc nhiều vùng thì rủi ro cao hơn. morphology_strength đo hình thái điển hình của đường gãy: dài, mảnh, viền phức tạp, khác đốm nhiễu tròn nhỏ. Đây là toàn bộ 5 con số mà ANFIS nhìn thấy để ra quyết định — không có thông tin bệnh nhân nào khác được đưa vào.</a:t>
             </a:r>
             <a:endParaRPr lang="en-US" dirty="0"/>
           </a:p>
@@ -781,7 +783,7 @@
           <a:p>
             <a:r>
               <a:rPr lang="en-US" dirty="0"/>
-              <a:t>Hệ thống có 5 actor tương ứng 5 role trong database: Patient, Receptionist, Technician, Doctor, Admin. Mỗi vai trò có một bộ chức năng riêng biệt, được phân quyền rõ ràng trong Spring Security.</a:t>
+              <a:t>Điểm mấu chốt: dự án chưa có dữ liệu lâm sàng gán nhãn thật, nên nhóm dùng kỹ thuật distillation — chưng cất tri thức. Viết tay 20 luật mờ chuyên gia làm giáo viên, sinh 8000 mẫu tổng hợp cho giáo viên chấm điểm, rồi huấn luyện ANFIS 80 epoch để tái tạo lại đúng đầu ra đó. Nếu file trọng số lỗi, hệ thống tự động fallback về hệ luật viết tay. Đây là câu trả lời chuẩn khi bị hỏi ANFIS train trên dữ liệu gì.</a:t>
             </a:r>
             <a:endParaRPr lang="en-US" dirty="0"/>
           </a:p>
@@ -869,7 +871,7 @@
           <a:p>
             <a:r>
               <a:rPr lang="en-US" dirty="0"/>
-              <a:t>Đây là sơ đồ ngữ cảnh (DFD mức 0): MediScan-AI ở giữa, xung quanh là 5 actor người dùng và 2 hệ thống ngoài — AI/ML Service (microservice FastAPI) và Notification Service. Mỗi mũi tên thể hiện luồng dữ liệu trao đổi hai chiều giữa actor/hệ thống ngoài với core hệ thống.</a:t>
+              <a:t>Đây là slide quan trọng nhất. Ảnh X-quang vào hệ thống, được tiền xử lý cho rõ hơn, sau đó chạy song song 2 phương pháp: YOLOv11 dò vùng nghi gãy và Fractal đo độ gồ ghề viền xương. Hai kết quả được gộp lại bằng NMS và trích thành 9 đặc trưng số. ANFIS lấy các đặc trưng đó để chấm điểm rủi ro từ 0 đến 100 và phân loại mức độ. Cuối cùng hệ thống trả về ảnh đã khoanh vùng cùng điểm số và mô tả để bác sĩ tham khảo.</a:t>
             </a:r>
             <a:endParaRPr lang="en-US" dirty="0"/>
           </a:p>
@@ -957,7 +959,7 @@
           <a:p>
             <a:r>
               <a:rPr lang="en-US" dirty="0"/>
-              <a:t>Sơ đồ Use Case tổng quan theo 5 actor. Riêng Đăng nhập / Đổi mật khẩu dùng chung cho tất cả vai trò nên được tách thành một use case chia sẻ ở dưới. Mỗi actor có một nhóm chức năng chính — ví dụ Lễ tân có 16 use case chi tiết hơn trong tài liệu đặc tả riêng, ở đây chỉ liệt kê nhóm chức năng cốt lõi để dễ trình bày.</a:t>
+              <a:t>Hệ thống có 5 actor tương ứng 5 role trong database: Patient, Receptionist, Technician, Doctor, Admin. Mỗi vai trò có một bộ chức năng riêng biệt, được phân quyền rõ ràng trong Spring Security.</a:t>
             </a:r>
             <a:endParaRPr lang="en-US" dirty="0"/>
           </a:p>
@@ -1045,7 +1047,7 @@
           <a:p>
             <a:r>
               <a:rPr lang="en-US" dirty="0"/>
-              <a:t>Tóm lại, nhóm đã số hoá trọn vẹn quy trình khám cho 5 vai trò và xây dựng thành công pipeline AI 3 tầng hoạt động ổn định. Hướng phát triển tiếp theo là thu thập dữ liệu lâm sàng thật để tinh chỉnh lại ANFIS, thay vì chỉ dựa vào hệ luật viết tay như hiện tại.</a:t>
+              <a:t>Đây là sơ đồ ngữ cảnh (DFD mức 0): MediScan-AI ở giữa, xung quanh là 5 actor người dùng và 2 hệ thống ngoài — AI/ML Service (microservice FastAPI) và Notification Service. Mỗi mũi tên thể hiện luồng dữ liệu trao đổi hai chiều giữa actor/hệ thống ngoài với core hệ thống.</a:t>
             </a:r>
             <a:endParaRPr lang="en-US" dirty="0"/>
           </a:p>
@@ -1133,7 +1135,7 @@
           <a:p>
             <a:r>
               <a:rPr lang="en-US" dirty="0"/>
-              <a:t>Em xin cảm ơn thầy/cô đã lắng nghe phần trình bày. Em sẵn sàng giải đáp các câu hỏi.</a:t>
+              <a:t>Sơ đồ Use Case tổng quan theo 5 actor. Riêng Đăng nhập / Đổi mật khẩu dùng chung cho tất cả vai trò nên được tách thành một use case chia sẻ ở dưới. Mỗi actor có một nhóm chức năng chính — ví dụ Lễ tân có 16 use case chi tiết hơn trong tài liệu đặc tả riêng, ở đây chỉ liệt kê nhóm chức năng cốt lõi để dễ trình bày.</a:t>
             </a:r>
             <a:endParaRPr lang="en-US" dirty="0"/>
           </a:p>
@@ -1157,6 +1159,182 @@
             <a:fld id="{F7021451-1387-4CA6-816F-3879F97B5CBC}" type="slidenum">
               <a:rPr lang="en-US"/>
               <a:t>16</a:t>
+            </a:fld>
+            <a:endParaRPr lang="en-US"/>
+          </a:p>
+        </p:txBody>
+      </p:sp>
+    </p:spTree>
+    <p:extLst>
+      <p:ext uri="{BB962C8B-B14F-4D97-AF65-F5344CB8AC3E}">
+        <p14:creationId xmlns:p14="http://schemas.microsoft.com/office/powerpoint/2010/main" val="1024086991"/>
+      </p:ext>
+    </p:extLst>
+  </p:cSld>
+  <p:clrMapOvr>
+    <a:masterClrMapping/>
+  </p:clrMapOvr>
+</p:notes>
+</file>
+
+<file path=ppt/notesSlides/notesSlide17.xml><?xml version="1.0" encoding="utf-8"?>
+<p:notes xmlns:a="http://schemas.openxmlformats.org/drawingml/2006/main" xmlns:r="http://schemas.openxmlformats.org/officeDocument/2006/relationships" xmlns:p="http://schemas.openxmlformats.org/presentationml/2006/main">
+  <p:cSld>
+    <p:spTree>
+      <p:nvGrpSpPr>
+        <p:cNvPr id="1" name=""/>
+        <p:cNvGrpSpPr/>
+        <p:nvPr/>
+      </p:nvGrpSpPr>
+      <p:grpSpPr>
+        <a:xfrm>
+          <a:off x="0" y="0"/>
+          <a:ext cx="0" cy="0"/>
+          <a:chOff x="0" y="0"/>
+          <a:chExt cx="0" cy="0"/>
+        </a:xfrm>
+      </p:grpSpPr>
+      <p:sp>
+        <p:nvSpPr>
+          <p:cNvPr id="2" name="Slide Image Placeholder 1"/>
+          <p:cNvSpPr>
+            <a:spLocks noGrp="1" noRot="1" noChangeAspect="1"/>
+          </p:cNvSpPr>
+          <p:nvPr>
+            <p:ph type="sldImg"/>
+          </p:nvPr>
+        </p:nvSpPr>
+        <p:spPr/>
+      </p:sp>
+      <p:sp>
+        <p:nvSpPr>
+          <p:cNvPr id="3" name="Notes Placeholder 2"/>
+          <p:cNvSpPr>
+            <a:spLocks noGrp="1"/>
+          </p:cNvSpPr>
+          <p:nvPr>
+            <p:ph type="body" idx="1"/>
+          </p:nvPr>
+        </p:nvSpPr>
+        <p:spPr/>
+        <p:txBody>
+          <a:bodyPr/>
+          <a:lstStyle/>
+          <a:p>
+            <a:r>
+              <a:rPr lang="en-US" dirty="0"/>
+              <a:t>Tóm lại, nhóm đã số hoá trọn vẹn quy trình khám cho 5 vai trò và xây dựng thành công pipeline AI 3 tầng hoạt động ổn định. Hướng phát triển tiếp theo là thu thập dữ liệu lâm sàng thật để tinh chỉnh lại ANFIS, thay vì chỉ dựa vào hệ luật viết tay như hiện tại.</a:t>
+            </a:r>
+            <a:endParaRPr lang="en-US" dirty="0"/>
+          </a:p>
+        </p:txBody>
+      </p:sp>
+      <p:sp>
+        <p:nvSpPr>
+          <p:cNvPr id="4" name="Slide Number Placeholder 3"/>
+          <p:cNvSpPr>
+            <a:spLocks noGrp="1"/>
+          </p:cNvSpPr>
+          <p:nvPr>
+            <p:ph type="sldNum" sz="quarter" idx="10"/>
+          </p:nvPr>
+        </p:nvSpPr>
+        <p:spPr/>
+        <p:txBody>
+          <a:bodyPr/>
+          <a:lstStyle/>
+          <a:p>
+            <a:fld id="{F7021451-1387-4CA6-816F-3879F97B5CBC}" type="slidenum">
+              <a:rPr lang="en-US"/>
+              <a:t>17</a:t>
+            </a:fld>
+            <a:endParaRPr lang="en-US"/>
+          </a:p>
+        </p:txBody>
+      </p:sp>
+    </p:spTree>
+    <p:extLst>
+      <p:ext uri="{BB962C8B-B14F-4D97-AF65-F5344CB8AC3E}">
+        <p14:creationId xmlns:p14="http://schemas.microsoft.com/office/powerpoint/2010/main" val="1024086991"/>
+      </p:ext>
+    </p:extLst>
+  </p:cSld>
+  <p:clrMapOvr>
+    <a:masterClrMapping/>
+  </p:clrMapOvr>
+</p:notes>
+</file>
+
+<file path=ppt/notesSlides/notesSlide18.xml><?xml version="1.0" encoding="utf-8"?>
+<p:notes xmlns:a="http://schemas.openxmlformats.org/drawingml/2006/main" xmlns:r="http://schemas.openxmlformats.org/officeDocument/2006/relationships" xmlns:p="http://schemas.openxmlformats.org/presentationml/2006/main">
+  <p:cSld>
+    <p:spTree>
+      <p:nvGrpSpPr>
+        <p:cNvPr id="1" name=""/>
+        <p:cNvGrpSpPr/>
+        <p:nvPr/>
+      </p:nvGrpSpPr>
+      <p:grpSpPr>
+        <a:xfrm>
+          <a:off x="0" y="0"/>
+          <a:ext cx="0" cy="0"/>
+          <a:chOff x="0" y="0"/>
+          <a:chExt cx="0" cy="0"/>
+        </a:xfrm>
+      </p:grpSpPr>
+      <p:sp>
+        <p:nvSpPr>
+          <p:cNvPr id="2" name="Slide Image Placeholder 1"/>
+          <p:cNvSpPr>
+            <a:spLocks noGrp="1" noRot="1" noChangeAspect="1"/>
+          </p:cNvSpPr>
+          <p:nvPr>
+            <p:ph type="sldImg"/>
+          </p:nvPr>
+        </p:nvSpPr>
+        <p:spPr/>
+      </p:sp>
+      <p:sp>
+        <p:nvSpPr>
+          <p:cNvPr id="3" name="Notes Placeholder 2"/>
+          <p:cNvSpPr>
+            <a:spLocks noGrp="1"/>
+          </p:cNvSpPr>
+          <p:nvPr>
+            <p:ph type="body" idx="1"/>
+          </p:nvPr>
+        </p:nvSpPr>
+        <p:spPr/>
+        <p:txBody>
+          <a:bodyPr/>
+          <a:lstStyle/>
+          <a:p>
+            <a:r>
+              <a:rPr lang="en-US" dirty="0"/>
+              <a:t>Em xin cảm ơn thầy/cô đã lắng nghe phần trình bày. Em sẵn sàng giải đáp các câu hỏi.</a:t>
+            </a:r>
+            <a:endParaRPr lang="en-US" dirty="0"/>
+          </a:p>
+        </p:txBody>
+      </p:sp>
+      <p:sp>
+        <p:nvSpPr>
+          <p:cNvPr id="4" name="Slide Number Placeholder 3"/>
+          <p:cNvSpPr>
+            <a:spLocks noGrp="1"/>
+          </p:cNvSpPr>
+          <p:nvPr>
+            <p:ph type="sldNum" sz="quarter" idx="10"/>
+          </p:nvPr>
+        </p:nvSpPr>
+        <p:spPr/>
+        <p:txBody>
+          <a:bodyPr/>
+          <a:lstStyle/>
+          <a:p>
+            <a:fld id="{F7021451-1387-4CA6-816F-3879F97B5CBC}" type="slidenum">
+              <a:rPr lang="en-US"/>
+              <a:t>18</a:t>
             </a:fld>
             <a:endParaRPr lang="en-US"/>
           </a:p>
@@ -2477,7 +2655,7 @@
                 <a:ea typeface="Calibri" pitchFamily="34" charset="-122"/>
                 <a:cs typeface="Calibri" pitchFamily="34" charset="-120"/>
               </a:rPr>
-              <a:t>HUẤN LUYỆN AI</a:t>
+              <a:t>ANFIS — CHI TIẾT 1 / 2</a:t>
             </a:r>
             <a:endParaRPr lang="en-US" sz="1300" dirty="0"/>
           </a:p>
@@ -2516,7 +2694,7 @@
                 <a:ea typeface="Cambria" pitchFamily="34" charset="-122"/>
                 <a:cs typeface="Cambria" pitchFamily="34" charset="-120"/>
               </a:rPr>
-              <a:t>ANFIS được huấn luyện như thế nào?</a:t>
+              <a:t>Cơ chế hoạt động — 5 lớp mạng nơ-ron mờ</a:t>
             </a:r>
             <a:endParaRPr lang="en-US" sz="3000" dirty="0"/>
           </a:p>
@@ -2524,108 +2702,85 @@
       </p:sp>
       <p:sp>
         <p:nvSpPr>
-          <p:cNvPr id="4" name="Shape 2"/>
-          <p:cNvSpPr/>
-          <p:nvPr/>
-        </p:nvSpPr>
-        <p:spPr>
-          <a:xfrm>
-            <a:off x="548640" y="1783080"/>
-            <a:ext cx="11094415" cy="777240"/>
+          <p:cNvPr id="4" name="Text 2"/>
+          <p:cNvSpPr/>
+          <p:nvPr/>
+        </p:nvSpPr>
+        <p:spPr>
+          <a:xfrm>
+            <a:off x="548640" y="1627632"/>
+            <a:ext cx="11094415" cy="502920"/>
+          </a:xfrm>
+          <a:prstGeom prst="rect">
+            <a:avLst/>
+          </a:prstGeom>
+          <a:noFill/>
+          <a:ln/>
+        </p:spPr>
+        <p:txBody>
+          <a:bodyPr wrap="square" rtlCol="0" anchor="ctr"/>
+          <a:lstStyle/>
+          <a:p>
+            <a:pPr indent="0" marL="0">
+              <a:buNone/>
+            </a:pPr>
+            <a:r>
+              <a:rPr lang="en-US" sz="1350" dirty="0">
+                <a:solidFill>
+                  <a:srgbClr val="16212E"/>
+                </a:solidFill>
+                <a:latin typeface="Calibri" pitchFamily="34" charset="0"/>
+                <a:ea typeface="Calibri" pitchFamily="34" charset="-122"/>
+                <a:cs typeface="Calibri" pitchFamily="34" charset="-120"/>
+              </a:rPr>
+              <a:t>Đây là mạng ANFIS kiểu Jang — Sugeno bậc 1, học kiểu </a:t>
+            </a:r>
+            <a:pPr indent="0" marL="0">
+              <a:buNone/>
+            </a:pPr>
+            <a:r>
+              <a:rPr lang="en-US" sz="1350" b="1" i="1" dirty="0">
+                <a:solidFill>
+                  <a:srgbClr val="D97C2B"/>
+                </a:solidFill>
+                <a:latin typeface="Calibri" pitchFamily="34" charset="0"/>
+                <a:ea typeface="Calibri" pitchFamily="34" charset="-122"/>
+                <a:cs typeface="Calibri" pitchFamily="34" charset="-120"/>
+              </a:rPr>
+              <a:t>hybrid</a:t>
+            </a:r>
+            <a:pPr indent="0" marL="0">
+              <a:buNone/>
+            </a:pPr>
+            <a:r>
+              <a:rPr lang="en-US" sz="1350" dirty="0">
+                <a:solidFill>
+                  <a:srgbClr val="16212E"/>
+                </a:solidFill>
+                <a:latin typeface="Calibri" pitchFamily="34" charset="0"/>
+                <a:ea typeface="Calibri" pitchFamily="34" charset="-122"/>
+                <a:cs typeface="Calibri" pitchFamily="34" charset="-120"/>
+              </a:rPr>
+              <a:t>: phần mờ hoá học bằng gradient descent (lan truyền ngược), phần hệ quả học bằng bình phương tối thiểu (Least-Squares).</a:t>
+            </a:r>
+            <a:endParaRPr lang="en-US" sz="1350" dirty="0"/>
+          </a:p>
+        </p:txBody>
+      </p:sp>
+      <p:sp>
+        <p:nvSpPr>
+          <p:cNvPr id="5" name="Shape 3"/>
+          <p:cNvSpPr/>
+          <p:nvPr/>
+        </p:nvSpPr>
+        <p:spPr>
+          <a:xfrm>
+            <a:off x="548640" y="2331720"/>
+            <a:ext cx="1999427" cy="3063240"/>
           </a:xfrm>
           <a:prstGeom prst="roundRect">
             <a:avLst>
-              <a:gd name="adj" fmla="val 10588"/>
-            </a:avLst>
-          </a:prstGeom>
-          <a:solidFill>
-            <a:srgbClr val="FBEEE1"/>
-          </a:solidFill>
-          <a:ln w="12700">
-            <a:solidFill>
-              <a:srgbClr val="D97C2B"/>
-            </a:solidFill>
-            <a:prstDash val="solid"/>
-          </a:ln>
-        </p:spPr>
-      </p:sp>
-      <p:pic>
-        <p:nvPicPr>
-          <p:cNvPr id="5" name="Image 0" descr="/home/claude/output2/icons/warning-navy.png">    </p:cNvPr>
-          <p:cNvPicPr>
-            <a:picLocks noChangeAspect="1"/>
-          </p:cNvPicPr>
-          <p:nvPr/>
-        </p:nvPicPr>
-        <p:blipFill>
-          <a:blip r:embed="rId1"/>
-          <a:stretch>
-            <a:fillRect/>
-          </a:stretch>
-        </p:blipFill>
-        <p:spPr>
-          <a:xfrm>
-            <a:off x="777240" y="1965960"/>
-            <a:ext cx="411480" cy="411480"/>
-          </a:xfrm>
-          <a:prstGeom prst="rect">
-            <a:avLst/>
-          </a:prstGeom>
-        </p:spPr>
-      </p:pic>
-      <p:sp>
-        <p:nvSpPr>
-          <p:cNvPr id="6" name="Text 3"/>
-          <p:cNvSpPr/>
-          <p:nvPr/>
-        </p:nvSpPr>
-        <p:spPr>
-          <a:xfrm>
-            <a:off x="1371600" y="1783080"/>
-            <a:ext cx="10180015" cy="777240"/>
-          </a:xfrm>
-          <a:prstGeom prst="rect">
-            <a:avLst/>
-          </a:prstGeom>
-          <a:noFill/>
-          <a:ln/>
-        </p:spPr>
-        <p:txBody>
-          <a:bodyPr wrap="square" rtlCol="0" anchor="ctr"/>
-          <a:lstStyle/>
-          <a:p>
-            <a:pPr indent="0" marL="0">
-              <a:buNone/>
-            </a:pPr>
-            <a:r>
-              <a:rPr lang="en-US" sz="1400" b="1" dirty="0">
-                <a:solidFill>
-                  <a:srgbClr val="7A3B0F"/>
-                </a:solidFill>
-                <a:latin typeface="Calibri" pitchFamily="34" charset="0"/>
-                <a:ea typeface="Calibri" pitchFamily="34" charset="-122"/>
-                <a:cs typeface="Calibri" pitchFamily="34" charset="-120"/>
-              </a:rPr>
-              <a:t>Dự án CHƯA có dữ liệu lâm sàng gán nhãn thật (ảnh X-quang đã bác sĩ xác nhận đúng/sai gãy).</a:t>
-            </a:r>
-            <a:endParaRPr lang="en-US" sz="1400" dirty="0"/>
-          </a:p>
-        </p:txBody>
-      </p:sp>
-      <p:sp>
-        <p:nvSpPr>
-          <p:cNvPr id="7" name="Shape 4"/>
-          <p:cNvSpPr/>
-          <p:nvPr/>
-        </p:nvSpPr>
-        <p:spPr>
-          <a:xfrm>
-            <a:off x="548640" y="2788920"/>
-            <a:ext cx="2430704" cy="2331720"/>
-          </a:xfrm>
-          <a:prstGeom prst="roundRect">
-            <a:avLst>
-              <a:gd name="adj" fmla="val 3529"/>
+              <a:gd name="adj" fmla="val 4116"/>
             </a:avLst>
           </a:prstGeom>
           <a:solidFill>
@@ -2648,34 +2803,34 @@
       </p:sp>
       <p:sp>
         <p:nvSpPr>
-          <p:cNvPr id="8" name="Shape 5"/>
-          <p:cNvSpPr/>
-          <p:nvPr/>
-        </p:nvSpPr>
-        <p:spPr>
-          <a:xfrm>
-            <a:off x="1489672" y="3017520"/>
-            <a:ext cx="548640" cy="548640"/>
+          <p:cNvPr id="6" name="Shape 4"/>
+          <p:cNvSpPr/>
+          <p:nvPr/>
+        </p:nvSpPr>
+        <p:spPr>
+          <a:xfrm>
+            <a:off x="1292322" y="2532888"/>
+            <a:ext cx="512064" cy="512064"/>
           </a:xfrm>
           <a:prstGeom prst="ellipse">
             <a:avLst/>
           </a:prstGeom>
           <a:solidFill>
-            <a:srgbClr val="12395C"/>
+            <a:srgbClr val="D97C2B"/>
           </a:solidFill>
           <a:ln/>
         </p:spPr>
       </p:sp>
       <p:sp>
         <p:nvSpPr>
-          <p:cNvPr id="9" name="Text 6"/>
-          <p:cNvSpPr/>
-          <p:nvPr/>
-        </p:nvSpPr>
-        <p:spPr>
-          <a:xfrm>
-            <a:off x="1489672" y="3017520"/>
-            <a:ext cx="548640" cy="548640"/>
+          <p:cNvPr id="7" name="Text 5"/>
+          <p:cNvSpPr/>
+          <p:nvPr/>
+        </p:nvSpPr>
+        <p:spPr>
+          <a:xfrm>
+            <a:off x="1292322" y="2532888"/>
+            <a:ext cx="512064" cy="512064"/>
           </a:xfrm>
           <a:prstGeom prst="rect">
             <a:avLst/>
@@ -2691,7 +2846,7 @@
               <a:buNone/>
             </a:pPr>
             <a:r>
-              <a:rPr lang="en-US" sz="2000" b="1" dirty="0">
+              <a:rPr lang="en-US" sz="1900" b="1" dirty="0">
                 <a:solidFill>
                   <a:srgbClr val="FFFFFF"/>
                 </a:solidFill>
@@ -2701,29 +2856,29 @@
               </a:rPr>
               <a:t>1</a:t>
             </a:r>
-            <a:endParaRPr lang="en-US" sz="2000" dirty="0"/>
-          </a:p>
-        </p:txBody>
-      </p:sp>
-      <p:sp>
-        <p:nvSpPr>
-          <p:cNvPr id="10" name="Text 7"/>
-          <p:cNvSpPr/>
-          <p:nvPr/>
-        </p:nvSpPr>
-        <p:spPr>
-          <a:xfrm>
-            <a:off x="685800" y="3703320"/>
-            <a:ext cx="2156384" cy="502920"/>
-          </a:xfrm>
-          <a:prstGeom prst="rect">
-            <a:avLst/>
-          </a:prstGeom>
-          <a:noFill/>
-          <a:ln/>
-        </p:spPr>
-        <p:txBody>
-          <a:bodyPr wrap="square" rtlCol="0" anchor="ctr"/>
+            <a:endParaRPr lang="en-US" sz="1900" dirty="0"/>
+          </a:p>
+        </p:txBody>
+      </p:sp>
+      <p:sp>
+        <p:nvSpPr>
+          <p:cNvPr id="8" name="Text 6"/>
+          <p:cNvSpPr/>
+          <p:nvPr/>
+        </p:nvSpPr>
+        <p:spPr>
+          <a:xfrm>
+            <a:off x="658368" y="3154680"/>
+            <a:ext cx="1779971" cy="566928"/>
+          </a:xfrm>
+          <a:prstGeom prst="rect">
+            <a:avLst/>
+          </a:prstGeom>
+          <a:noFill/>
+          <a:ln/>
+        </p:spPr>
+        <p:txBody>
+          <a:bodyPr wrap="square" rtlCol="0" anchor="t"/>
           <a:lstStyle/>
           <a:p>
             <a:pPr algn="ctr" indent="0" marL="0">
@@ -2738,22 +2893,39 @@
                 <a:ea typeface="Calibri" pitchFamily="34" charset="-122"/>
                 <a:cs typeface="Calibri" pitchFamily="34" charset="-120"/>
               </a:rPr>
-              <a:t>Viết tay luật mờ chuyên gia</a:t>
+              <a:t>Mờ hoá</a:t>
             </a:r>
             <a:endParaRPr lang="en-US" sz="1250" dirty="0"/>
           </a:p>
-        </p:txBody>
-      </p:sp>
-      <p:sp>
-        <p:nvSpPr>
-          <p:cNvPr id="11" name="Text 8"/>
-          <p:cNvSpPr/>
-          <p:nvPr/>
-        </p:nvSpPr>
-        <p:spPr>
-          <a:xfrm>
-            <a:off x="685800" y="4206240"/>
-            <a:ext cx="2156384" cy="868680"/>
+          <a:p>
+            <a:pPr algn="ctr" indent="0" marL="0">
+              <a:buNone/>
+            </a:pPr>
+            <a:r>
+              <a:rPr lang="en-US" sz="1250" b="1" dirty="0">
+                <a:solidFill>
+                  <a:srgbClr val="12395C"/>
+                </a:solidFill>
+                <a:latin typeface="Calibri" pitchFamily="34" charset="0"/>
+                <a:ea typeface="Calibri" pitchFamily="34" charset="-122"/>
+                <a:cs typeface="Calibri" pitchFamily="34" charset="-120"/>
+              </a:rPr>
+              <a:t>(Fuzzify)</a:t>
+            </a:r>
+            <a:endParaRPr lang="en-US" sz="1250" dirty="0"/>
+          </a:p>
+        </p:txBody>
+      </p:sp>
+      <p:sp>
+        <p:nvSpPr>
+          <p:cNvPr id="9" name="Text 7"/>
+          <p:cNvSpPr/>
+          <p:nvPr/>
+        </p:nvSpPr>
+        <p:spPr>
+          <a:xfrm>
+            <a:off x="676656" y="3749040"/>
+            <a:ext cx="1743395" cy="1554480"/>
           </a:xfrm>
           <a:prstGeom prst="rect">
             <a:avLst/>
@@ -2769,7 +2941,7 @@
               <a:buNone/>
             </a:pPr>
             <a:r>
-              <a:rPr lang="en-US" sz="1050" dirty="0">
+              <a:rPr lang="en-US" sz="1020" dirty="0">
                 <a:solidFill>
                   <a:srgbClr val="16212E"/>
                 </a:solidFill>
@@ -2777,22 +2949,22 @@
                 <a:ea typeface="Calibri" pitchFamily="34" charset="-122"/>
                 <a:cs typeface="Calibri" pitchFamily="34" charset="-120"/>
               </a:rPr>
-              <a:t>Nhóm tự thiết kế 20 luật mờ (scikit-fuzzy) mã hoá kiến thức nghiệp vụ → làm “giáo viên” (teacher).</a:t>
-            </a:r>
-            <a:endParaRPr lang="en-US" sz="1050" dirty="0"/>
-          </a:p>
-        </p:txBody>
-      </p:sp>
-      <p:sp>
-        <p:nvSpPr>
-          <p:cNvPr id="12" name="Shape 9"/>
-          <p:cNvSpPr/>
-          <p:nvPr/>
-        </p:nvSpPr>
-        <p:spPr>
-          <a:xfrm>
-            <a:off x="3034208" y="3291840"/>
-            <a:ext cx="347472" cy="0"/>
+              <a:t>Mỗi trong 5 giá trị đầu vào (0–1) đi qua 3 hàm thành viên Gauss (thấp / trung bình / cao) → tính “mức độ thuộc về” từng mức.</a:t>
+            </a:r>
+            <a:endParaRPr lang="en-US" sz="1020" dirty="0"/>
+          </a:p>
+        </p:txBody>
+      </p:sp>
+      <p:sp>
+        <p:nvSpPr>
+          <p:cNvPr id="10" name="Shape 8"/>
+          <p:cNvSpPr/>
+          <p:nvPr/>
+        </p:nvSpPr>
+        <p:spPr>
+          <a:xfrm>
+            <a:off x="2584643" y="2788920"/>
+            <a:ext cx="201168" cy="0"/>
           </a:xfrm>
           <a:prstGeom prst="line">
             <a:avLst/>
@@ -2809,18 +2981,18 @@
       </p:sp>
       <p:sp>
         <p:nvSpPr>
-          <p:cNvPr id="13" name="Shape 10"/>
-          <p:cNvSpPr/>
-          <p:nvPr/>
-        </p:nvSpPr>
-        <p:spPr>
-          <a:xfrm>
-            <a:off x="3436544" y="2788920"/>
-            <a:ext cx="2430704" cy="2331720"/>
+          <p:cNvPr id="11" name="Shape 9"/>
+          <p:cNvSpPr/>
+          <p:nvPr/>
+        </p:nvSpPr>
+        <p:spPr>
+          <a:xfrm>
+            <a:off x="2822387" y="2331720"/>
+            <a:ext cx="1999427" cy="3063240"/>
           </a:xfrm>
           <a:prstGeom prst="roundRect">
             <a:avLst>
-              <a:gd name="adj" fmla="val 3529"/>
+              <a:gd name="adj" fmla="val 4116"/>
             </a:avLst>
           </a:prstGeom>
           <a:solidFill>
@@ -2843,34 +3015,34 @@
       </p:sp>
       <p:sp>
         <p:nvSpPr>
-          <p:cNvPr id="14" name="Shape 11"/>
-          <p:cNvSpPr/>
-          <p:nvPr/>
-        </p:nvSpPr>
-        <p:spPr>
-          <a:xfrm>
-            <a:off x="4377576" y="3017520"/>
-            <a:ext cx="548640" cy="548640"/>
+          <p:cNvPr id="12" name="Shape 10"/>
+          <p:cNvSpPr/>
+          <p:nvPr/>
+        </p:nvSpPr>
+        <p:spPr>
+          <a:xfrm>
+            <a:off x="3566069" y="2532888"/>
+            <a:ext cx="512064" cy="512064"/>
           </a:xfrm>
           <a:prstGeom prst="ellipse">
             <a:avLst/>
           </a:prstGeom>
           <a:solidFill>
-            <a:srgbClr val="12395C"/>
+            <a:srgbClr val="D97C2B"/>
           </a:solidFill>
           <a:ln/>
         </p:spPr>
       </p:sp>
       <p:sp>
         <p:nvSpPr>
-          <p:cNvPr id="15" name="Text 12"/>
-          <p:cNvSpPr/>
-          <p:nvPr/>
-        </p:nvSpPr>
-        <p:spPr>
-          <a:xfrm>
-            <a:off x="4377576" y="3017520"/>
-            <a:ext cx="548640" cy="548640"/>
+          <p:cNvPr id="13" name="Text 11"/>
+          <p:cNvSpPr/>
+          <p:nvPr/>
+        </p:nvSpPr>
+        <p:spPr>
+          <a:xfrm>
+            <a:off x="3566069" y="2532888"/>
+            <a:ext cx="512064" cy="512064"/>
           </a:xfrm>
           <a:prstGeom prst="rect">
             <a:avLst/>
@@ -2886,7 +3058,7 @@
               <a:buNone/>
             </a:pPr>
             <a:r>
-              <a:rPr lang="en-US" sz="2000" b="1" dirty="0">
+              <a:rPr lang="en-US" sz="1900" b="1" dirty="0">
                 <a:solidFill>
                   <a:srgbClr val="FFFFFF"/>
                 </a:solidFill>
@@ -2896,29 +3068,29 @@
               </a:rPr>
               <a:t>2</a:t>
             </a:r>
-            <a:endParaRPr lang="en-US" sz="2000" dirty="0"/>
-          </a:p>
-        </p:txBody>
-      </p:sp>
-      <p:sp>
-        <p:nvSpPr>
-          <p:cNvPr id="16" name="Text 13"/>
-          <p:cNvSpPr/>
-          <p:nvPr/>
-        </p:nvSpPr>
-        <p:spPr>
-          <a:xfrm>
-            <a:off x="3573704" y="3703320"/>
-            <a:ext cx="2156384" cy="502920"/>
-          </a:xfrm>
-          <a:prstGeom prst="rect">
-            <a:avLst/>
-          </a:prstGeom>
-          <a:noFill/>
-          <a:ln/>
-        </p:spPr>
-        <p:txBody>
-          <a:bodyPr wrap="square" rtlCol="0" anchor="ctr"/>
+            <a:endParaRPr lang="en-US" sz="1900" dirty="0"/>
+          </a:p>
+        </p:txBody>
+      </p:sp>
+      <p:sp>
+        <p:nvSpPr>
+          <p:cNvPr id="14" name="Text 12"/>
+          <p:cNvSpPr/>
+          <p:nvPr/>
+        </p:nvSpPr>
+        <p:spPr>
+          <a:xfrm>
+            <a:off x="2932115" y="3154680"/>
+            <a:ext cx="1779971" cy="566928"/>
+          </a:xfrm>
+          <a:prstGeom prst="rect">
+            <a:avLst/>
+          </a:prstGeom>
+          <a:noFill/>
+          <a:ln/>
+        </p:spPr>
+        <p:txBody>
+          <a:bodyPr wrap="square" rtlCol="0" anchor="t"/>
           <a:lstStyle/>
           <a:p>
             <a:pPr algn="ctr" indent="0" marL="0">
@@ -2933,22 +3105,39 @@
                 <a:ea typeface="Calibri" pitchFamily="34" charset="-122"/>
                 <a:cs typeface="Calibri" pitchFamily="34" charset="-120"/>
               </a:rPr>
-              <a:t>Sinh dữ liệu tổng hợp</a:t>
+              <a:t>Luật mờ</a:t>
             </a:r>
             <a:endParaRPr lang="en-US" sz="1250" dirty="0"/>
           </a:p>
-        </p:txBody>
-      </p:sp>
-      <p:sp>
-        <p:nvSpPr>
-          <p:cNvPr id="17" name="Text 14"/>
-          <p:cNvSpPr/>
-          <p:nvPr/>
-        </p:nvSpPr>
-        <p:spPr>
-          <a:xfrm>
-            <a:off x="3573704" y="4206240"/>
-            <a:ext cx="2156384" cy="868680"/>
+          <a:p>
+            <a:pPr algn="ctr" indent="0" marL="0">
+              <a:buNone/>
+            </a:pPr>
+            <a:r>
+              <a:rPr lang="en-US" sz="1250" b="1" dirty="0">
+                <a:solidFill>
+                  <a:srgbClr val="12395C"/>
+                </a:solidFill>
+                <a:latin typeface="Calibri" pitchFamily="34" charset="0"/>
+                <a:ea typeface="Calibri" pitchFamily="34" charset="-122"/>
+                <a:cs typeface="Calibri" pitchFamily="34" charset="-120"/>
+              </a:rPr>
+              <a:t>(AND = tích số)</a:t>
+            </a:r>
+            <a:endParaRPr lang="en-US" sz="1250" dirty="0"/>
+          </a:p>
+        </p:txBody>
+      </p:sp>
+      <p:sp>
+        <p:nvSpPr>
+          <p:cNvPr id="15" name="Text 13"/>
+          <p:cNvSpPr/>
+          <p:nvPr/>
+        </p:nvSpPr>
+        <p:spPr>
+          <a:xfrm>
+            <a:off x="2950403" y="3749040"/>
+            <a:ext cx="1743395" cy="1554480"/>
           </a:xfrm>
           <a:prstGeom prst="rect">
             <a:avLst/>
@@ -2964,7 +3153,7 @@
               <a:buNone/>
             </a:pPr>
             <a:r>
-              <a:rPr lang="en-US" sz="1050" dirty="0">
+              <a:rPr lang="en-US" sz="1020" dirty="0">
                 <a:solidFill>
                   <a:srgbClr val="16212E"/>
                 </a:solidFill>
@@ -2972,22 +3161,22 @@
                 <a:ea typeface="Calibri" pitchFamily="34" charset="-122"/>
                 <a:cs typeface="Calibri" pitchFamily="34" charset="-120"/>
               </a:rPr>
-              <a:t>Sinh ngẫu nhiên 8.000 mẫu 5 chiều, cho giáo viên chấm điểm để tạo nhãn “đúng” cho từng mẫu.</a:t>
-            </a:r>
-            <a:endParaRPr lang="en-US" sz="1050" dirty="0"/>
-          </a:p>
-        </p:txBody>
-      </p:sp>
-      <p:sp>
-        <p:nvSpPr>
-          <p:cNvPr id="18" name="Shape 15"/>
-          <p:cNvSpPr/>
-          <p:nvPr/>
-        </p:nvSpPr>
-        <p:spPr>
-          <a:xfrm>
-            <a:off x="5922112" y="3291840"/>
-            <a:ext cx="347472" cy="0"/>
+              <a:t>Nhân mức độ thuộc về của cả 5 đặc trưng theo từng tổ hợp luật → tối đa 3⁵ = 243 luật, mỗi luật có một “độ mạnh kích hoạt”.</a:t>
+            </a:r>
+            <a:endParaRPr lang="en-US" sz="1020" dirty="0"/>
+          </a:p>
+        </p:txBody>
+      </p:sp>
+      <p:sp>
+        <p:nvSpPr>
+          <p:cNvPr id="16" name="Shape 14"/>
+          <p:cNvSpPr/>
+          <p:nvPr/>
+        </p:nvSpPr>
+        <p:spPr>
+          <a:xfrm>
+            <a:off x="4858390" y="2788920"/>
+            <a:ext cx="201168" cy="0"/>
           </a:xfrm>
           <a:prstGeom prst="line">
             <a:avLst/>
@@ -3004,18 +3193,18 @@
       </p:sp>
       <p:sp>
         <p:nvSpPr>
-          <p:cNvPr id="19" name="Shape 16"/>
-          <p:cNvSpPr/>
-          <p:nvPr/>
-        </p:nvSpPr>
-        <p:spPr>
-          <a:xfrm>
-            <a:off x="6324448" y="2788920"/>
-            <a:ext cx="2430704" cy="2331720"/>
+          <p:cNvPr id="17" name="Shape 15"/>
+          <p:cNvSpPr/>
+          <p:nvPr/>
+        </p:nvSpPr>
+        <p:spPr>
+          <a:xfrm>
+            <a:off x="5096134" y="2331720"/>
+            <a:ext cx="1999427" cy="3063240"/>
           </a:xfrm>
           <a:prstGeom prst="roundRect">
             <a:avLst>
-              <a:gd name="adj" fmla="val 3529"/>
+              <a:gd name="adj" fmla="val 4116"/>
             </a:avLst>
           </a:prstGeom>
           <a:solidFill>
@@ -3038,34 +3227,34 @@
       </p:sp>
       <p:sp>
         <p:nvSpPr>
-          <p:cNvPr id="20" name="Shape 17"/>
-          <p:cNvSpPr/>
-          <p:nvPr/>
-        </p:nvSpPr>
-        <p:spPr>
-          <a:xfrm>
-            <a:off x="7265480" y="3017520"/>
-            <a:ext cx="548640" cy="548640"/>
+          <p:cNvPr id="18" name="Shape 16"/>
+          <p:cNvSpPr/>
+          <p:nvPr/>
+        </p:nvSpPr>
+        <p:spPr>
+          <a:xfrm>
+            <a:off x="5839816" y="2532888"/>
+            <a:ext cx="512064" cy="512064"/>
           </a:xfrm>
           <a:prstGeom prst="ellipse">
             <a:avLst/>
           </a:prstGeom>
           <a:solidFill>
-            <a:srgbClr val="12395C"/>
+            <a:srgbClr val="D97C2B"/>
           </a:solidFill>
           <a:ln/>
         </p:spPr>
       </p:sp>
       <p:sp>
         <p:nvSpPr>
-          <p:cNvPr id="21" name="Text 18"/>
-          <p:cNvSpPr/>
-          <p:nvPr/>
-        </p:nvSpPr>
-        <p:spPr>
-          <a:xfrm>
-            <a:off x="7265480" y="3017520"/>
-            <a:ext cx="548640" cy="548640"/>
+          <p:cNvPr id="19" name="Text 17"/>
+          <p:cNvSpPr/>
+          <p:nvPr/>
+        </p:nvSpPr>
+        <p:spPr>
+          <a:xfrm>
+            <a:off x="5839816" y="2532888"/>
+            <a:ext cx="512064" cy="512064"/>
           </a:xfrm>
           <a:prstGeom prst="rect">
             <a:avLst/>
@@ -3081,7 +3270,7 @@
               <a:buNone/>
             </a:pPr>
             <a:r>
-              <a:rPr lang="en-US" sz="2000" b="1" dirty="0">
+              <a:rPr lang="en-US" sz="1900" b="1" dirty="0">
                 <a:solidFill>
                   <a:srgbClr val="FFFFFF"/>
                 </a:solidFill>
@@ -3091,29 +3280,29 @@
               </a:rPr>
               <a:t>3</a:t>
             </a:r>
-            <a:endParaRPr lang="en-US" sz="2000" dirty="0"/>
-          </a:p>
-        </p:txBody>
-      </p:sp>
-      <p:sp>
-        <p:nvSpPr>
-          <p:cNvPr id="22" name="Text 19"/>
-          <p:cNvSpPr/>
-          <p:nvPr/>
-        </p:nvSpPr>
-        <p:spPr>
-          <a:xfrm>
-            <a:off x="6461608" y="3703320"/>
-            <a:ext cx="2156384" cy="502920"/>
-          </a:xfrm>
-          <a:prstGeom prst="rect">
-            <a:avLst/>
-          </a:prstGeom>
-          <a:noFill/>
-          <a:ln/>
-        </p:spPr>
-        <p:txBody>
-          <a:bodyPr wrap="square" rtlCol="0" anchor="ctr"/>
+            <a:endParaRPr lang="en-US" sz="1900" dirty="0"/>
+          </a:p>
+        </p:txBody>
+      </p:sp>
+      <p:sp>
+        <p:nvSpPr>
+          <p:cNvPr id="20" name="Text 18"/>
+          <p:cNvSpPr/>
+          <p:nvPr/>
+        </p:nvSpPr>
+        <p:spPr>
+          <a:xfrm>
+            <a:off x="5205862" y="3154680"/>
+            <a:ext cx="1779971" cy="566928"/>
+          </a:xfrm>
+          <a:prstGeom prst="rect">
+            <a:avLst/>
+          </a:prstGeom>
+          <a:noFill/>
+          <a:ln/>
+        </p:spPr>
+        <p:txBody>
+          <a:bodyPr wrap="square" rtlCol="0" anchor="t"/>
           <a:lstStyle/>
           <a:p>
             <a:pPr algn="ctr" indent="0" marL="0">
@@ -3128,7 +3317,7 @@
                 <a:ea typeface="Calibri" pitchFamily="34" charset="-122"/>
                 <a:cs typeface="Calibri" pitchFamily="34" charset="-120"/>
               </a:rPr>
-              <a:t>Huấn luyện mạng ANFIS</a:t>
+              <a:t>Chuẩn hoá</a:t>
             </a:r>
             <a:endParaRPr lang="en-US" sz="1250" dirty="0"/>
           </a:p>
@@ -3136,14 +3325,14 @@
       </p:sp>
       <p:sp>
         <p:nvSpPr>
-          <p:cNvPr id="23" name="Text 20"/>
-          <p:cNvSpPr/>
-          <p:nvPr/>
-        </p:nvSpPr>
-        <p:spPr>
-          <a:xfrm>
-            <a:off x="6461608" y="4206240"/>
-            <a:ext cx="2156384" cy="868680"/>
+          <p:cNvPr id="21" name="Text 19"/>
+          <p:cNvSpPr/>
+          <p:nvPr/>
+        </p:nvSpPr>
+        <p:spPr>
+          <a:xfrm>
+            <a:off x="5224150" y="3749040"/>
+            <a:ext cx="1743395" cy="1554480"/>
           </a:xfrm>
           <a:prstGeom prst="rect">
             <a:avLst/>
@@ -3159,7 +3348,7 @@
               <a:buNone/>
             </a:pPr>
             <a:r>
-              <a:rPr lang="en-US" sz="1050" dirty="0">
+              <a:rPr lang="en-US" sz="1020" dirty="0">
                 <a:solidFill>
                   <a:srgbClr val="16212E"/>
                 </a:solidFill>
@@ -3167,22 +3356,22 @@
                 <a:ea typeface="Calibri" pitchFamily="34" charset="-122"/>
                 <a:cs typeface="Calibri" pitchFamily="34" charset="-120"/>
               </a:rPr>
-              <a:t>Train 80 epoch, batch size 128, learning rate 0.003 — để mạng tái tạo lại đúng đầu ra của giáo viên.</a:t>
-            </a:r>
-            <a:endParaRPr lang="en-US" sz="1050" dirty="0"/>
-          </a:p>
-        </p:txBody>
-      </p:sp>
-      <p:sp>
-        <p:nvSpPr>
-          <p:cNvPr id="24" name="Shape 21"/>
-          <p:cNvSpPr/>
-          <p:nvPr/>
-        </p:nvSpPr>
-        <p:spPr>
-          <a:xfrm>
-            <a:off x="8810015" y="3291840"/>
-            <a:ext cx="347472" cy="0"/>
+              <a:t>Chia độ mạnh của mỗi luật cho tổng độ mạnh tất cả luật → ra tỉ trọng đóng góp (0–1) của từng luật vào kết quả cuối.</a:t>
+            </a:r>
+            <a:endParaRPr lang="en-US" sz="1020" dirty="0"/>
+          </a:p>
+        </p:txBody>
+      </p:sp>
+      <p:sp>
+        <p:nvSpPr>
+          <p:cNvPr id="22" name="Shape 20"/>
+          <p:cNvSpPr/>
+          <p:nvPr/>
+        </p:nvSpPr>
+        <p:spPr>
+          <a:xfrm>
+            <a:off x="7132137" y="2788920"/>
+            <a:ext cx="201168" cy="0"/>
           </a:xfrm>
           <a:prstGeom prst="line">
             <a:avLst/>
@@ -3199,18 +3388,18 @@
       </p:sp>
       <p:sp>
         <p:nvSpPr>
-          <p:cNvPr id="25" name="Shape 22"/>
-          <p:cNvSpPr/>
-          <p:nvPr/>
-        </p:nvSpPr>
-        <p:spPr>
-          <a:xfrm>
-            <a:off x="9212351" y="2788920"/>
-            <a:ext cx="2430704" cy="2331720"/>
+          <p:cNvPr id="23" name="Shape 21"/>
+          <p:cNvSpPr/>
+          <p:nvPr/>
+        </p:nvSpPr>
+        <p:spPr>
+          <a:xfrm>
+            <a:off x="7369881" y="2331720"/>
+            <a:ext cx="1999427" cy="3063240"/>
           </a:xfrm>
           <a:prstGeom prst="roundRect">
             <a:avLst>
-              <a:gd name="adj" fmla="val 3529"/>
+              <a:gd name="adj" fmla="val 4116"/>
             </a:avLst>
           </a:prstGeom>
           <a:solidFill>
@@ -3233,34 +3422,34 @@
       </p:sp>
       <p:sp>
         <p:nvSpPr>
-          <p:cNvPr id="26" name="Shape 23"/>
-          <p:cNvSpPr/>
-          <p:nvPr/>
-        </p:nvSpPr>
-        <p:spPr>
-          <a:xfrm>
-            <a:off x="10153383" y="3017520"/>
-            <a:ext cx="548640" cy="548640"/>
+          <p:cNvPr id="24" name="Shape 22"/>
+          <p:cNvSpPr/>
+          <p:nvPr/>
+        </p:nvSpPr>
+        <p:spPr>
+          <a:xfrm>
+            <a:off x="8113563" y="2532888"/>
+            <a:ext cx="512064" cy="512064"/>
           </a:xfrm>
           <a:prstGeom prst="ellipse">
             <a:avLst/>
           </a:prstGeom>
           <a:solidFill>
-            <a:srgbClr val="12395C"/>
+            <a:srgbClr val="D97C2B"/>
           </a:solidFill>
           <a:ln/>
         </p:spPr>
       </p:sp>
       <p:sp>
         <p:nvSpPr>
-          <p:cNvPr id="27" name="Text 24"/>
-          <p:cNvSpPr/>
-          <p:nvPr/>
-        </p:nvSpPr>
-        <p:spPr>
-          <a:xfrm>
-            <a:off x="10153383" y="3017520"/>
-            <a:ext cx="548640" cy="548640"/>
+          <p:cNvPr id="25" name="Text 23"/>
+          <p:cNvSpPr/>
+          <p:nvPr/>
+        </p:nvSpPr>
+        <p:spPr>
+          <a:xfrm>
+            <a:off x="8113563" y="2532888"/>
+            <a:ext cx="512064" cy="512064"/>
           </a:xfrm>
           <a:prstGeom prst="rect">
             <a:avLst/>
@@ -3276,7 +3465,7 @@
               <a:buNone/>
             </a:pPr>
             <a:r>
-              <a:rPr lang="en-US" sz="2000" b="1" dirty="0">
+              <a:rPr lang="en-US" sz="1900" b="1" dirty="0">
                 <a:solidFill>
                   <a:srgbClr val="FFFFFF"/>
                 </a:solidFill>
@@ -3286,29 +3475,29 @@
               </a:rPr>
               <a:t>4</a:t>
             </a:r>
-            <a:endParaRPr lang="en-US" sz="2000" dirty="0"/>
-          </a:p>
-        </p:txBody>
-      </p:sp>
-      <p:sp>
-        <p:nvSpPr>
-          <p:cNvPr id="28" name="Text 25"/>
-          <p:cNvSpPr/>
-          <p:nvPr/>
-        </p:nvSpPr>
-        <p:spPr>
-          <a:xfrm>
-            <a:off x="9349511" y="3703320"/>
-            <a:ext cx="2156384" cy="502920"/>
-          </a:xfrm>
-          <a:prstGeom prst="rect">
-            <a:avLst/>
-          </a:prstGeom>
-          <a:noFill/>
-          <a:ln/>
-        </p:spPr>
-        <p:txBody>
-          <a:bodyPr wrap="square" rtlCol="0" anchor="ctr"/>
+            <a:endParaRPr lang="en-US" sz="1900" dirty="0"/>
+          </a:p>
+        </p:txBody>
+      </p:sp>
+      <p:sp>
+        <p:nvSpPr>
+          <p:cNvPr id="26" name="Text 24"/>
+          <p:cNvSpPr/>
+          <p:nvPr/>
+        </p:nvSpPr>
+        <p:spPr>
+          <a:xfrm>
+            <a:off x="7479609" y="3154680"/>
+            <a:ext cx="1779971" cy="566928"/>
+          </a:xfrm>
+          <a:prstGeom prst="rect">
+            <a:avLst/>
+          </a:prstGeom>
+          <a:noFill/>
+          <a:ln/>
+        </p:spPr>
+        <p:txBody>
+          <a:bodyPr wrap="square" rtlCol="0" anchor="t"/>
           <a:lstStyle/>
           <a:p>
             <a:pPr algn="ctr" indent="0" marL="0">
@@ -3323,22 +3512,39 @@
                 <a:ea typeface="Calibri" pitchFamily="34" charset="-122"/>
                 <a:cs typeface="Calibri" pitchFamily="34" charset="-120"/>
               </a:rPr>
-              <a:t>Lưu trọng số + cơ chế dự phòng</a:t>
+              <a:t>Hệ quả TSK</a:t>
             </a:r>
             <a:endParaRPr lang="en-US" sz="1250" dirty="0"/>
           </a:p>
-        </p:txBody>
-      </p:sp>
-      <p:sp>
-        <p:nvSpPr>
-          <p:cNvPr id="29" name="Text 26"/>
-          <p:cNvSpPr/>
-          <p:nvPr/>
-        </p:nvSpPr>
-        <p:spPr>
-          <a:xfrm>
-            <a:off x="9349511" y="4206240"/>
-            <a:ext cx="2156384" cy="868680"/>
+          <a:p>
+            <a:pPr algn="ctr" indent="0" marL="0">
+              <a:buNone/>
+            </a:pPr>
+            <a:r>
+              <a:rPr lang="en-US" sz="1250" b="1" dirty="0">
+                <a:solidFill>
+                  <a:srgbClr val="12395C"/>
+                </a:solidFill>
+                <a:latin typeface="Calibri" pitchFamily="34" charset="0"/>
+                <a:ea typeface="Calibri" pitchFamily="34" charset="-122"/>
+                <a:cs typeface="Calibri" pitchFamily="34" charset="-120"/>
+              </a:rPr>
+              <a:t>(tuyến tính)</a:t>
+            </a:r>
+            <a:endParaRPr lang="en-US" sz="1250" dirty="0"/>
+          </a:p>
+        </p:txBody>
+      </p:sp>
+      <p:sp>
+        <p:nvSpPr>
+          <p:cNvPr id="27" name="Text 25"/>
+          <p:cNvSpPr/>
+          <p:nvPr/>
+        </p:nvSpPr>
+        <p:spPr>
+          <a:xfrm>
+            <a:off x="7497897" y="3749040"/>
+            <a:ext cx="1743395" cy="1554480"/>
           </a:xfrm>
           <a:prstGeom prst="rect">
             <a:avLst/>
@@ -3354,7 +3560,7 @@
               <a:buNone/>
             </a:pPr>
             <a:r>
-              <a:rPr lang="en-US" sz="1050" dirty="0">
+              <a:rPr lang="en-US" sz="1020" dirty="0">
                 <a:solidFill>
                   <a:srgbClr val="16212E"/>
                 </a:solidFill>
@@ -3362,26 +3568,238 @@
                 <a:ea typeface="Calibri" pitchFamily="34" charset="-122"/>
                 <a:cs typeface="Calibri" pitchFamily="34" charset="-120"/>
               </a:rPr>
-              <a:t>Lưu weights đã học; nếu file lỗi/thiếu → tự động fallback dùng lại hệ luật viết tay, hệ thống không bao giờ “chết”.</a:t>
-            </a:r>
-            <a:endParaRPr lang="en-US" sz="1050" dirty="0"/>
-          </a:p>
-        </p:txBody>
-      </p:sp>
-      <p:sp>
-        <p:nvSpPr>
-          <p:cNvPr id="30" name="Shape 27"/>
-          <p:cNvSpPr/>
-          <p:nvPr/>
-        </p:nvSpPr>
-        <p:spPr>
-          <a:xfrm>
-            <a:off x="548640" y="5349240"/>
-            <a:ext cx="11094415" cy="868680"/>
+              <a:t>Mỗi luật có một hàm tuyến tính riêng theo 5 đầu vào (Takagi-Sugeno). Hệ số được học bằng bình phương tối thiểu, không phải lan truyền ngược thuần tuý.</a:t>
+            </a:r>
+            <a:endParaRPr lang="en-US" sz="1020" dirty="0"/>
+          </a:p>
+        </p:txBody>
+      </p:sp>
+      <p:sp>
+        <p:nvSpPr>
+          <p:cNvPr id="28" name="Shape 26"/>
+          <p:cNvSpPr/>
+          <p:nvPr/>
+        </p:nvSpPr>
+        <p:spPr>
+          <a:xfrm>
+            <a:off x="9405884" y="2788920"/>
+            <a:ext cx="201168" cy="0"/>
+          </a:xfrm>
+          <a:prstGeom prst="line">
+            <a:avLst/>
+          </a:prstGeom>
+          <a:noFill/>
+          <a:ln w="19050">
+            <a:solidFill>
+              <a:srgbClr val="5B6774"/>
+            </a:solidFill>
+            <a:prstDash val="solid"/>
+            <a:tailEnd type="triangle"/>
+          </a:ln>
+        </p:spPr>
+      </p:sp>
+      <p:sp>
+        <p:nvSpPr>
+          <p:cNvPr id="29" name="Shape 27"/>
+          <p:cNvSpPr/>
+          <p:nvPr/>
+        </p:nvSpPr>
+        <p:spPr>
+          <a:xfrm>
+            <a:off x="9643628" y="2331720"/>
+            <a:ext cx="1999427" cy="3063240"/>
           </a:xfrm>
           <a:prstGeom prst="roundRect">
             <a:avLst>
-              <a:gd name="adj" fmla="val 9474"/>
+              <a:gd name="adj" fmla="val 4116"/>
+            </a:avLst>
+          </a:prstGeom>
+          <a:solidFill>
+            <a:srgbClr val="EEF3F8"/>
+          </a:solidFill>
+          <a:ln w="12700">
+            <a:solidFill>
+              <a:srgbClr val="D6DEE6"/>
+            </a:solidFill>
+            <a:prstDash val="solid"/>
+          </a:ln>
+          <a:effectLst>
+            <a:outerShdw sx="100000" sy="100000" kx="0" ky="0" algn="bl" rotWithShape="0" blurRad="101600" dist="38100" dir="5400000">
+              <a:srgbClr val="9AA7B4">
+                <a:alpha val="28000"/>
+              </a:srgbClr>
+            </a:outerShdw>
+          </a:effectLst>
+        </p:spPr>
+      </p:sp>
+      <p:sp>
+        <p:nvSpPr>
+          <p:cNvPr id="30" name="Shape 28"/>
+          <p:cNvSpPr/>
+          <p:nvPr/>
+        </p:nvSpPr>
+        <p:spPr>
+          <a:xfrm>
+            <a:off x="10387310" y="2532888"/>
+            <a:ext cx="512064" cy="512064"/>
+          </a:xfrm>
+          <a:prstGeom prst="ellipse">
+            <a:avLst/>
+          </a:prstGeom>
+          <a:solidFill>
+            <a:srgbClr val="D97C2B"/>
+          </a:solidFill>
+          <a:ln/>
+        </p:spPr>
+      </p:sp>
+      <p:sp>
+        <p:nvSpPr>
+          <p:cNvPr id="31" name="Text 29"/>
+          <p:cNvSpPr/>
+          <p:nvPr/>
+        </p:nvSpPr>
+        <p:spPr>
+          <a:xfrm>
+            <a:off x="10387310" y="2532888"/>
+            <a:ext cx="512064" cy="512064"/>
+          </a:xfrm>
+          <a:prstGeom prst="rect">
+            <a:avLst/>
+          </a:prstGeom>
+          <a:noFill/>
+          <a:ln/>
+        </p:spPr>
+        <p:txBody>
+          <a:bodyPr wrap="square" rtlCol="0" anchor="ctr"/>
+          <a:lstStyle/>
+          <a:p>
+            <a:pPr algn="ctr" indent="0" marL="0">
+              <a:buNone/>
+            </a:pPr>
+            <a:r>
+              <a:rPr lang="en-US" sz="1900" b="1" dirty="0">
+                <a:solidFill>
+                  <a:srgbClr val="FFFFFF"/>
+                </a:solidFill>
+                <a:latin typeface="Cambria" pitchFamily="34" charset="0"/>
+                <a:ea typeface="Cambria" pitchFamily="34" charset="-122"/>
+                <a:cs typeface="Cambria" pitchFamily="34" charset="-120"/>
+              </a:rPr>
+              <a:t>5</a:t>
+            </a:r>
+            <a:endParaRPr lang="en-US" sz="1900" dirty="0"/>
+          </a:p>
+        </p:txBody>
+      </p:sp>
+      <p:sp>
+        <p:nvSpPr>
+          <p:cNvPr id="32" name="Text 30"/>
+          <p:cNvSpPr/>
+          <p:nvPr/>
+        </p:nvSpPr>
+        <p:spPr>
+          <a:xfrm>
+            <a:off x="9753356" y="3154680"/>
+            <a:ext cx="1779971" cy="566928"/>
+          </a:xfrm>
+          <a:prstGeom prst="rect">
+            <a:avLst/>
+          </a:prstGeom>
+          <a:noFill/>
+          <a:ln/>
+        </p:spPr>
+        <p:txBody>
+          <a:bodyPr wrap="square" rtlCol="0" anchor="t"/>
+          <a:lstStyle/>
+          <a:p>
+            <a:pPr algn="ctr" indent="0" marL="0">
+              <a:buNone/>
+            </a:pPr>
+            <a:r>
+              <a:rPr lang="en-US" sz="1250" b="1" dirty="0">
+                <a:solidFill>
+                  <a:srgbClr val="12395C"/>
+                </a:solidFill>
+                <a:latin typeface="Calibri" pitchFamily="34" charset="0"/>
+                <a:ea typeface="Calibri" pitchFamily="34" charset="-122"/>
+                <a:cs typeface="Calibri" pitchFamily="34" charset="-120"/>
+              </a:rPr>
+              <a:t>Tổng hợp</a:t>
+            </a:r>
+            <a:endParaRPr lang="en-US" sz="1250" dirty="0"/>
+          </a:p>
+          <a:p>
+            <a:pPr algn="ctr" indent="0" marL="0">
+              <a:buNone/>
+            </a:pPr>
+            <a:r>
+              <a:rPr lang="en-US" sz="1250" b="1" dirty="0">
+                <a:solidFill>
+                  <a:srgbClr val="12395C"/>
+                </a:solidFill>
+                <a:latin typeface="Calibri" pitchFamily="34" charset="0"/>
+                <a:ea typeface="Calibri" pitchFamily="34" charset="-122"/>
+                <a:cs typeface="Calibri" pitchFamily="34" charset="-120"/>
+              </a:rPr>
+              <a:t>có trọng số</a:t>
+            </a:r>
+            <a:endParaRPr lang="en-US" sz="1250" dirty="0"/>
+          </a:p>
+        </p:txBody>
+      </p:sp>
+      <p:sp>
+        <p:nvSpPr>
+          <p:cNvPr id="33" name="Text 31"/>
+          <p:cNvSpPr/>
+          <p:nvPr/>
+        </p:nvSpPr>
+        <p:spPr>
+          <a:xfrm>
+            <a:off x="9771644" y="3749040"/>
+            <a:ext cx="1743395" cy="1554480"/>
+          </a:xfrm>
+          <a:prstGeom prst="rect">
+            <a:avLst/>
+          </a:prstGeom>
+          <a:noFill/>
+          <a:ln/>
+        </p:spPr>
+        <p:txBody>
+          <a:bodyPr wrap="square" rtlCol="0" anchor="t"/>
+          <a:lstStyle/>
+          <a:p>
+            <a:pPr algn="ctr" indent="0" marL="0">
+              <a:buNone/>
+            </a:pPr>
+            <a:r>
+              <a:rPr lang="en-US" sz="1020" dirty="0">
+                <a:solidFill>
+                  <a:srgbClr val="16212E"/>
+                </a:solidFill>
+                <a:latin typeface="Calibri" pitchFamily="34" charset="0"/>
+                <a:ea typeface="Calibri" pitchFamily="34" charset="-122"/>
+                <a:cs typeface="Calibri" pitchFamily="34" charset="-120"/>
+              </a:rPr>
+              <a:t>Cộng có trọng số đầu ra của tất cả các luật (theo tỉ trọng ở Lớp 3) → ra điểm rủi ro gãy xương cuối cùng.</a:t>
+            </a:r>
+            <a:endParaRPr lang="en-US" sz="1020" dirty="0"/>
+          </a:p>
+        </p:txBody>
+      </p:sp>
+      <p:sp>
+        <p:nvSpPr>
+          <p:cNvPr id="34" name="Shape 32"/>
+          <p:cNvSpPr/>
+          <p:nvPr/>
+        </p:nvSpPr>
+        <p:spPr>
+          <a:xfrm>
+            <a:off x="548640" y="5623560"/>
+            <a:ext cx="11094415" cy="658368"/>
+          </a:xfrm>
+          <a:prstGeom prst="roundRect">
+            <a:avLst>
+              <a:gd name="adj" fmla="val 12500"/>
             </a:avLst>
           </a:prstGeom>
           <a:solidFill>
@@ -3397,14 +3815,14 @@
       </p:sp>
       <p:sp>
         <p:nvSpPr>
-          <p:cNvPr id="31" name="Text 28"/>
-          <p:cNvSpPr/>
-          <p:nvPr/>
-        </p:nvSpPr>
-        <p:spPr>
-          <a:xfrm>
-            <a:off x="777240" y="5349240"/>
-            <a:ext cx="10637215" cy="868680"/>
+          <p:cNvPr id="35" name="Text 33"/>
+          <p:cNvSpPr/>
+          <p:nvPr/>
+        </p:nvSpPr>
+        <p:spPr>
+          <a:xfrm>
+            <a:off x="777240" y="5623560"/>
+            <a:ext cx="10637215" cy="658368"/>
           </a:xfrm>
           <a:prstGeom prst="rect">
             <a:avLst/>
@@ -3420,7 +3838,7 @@
               <a:buNone/>
             </a:pPr>
             <a:r>
-              <a:rPr lang="en-US" sz="1250" b="1" dirty="0">
+              <a:rPr lang="en-US" sz="1200" b="1" dirty="0">
                 <a:solidFill>
                   <a:srgbClr val="1C7293"/>
                 </a:solidFill>
@@ -3428,13 +3846,13 @@
                 <a:ea typeface="Calibri" pitchFamily="34" charset="-122"/>
                 <a:cs typeface="Calibri" pitchFamily="34" charset="-120"/>
               </a:rPr>
-              <a:t>Câu trả lời gợi ý khi bị hỏi “ANFIS train trên dữ liệu gì”:  </a:t>
+              <a:t>Nói ngắn gọn: </a:t>
             </a:r>
             <a:pPr indent="0" marL="0">
               <a:buNone/>
             </a:pPr>
             <a:r>
-              <a:rPr lang="en-US" sz="1250" i="1" dirty="0">
+              <a:rPr lang="en-US" sz="1200" dirty="0">
                 <a:solidFill>
                   <a:srgbClr val="16212E"/>
                 </a:solidFill>
@@ -3442,15 +3860,15 @@
                 <a:ea typeface="Calibri" pitchFamily="34" charset="-122"/>
                 <a:cs typeface="Calibri" pitchFamily="34" charset="-120"/>
               </a:rPr>
-              <a:t>“ANFIS không train trên dữ liệu bệnh nhân thật, mà học lại cách suy luận của một hệ luật mờ do nhóm tự thiết kế — kỹ thuật distillation.”</a:t>
-            </a:r>
-            <a:endParaRPr lang="en-US" sz="1250" dirty="0"/>
-          </a:p>
-        </p:txBody>
-      </p:sp>
-      <p:sp>
-        <p:nvSpPr>
-          <p:cNvPr id="32" name="Text 29"/>
+              <a:t>5 con số đầu vào → qua 5 lớp phép nhân/cộng/chia có trọng số → ra 1 điểm rủi ro duy nhất. Không có bước nào là “hộp đen” khó giải thích.</a:t>
+            </a:r>
+            <a:endParaRPr lang="en-US" sz="1200" dirty="0"/>
+          </a:p>
+        </p:txBody>
+      </p:sp>
+      <p:sp>
+        <p:nvSpPr>
+          <p:cNvPr id="36" name="Text 34"/>
           <p:cNvSpPr/>
           <p:nvPr/>
         </p:nvSpPr>
@@ -3489,7 +3907,7 @@
       </p:sp>
       <p:sp>
         <p:nvSpPr>
-          <p:cNvPr id="33" name="Text 30"/>
+          <p:cNvPr id="37" name="Text 35"/>
           <p:cNvSpPr/>
           <p:nvPr/>
         </p:nvSpPr>
@@ -3591,7 +4009,7 @@
                 <a:ea typeface="Calibri" pitchFamily="34" charset="-122"/>
                 <a:cs typeface="Calibri" pitchFamily="34" charset="-120"/>
               </a:rPr>
-              <a:t>QUAN TRỌNG NHẤT</a:t>
+              <a:t>ANFIS — CHI TIẾT 2 / 2</a:t>
             </a:r>
             <a:endParaRPr lang="en-US" sz="1300" dirty="0"/>
           </a:p>
@@ -3630,42 +4048,1289 @@
                 <a:ea typeface="Cambria" pitchFamily="34" charset="-122"/>
                 <a:cs typeface="Cambria" pitchFamily="34" charset="-120"/>
               </a:rPr>
-              <a:t>Luồng xử lý AI — từ ảnh đến kết quả</a:t>
+              <a:t>Ý nghĩa 5 đặc trưng đầu vào</a:t>
             </a:r>
             <a:endParaRPr lang="en-US" sz="3000" dirty="0"/>
           </a:p>
         </p:txBody>
       </p:sp>
-      <p:sp>
-        <p:nvSpPr>
-          <p:cNvPr id="4" name="Shape 2"/>
-          <p:cNvSpPr/>
-          <p:nvPr/>
-        </p:nvSpPr>
-        <p:spPr>
-          <a:xfrm>
-            <a:off x="1143000" y="2322576"/>
-            <a:ext cx="292608" cy="292608"/>
-          </a:xfrm>
-          <a:prstGeom prst="ellipse">
-            <a:avLst/>
-          </a:prstGeom>
-          <a:solidFill>
-            <a:srgbClr val="D97C2B"/>
-          </a:solidFill>
-          <a:ln/>
-        </p:spPr>
-      </p:sp>
-      <p:sp>
-        <p:nvSpPr>
-          <p:cNvPr id="5" name="Text 3"/>
-          <p:cNvSpPr/>
-          <p:nvPr/>
-        </p:nvSpPr>
-        <p:spPr>
-          <a:xfrm>
-            <a:off x="1143000" y="2322576"/>
-            <a:ext cx="292608" cy="292608"/>
+      <p:graphicFrame>
+        <p:nvGraphicFramePr>
+          <p:cNvPr id="12" name="Table 0"/>
+          <p:cNvGraphicFramePr>
+            <a:graphicFrameLocks noGrp="1"/>
+          </p:cNvGraphicFramePr>
+          <p:nvPr>
+            <p:extLst>
+              <p:ext uri="{D42A27DB-BD31-4B8C-83A1-F6EECF244321}">
+                <p14:modId xmlns:p14="http://schemas.microsoft.com/office/powerpoint/2010/main" val="1579011935"/>
+              </p:ext>
+            </p:extLst>
+          </p:nvPr>
+        </p:nvGraphicFramePr>
+        <p:xfrm>
+          <a:off x="548640" y="1691640"/>
+          <a:ext cx="11094415" cy="4434840"/>
+        </p:xfrm>
+        <a:graphic>
+          <a:graphicData uri="http://schemas.openxmlformats.org/drawingml/2006/table">
+            <a:tbl>
+              <a:tblPr/>
+              <a:tblGrid>
+                <a:gridCol w="2377440"/>
+                <a:gridCol w="3749040"/>
+                <a:gridCol w="4965192"/>
+              </a:tblGrid>
+              <a:tr h="457200">
+                <a:tc>
+                  <a:txBody>
+                    <a:bodyPr/>
+                    <a:lstStyle/>
+                    <a:p>
+                      <a:pPr algn="l" indent="0" marL="0">
+                        <a:buNone/>
+                      </a:pPr>
+                      <a:r>
+                        <a:rPr lang="en-US" sz="1250" b="1" dirty="0">
+                          <a:solidFill>
+                            <a:srgbClr val="FFFFFF"/>
+                          </a:solidFill>
+                          <a:latin typeface="Calibri" pitchFamily="34" charset="0"/>
+                          <a:ea typeface="Calibri" pitchFamily="34" charset="-122"/>
+                          <a:cs typeface="Calibri" pitchFamily="34" charset="-120"/>
+                        </a:rPr>
+                        <a:t>Đặc trưng (input)</a:t>
+                      </a:r>
+                      <a:endParaRPr lang="en-US" sz="1250" dirty="0">
+                        <a:latin typeface="Calibri" charset="0"/>
+                        <a:ea typeface="Calibri" charset="0"/>
+                        <a:cs typeface="Calibri" charset="0"/>
+                      </a:endParaRPr>
+                    </a:p>
+                  </a:txBody>
+                  <a:tcPr marL="127000" marR="127000" marT="76200" marB="76200" anchor="ctr">
+                    <a:lnL w="9525" cap="flat" cmpd="sng" algn="ctr">
+                      <a:solidFill>
+                        <a:srgbClr val="D6DEE6"/>
+                      </a:solidFill>
+                      <a:prstDash val="solid"/>
+                      <a:round/>
+                      <a:headEnd type="none" w="med" len="med"/>
+                      <a:tailEnd type="none" w="med" len="med"/>
+                    </a:lnL>
+                    <a:lnR w="9525" cap="flat" cmpd="sng" algn="ctr">
+                      <a:solidFill>
+                        <a:srgbClr val="D6DEE6"/>
+                      </a:solidFill>
+                      <a:prstDash val="solid"/>
+                      <a:round/>
+                      <a:headEnd type="none" w="med" len="med"/>
+                      <a:tailEnd type="none" w="med" len="med"/>
+                    </a:lnR>
+                    <a:lnT w="9525" cap="flat" cmpd="sng" algn="ctr">
+                      <a:solidFill>
+                        <a:srgbClr val="D6DEE6"/>
+                      </a:solidFill>
+                      <a:prstDash val="solid"/>
+                      <a:round/>
+                      <a:headEnd type="none" w="med" len="med"/>
+                      <a:tailEnd type="none" w="med" len="med"/>
+                    </a:lnT>
+                    <a:lnB w="9525" cap="flat" cmpd="sng" algn="ctr">
+                      <a:solidFill>
+                        <a:srgbClr val="D6DEE6"/>
+                      </a:solidFill>
+                      <a:prstDash val="solid"/>
+                      <a:round/>
+                      <a:headEnd type="none" w="med" len="med"/>
+                      <a:tailEnd type="none" w="med" len="med"/>
+                    </a:lnB>
+                    <a:solidFill>
+                      <a:srgbClr val="12395C"/>
+                    </a:solidFill>
+                  </a:tcPr>
+                </a:tc>
+                <a:tc>
+                  <a:txBody>
+                    <a:bodyPr/>
+                    <a:lstStyle/>
+                    <a:p>
+                      <a:pPr algn="l" indent="0" marL="0">
+                        <a:buNone/>
+                      </a:pPr>
+                      <a:r>
+                        <a:rPr lang="en-US" sz="1250" b="1" dirty="0">
+                          <a:solidFill>
+                            <a:srgbClr val="FFFFFF"/>
+                          </a:solidFill>
+                          <a:latin typeface="Calibri" pitchFamily="34" charset="0"/>
+                          <a:ea typeface="Calibri" pitchFamily="34" charset="-122"/>
+                          <a:cs typeface="Calibri" pitchFamily="34" charset="-120"/>
+                        </a:rPr>
+                        <a:t>Được tính từ đâu</a:t>
+                      </a:r>
+                      <a:endParaRPr lang="en-US" sz="1250" dirty="0">
+                        <a:latin typeface="Calibri" charset="0"/>
+                        <a:ea typeface="Calibri" charset="0"/>
+                        <a:cs typeface="Calibri" charset="0"/>
+                      </a:endParaRPr>
+                    </a:p>
+                  </a:txBody>
+                  <a:tcPr marL="127000" marR="127000" marT="76200" marB="76200" anchor="ctr">
+                    <a:lnL w="9525" cap="flat" cmpd="sng" algn="ctr">
+                      <a:solidFill>
+                        <a:srgbClr val="D6DEE6"/>
+                      </a:solidFill>
+                      <a:prstDash val="solid"/>
+                      <a:round/>
+                      <a:headEnd type="none" w="med" len="med"/>
+                      <a:tailEnd type="none" w="med" len="med"/>
+                    </a:lnL>
+                    <a:lnR w="9525" cap="flat" cmpd="sng" algn="ctr">
+                      <a:solidFill>
+                        <a:srgbClr val="D6DEE6"/>
+                      </a:solidFill>
+                      <a:prstDash val="solid"/>
+                      <a:round/>
+                      <a:headEnd type="none" w="med" len="med"/>
+                      <a:tailEnd type="none" w="med" len="med"/>
+                    </a:lnR>
+                    <a:lnT w="9525" cap="flat" cmpd="sng" algn="ctr">
+                      <a:solidFill>
+                        <a:srgbClr val="D6DEE6"/>
+                      </a:solidFill>
+                      <a:prstDash val="solid"/>
+                      <a:round/>
+                      <a:headEnd type="none" w="med" len="med"/>
+                      <a:tailEnd type="none" w="med" len="med"/>
+                    </a:lnT>
+                    <a:lnB w="9525" cap="flat" cmpd="sng" algn="ctr">
+                      <a:solidFill>
+                        <a:srgbClr val="D6DEE6"/>
+                      </a:solidFill>
+                      <a:prstDash val="solid"/>
+                      <a:round/>
+                      <a:headEnd type="none" w="med" len="med"/>
+                      <a:tailEnd type="none" w="med" len="med"/>
+                    </a:lnB>
+                    <a:solidFill>
+                      <a:srgbClr val="12395C"/>
+                    </a:solidFill>
+                  </a:tcPr>
+                </a:tc>
+                <a:tc>
+                  <a:txBody>
+                    <a:bodyPr/>
+                    <a:lstStyle/>
+                    <a:p>
+                      <a:pPr algn="l" indent="0" marL="0">
+                        <a:buNone/>
+                      </a:pPr>
+                      <a:r>
+                        <a:rPr lang="en-US" sz="1250" b="1" dirty="0">
+                          <a:solidFill>
+                            <a:srgbClr val="FFFFFF"/>
+                          </a:solidFill>
+                          <a:latin typeface="Calibri" pitchFamily="34" charset="0"/>
+                          <a:ea typeface="Calibri" pitchFamily="34" charset="-122"/>
+                          <a:cs typeface="Calibri" pitchFamily="34" charset="-120"/>
+                        </a:rPr>
+                        <a:t>Ý nghĩa — vì sao ANFIS cần nó</a:t>
+                      </a:r>
+                      <a:endParaRPr lang="en-US" sz="1250" dirty="0">
+                        <a:latin typeface="Calibri" charset="0"/>
+                        <a:ea typeface="Calibri" charset="0"/>
+                        <a:cs typeface="Calibri" charset="0"/>
+                      </a:endParaRPr>
+                    </a:p>
+                  </a:txBody>
+                  <a:tcPr marL="127000" marR="127000" marT="76200" marB="76200" anchor="ctr">
+                    <a:lnL w="9525" cap="flat" cmpd="sng" algn="ctr">
+                      <a:solidFill>
+                        <a:srgbClr val="D6DEE6"/>
+                      </a:solidFill>
+                      <a:prstDash val="solid"/>
+                      <a:round/>
+                      <a:headEnd type="none" w="med" len="med"/>
+                      <a:tailEnd type="none" w="med" len="med"/>
+                    </a:lnL>
+                    <a:lnR w="9525" cap="flat" cmpd="sng" algn="ctr">
+                      <a:solidFill>
+                        <a:srgbClr val="D6DEE6"/>
+                      </a:solidFill>
+                      <a:prstDash val="solid"/>
+                      <a:round/>
+                      <a:headEnd type="none" w="med" len="med"/>
+                      <a:tailEnd type="none" w="med" len="med"/>
+                    </a:lnR>
+                    <a:lnT w="9525" cap="flat" cmpd="sng" algn="ctr">
+                      <a:solidFill>
+                        <a:srgbClr val="D6DEE6"/>
+                      </a:solidFill>
+                      <a:prstDash val="solid"/>
+                      <a:round/>
+                      <a:headEnd type="none" w="med" len="med"/>
+                      <a:tailEnd type="none" w="med" len="med"/>
+                    </a:lnT>
+                    <a:lnB w="9525" cap="flat" cmpd="sng" algn="ctr">
+                      <a:solidFill>
+                        <a:srgbClr val="D6DEE6"/>
+                      </a:solidFill>
+                      <a:prstDash val="solid"/>
+                      <a:round/>
+                      <a:headEnd type="none" w="med" len="med"/>
+                      <a:tailEnd type="none" w="med" len="med"/>
+                    </a:lnB>
+                    <a:solidFill>
+                      <a:srgbClr val="12395C"/>
+                    </a:solidFill>
+                  </a:tcPr>
+                </a:tc>
+              </a:tr>
+              <a:tr h="795528">
+                <a:tc>
+                  <a:txBody>
+                    <a:bodyPr/>
+                    <a:lstStyle/>
+                    <a:p>
+                      <a:pPr algn="l" indent="0" marL="0">
+                        <a:buNone/>
+                      </a:pPr>
+                      <a:r>
+                        <a:rPr lang="en-US" sz="1250" b="1" dirty="0">
+                          <a:solidFill>
+                            <a:srgbClr val="12395C"/>
+                          </a:solidFill>
+                          <a:latin typeface="Calibri" pitchFamily="34" charset="0"/>
+                          <a:ea typeface="Calibri" pitchFamily="34" charset="-122"/>
+                          <a:cs typeface="Calibri" pitchFamily="34" charset="-120"/>
+                        </a:rPr>
+                        <a:t>edge_irregularity</a:t>
+                      </a:r>
+                      <a:endParaRPr lang="en-US" sz="1250" dirty="0">
+                        <a:latin typeface="Calibri" charset="0"/>
+                        <a:ea typeface="Calibri" charset="0"/>
+                        <a:cs typeface="Calibri" charset="0"/>
+                      </a:endParaRPr>
+                    </a:p>
+                  </a:txBody>
+                  <a:tcPr marL="127000" marR="127000" marT="76200" marB="76200" anchor="ctr">
+                    <a:lnL w="9525" cap="flat" cmpd="sng" algn="ctr">
+                      <a:solidFill>
+                        <a:srgbClr val="D6DEE6"/>
+                      </a:solidFill>
+                      <a:prstDash val="solid"/>
+                      <a:round/>
+                      <a:headEnd type="none" w="med" len="med"/>
+                      <a:tailEnd type="none" w="med" len="med"/>
+                    </a:lnL>
+                    <a:lnR w="9525" cap="flat" cmpd="sng" algn="ctr">
+                      <a:solidFill>
+                        <a:srgbClr val="D6DEE6"/>
+                      </a:solidFill>
+                      <a:prstDash val="solid"/>
+                      <a:round/>
+                      <a:headEnd type="none" w="med" len="med"/>
+                      <a:tailEnd type="none" w="med" len="med"/>
+                    </a:lnR>
+                    <a:lnT w="9525" cap="flat" cmpd="sng" algn="ctr">
+                      <a:solidFill>
+                        <a:srgbClr val="D6DEE6"/>
+                      </a:solidFill>
+                      <a:prstDash val="solid"/>
+                      <a:round/>
+                      <a:headEnd type="none" w="med" len="med"/>
+                      <a:tailEnd type="none" w="med" len="med"/>
+                    </a:lnT>
+                    <a:lnB w="9525" cap="flat" cmpd="sng" algn="ctr">
+                      <a:solidFill>
+                        <a:srgbClr val="D6DEE6"/>
+                      </a:solidFill>
+                      <a:prstDash val="solid"/>
+                      <a:round/>
+                      <a:headEnd type="none" w="med" len="med"/>
+                      <a:tailEnd type="none" w="med" len="med"/>
+                    </a:lnB>
+                    <a:solidFill>
+                      <a:srgbClr val="EEF3F8"/>
+                    </a:solidFill>
+                  </a:tcPr>
+                </a:tc>
+                <a:tc>
+                  <a:txBody>
+                    <a:bodyPr/>
+                    <a:lstStyle/>
+                    <a:p>
+                      <a:pPr algn="l" indent="0" marL="0">
+                        <a:buNone/>
+                      </a:pPr>
+                      <a:r>
+                        <a:rPr lang="en-US" sz="1150" dirty="0">
+                          <a:solidFill>
+                            <a:srgbClr val="000000"/>
+                          </a:solidFill>
+                          <a:latin typeface="Calibri" pitchFamily="34" charset="0"/>
+                          <a:ea typeface="Calibri" pitchFamily="34" charset="-122"/>
+                          <a:cs typeface="Calibri" pitchFamily="34" charset="-120"/>
+                        </a:rPr>
+                        <a:t>Fractal dimension (chuẩn hoá) của viền vùng nghi ngờ, lấy giá trị lớn nhất trong các vùng.</a:t>
+                      </a:r>
+                      <a:endParaRPr lang="en-US" sz="1150" dirty="0">
+                        <a:latin typeface="Calibri" charset="0"/>
+                        <a:ea typeface="Calibri" charset="0"/>
+                        <a:cs typeface="Calibri" charset="0"/>
+                      </a:endParaRPr>
+                    </a:p>
+                  </a:txBody>
+                  <a:tcPr marL="127000" marR="127000" marT="76200" marB="76200" anchor="ctr">
+                    <a:lnL w="9525" cap="flat" cmpd="sng" algn="ctr">
+                      <a:solidFill>
+                        <a:srgbClr val="D6DEE6"/>
+                      </a:solidFill>
+                      <a:prstDash val="solid"/>
+                      <a:round/>
+                      <a:headEnd type="none" w="med" len="med"/>
+                      <a:tailEnd type="none" w="med" len="med"/>
+                    </a:lnL>
+                    <a:lnR w="9525" cap="flat" cmpd="sng" algn="ctr">
+                      <a:solidFill>
+                        <a:srgbClr val="D6DEE6"/>
+                      </a:solidFill>
+                      <a:prstDash val="solid"/>
+                      <a:round/>
+                      <a:headEnd type="none" w="med" len="med"/>
+                      <a:tailEnd type="none" w="med" len="med"/>
+                    </a:lnR>
+                    <a:lnT w="9525" cap="flat" cmpd="sng" algn="ctr">
+                      <a:solidFill>
+                        <a:srgbClr val="D6DEE6"/>
+                      </a:solidFill>
+                      <a:prstDash val="solid"/>
+                      <a:round/>
+                      <a:headEnd type="none" w="med" len="med"/>
+                      <a:tailEnd type="none" w="med" len="med"/>
+                    </a:lnT>
+                    <a:lnB w="9525" cap="flat" cmpd="sng" algn="ctr">
+                      <a:solidFill>
+                        <a:srgbClr val="D6DEE6"/>
+                      </a:solidFill>
+                      <a:prstDash val="solid"/>
+                      <a:round/>
+                      <a:headEnd type="none" w="med" len="med"/>
+                      <a:tailEnd type="none" w="med" len="med"/>
+                    </a:lnB>
+                    <a:solidFill>
+                      <a:srgbClr val="EEF3F8"/>
+                    </a:solidFill>
+                  </a:tcPr>
+                </a:tc>
+                <a:tc>
+                  <a:txBody>
+                    <a:bodyPr/>
+                    <a:lstStyle/>
+                    <a:p>
+                      <a:pPr algn="l" indent="0" marL="0">
+                        <a:buNone/>
+                      </a:pPr>
+                      <a:r>
+                        <a:rPr lang="en-US" sz="1150" dirty="0">
+                          <a:solidFill>
+                            <a:srgbClr val="000000"/>
+                          </a:solidFill>
+                          <a:latin typeface="Calibri" pitchFamily="34" charset="0"/>
+                          <a:ea typeface="Calibri" pitchFamily="34" charset="-122"/>
+                          <a:cs typeface="Calibri" pitchFamily="34" charset="-120"/>
+                        </a:rPr>
+                        <a:t>Viền càng gồ ghề, bất thường → càng giống đường nứt/gãy thật, khác viền xương trơn tự nhiên.</a:t>
+                      </a:r>
+                      <a:endParaRPr lang="en-US" sz="1150" dirty="0">
+                        <a:latin typeface="Calibri" charset="0"/>
+                        <a:ea typeface="Calibri" charset="0"/>
+                        <a:cs typeface="Calibri" charset="0"/>
+                      </a:endParaRPr>
+                    </a:p>
+                  </a:txBody>
+                  <a:tcPr marL="127000" marR="127000" marT="76200" marB="76200" anchor="ctr">
+                    <a:lnL w="9525" cap="flat" cmpd="sng" algn="ctr">
+                      <a:solidFill>
+                        <a:srgbClr val="D6DEE6"/>
+                      </a:solidFill>
+                      <a:prstDash val="solid"/>
+                      <a:round/>
+                      <a:headEnd type="none" w="med" len="med"/>
+                      <a:tailEnd type="none" w="med" len="med"/>
+                    </a:lnL>
+                    <a:lnR w="9525" cap="flat" cmpd="sng" algn="ctr">
+                      <a:solidFill>
+                        <a:srgbClr val="D6DEE6"/>
+                      </a:solidFill>
+                      <a:prstDash val="solid"/>
+                      <a:round/>
+                      <a:headEnd type="none" w="med" len="med"/>
+                      <a:tailEnd type="none" w="med" len="med"/>
+                    </a:lnR>
+                    <a:lnT w="9525" cap="flat" cmpd="sng" algn="ctr">
+                      <a:solidFill>
+                        <a:srgbClr val="D6DEE6"/>
+                      </a:solidFill>
+                      <a:prstDash val="solid"/>
+                      <a:round/>
+                      <a:headEnd type="none" w="med" len="med"/>
+                      <a:tailEnd type="none" w="med" len="med"/>
+                    </a:lnT>
+                    <a:lnB w="9525" cap="flat" cmpd="sng" algn="ctr">
+                      <a:solidFill>
+                        <a:srgbClr val="D6DEE6"/>
+                      </a:solidFill>
+                      <a:prstDash val="solid"/>
+                      <a:round/>
+                      <a:headEnd type="none" w="med" len="med"/>
+                      <a:tailEnd type="none" w="med" len="med"/>
+                    </a:lnB>
+                    <a:solidFill>
+                      <a:srgbClr val="EEF3F8"/>
+                    </a:solidFill>
+                  </a:tcPr>
+                </a:tc>
+              </a:tr>
+              <a:tr h="795528">
+                <a:tc>
+                  <a:txBody>
+                    <a:bodyPr/>
+                    <a:lstStyle/>
+                    <a:p>
+                      <a:pPr algn="l" indent="0" marL="0">
+                        <a:buNone/>
+                      </a:pPr>
+                      <a:r>
+                        <a:rPr lang="en-US" sz="1250" b="1" dirty="0">
+                          <a:solidFill>
+                            <a:srgbClr val="12395C"/>
+                          </a:solidFill>
+                          <a:latin typeface="Calibri" pitchFamily="34" charset="0"/>
+                          <a:ea typeface="Calibri" pitchFamily="34" charset="-122"/>
+                          <a:cs typeface="Calibri" pitchFamily="34" charset="-120"/>
+                        </a:rPr>
+                        <a:t>bone_contrast</a:t>
+                      </a:r>
+                      <a:endParaRPr lang="en-US" sz="1250" dirty="0">
+                        <a:latin typeface="Calibri" charset="0"/>
+                        <a:ea typeface="Calibri" charset="0"/>
+                        <a:cs typeface="Calibri" charset="0"/>
+                      </a:endParaRPr>
+                    </a:p>
+                  </a:txBody>
+                  <a:tcPr marL="127000" marR="127000" marT="76200" marB="76200" anchor="ctr">
+                    <a:lnL w="9525" cap="flat" cmpd="sng" algn="ctr">
+                      <a:solidFill>
+                        <a:srgbClr val="D6DEE6"/>
+                      </a:solidFill>
+                      <a:prstDash val="solid"/>
+                      <a:round/>
+                      <a:headEnd type="none" w="med" len="med"/>
+                      <a:tailEnd type="none" w="med" len="med"/>
+                    </a:lnL>
+                    <a:lnR w="9525" cap="flat" cmpd="sng" algn="ctr">
+                      <a:solidFill>
+                        <a:srgbClr val="D6DEE6"/>
+                      </a:solidFill>
+                      <a:prstDash val="solid"/>
+                      <a:round/>
+                      <a:headEnd type="none" w="med" len="med"/>
+                      <a:tailEnd type="none" w="med" len="med"/>
+                    </a:lnR>
+                    <a:lnT w="9525" cap="flat" cmpd="sng" algn="ctr">
+                      <a:solidFill>
+                        <a:srgbClr val="D6DEE6"/>
+                      </a:solidFill>
+                      <a:prstDash val="solid"/>
+                      <a:round/>
+                      <a:headEnd type="none" w="med" len="med"/>
+                      <a:tailEnd type="none" w="med" len="med"/>
+                    </a:lnT>
+                    <a:lnB w="9525" cap="flat" cmpd="sng" algn="ctr">
+                      <a:solidFill>
+                        <a:srgbClr val="D6DEE6"/>
+                      </a:solidFill>
+                      <a:prstDash val="solid"/>
+                      <a:round/>
+                      <a:headEnd type="none" w="med" len="med"/>
+                      <a:tailEnd type="none" w="med" len="med"/>
+                    </a:lnB>
+                    <a:solidFill>
+                      <a:srgbClr val="FFFFFF"/>
+                    </a:solidFill>
+                  </a:tcPr>
+                </a:tc>
+                <a:tc>
+                  <a:txBody>
+                    <a:bodyPr/>
+                    <a:lstStyle/>
+                    <a:p>
+                      <a:pPr algn="l" indent="0" marL="0">
+                        <a:buNone/>
+                      </a:pPr>
+                      <a:r>
+                        <a:rPr lang="en-US" sz="1150" dirty="0">
+                          <a:solidFill>
+                            <a:srgbClr val="000000"/>
+                          </a:solidFill>
+                          <a:latin typeface="Calibri" pitchFamily="34" charset="0"/>
+                          <a:ea typeface="Calibri" pitchFamily="34" charset="-122"/>
+                          <a:cs typeface="Calibri" pitchFamily="34" charset="-120"/>
+                        </a:rPr>
+                        <a:t>Độ lệch chuẩn cường độ pixel của ảnh đã tăng cường tương phản (CLAHE).</a:t>
+                      </a:r>
+                      <a:endParaRPr lang="en-US" sz="1150" dirty="0">
+                        <a:latin typeface="Calibri" charset="0"/>
+                        <a:ea typeface="Calibri" charset="0"/>
+                        <a:cs typeface="Calibri" charset="0"/>
+                      </a:endParaRPr>
+                    </a:p>
+                  </a:txBody>
+                  <a:tcPr marL="127000" marR="127000" marT="76200" marB="76200" anchor="ctr">
+                    <a:lnL w="9525" cap="flat" cmpd="sng" algn="ctr">
+                      <a:solidFill>
+                        <a:srgbClr val="D6DEE6"/>
+                      </a:solidFill>
+                      <a:prstDash val="solid"/>
+                      <a:round/>
+                      <a:headEnd type="none" w="med" len="med"/>
+                      <a:tailEnd type="none" w="med" len="med"/>
+                    </a:lnL>
+                    <a:lnR w="9525" cap="flat" cmpd="sng" algn="ctr">
+                      <a:solidFill>
+                        <a:srgbClr val="D6DEE6"/>
+                      </a:solidFill>
+                      <a:prstDash val="solid"/>
+                      <a:round/>
+                      <a:headEnd type="none" w="med" len="med"/>
+                      <a:tailEnd type="none" w="med" len="med"/>
+                    </a:lnR>
+                    <a:lnT w="9525" cap="flat" cmpd="sng" algn="ctr">
+                      <a:solidFill>
+                        <a:srgbClr val="D6DEE6"/>
+                      </a:solidFill>
+                      <a:prstDash val="solid"/>
+                      <a:round/>
+                      <a:headEnd type="none" w="med" len="med"/>
+                      <a:tailEnd type="none" w="med" len="med"/>
+                    </a:lnT>
+                    <a:lnB w="9525" cap="flat" cmpd="sng" algn="ctr">
+                      <a:solidFill>
+                        <a:srgbClr val="D6DEE6"/>
+                      </a:solidFill>
+                      <a:prstDash val="solid"/>
+                      <a:round/>
+                      <a:headEnd type="none" w="med" len="med"/>
+                      <a:tailEnd type="none" w="med" len="med"/>
+                    </a:lnB>
+                    <a:solidFill>
+                      <a:srgbClr val="FFFFFF"/>
+                    </a:solidFill>
+                  </a:tcPr>
+                </a:tc>
+                <a:tc>
+                  <a:txBody>
+                    <a:bodyPr/>
+                    <a:lstStyle/>
+                    <a:p>
+                      <a:pPr algn="l" indent="0" marL="0">
+                        <a:buNone/>
+                      </a:pPr>
+                      <a:r>
+                        <a:rPr lang="en-US" sz="1150" dirty="0">
+                          <a:solidFill>
+                            <a:srgbClr val="000000"/>
+                          </a:solidFill>
+                          <a:latin typeface="Calibri" pitchFamily="34" charset="0"/>
+                          <a:ea typeface="Calibri" pitchFamily="34" charset="-122"/>
+                          <a:cs typeface="Calibri" pitchFamily="34" charset="-120"/>
+                        </a:rPr>
+                        <a:t>Ảnh tương phản tốt → cấu trúc xương hiện rõ, đánh giá đáng tin cậy; ảnh mờ/phẳng → ANFIS tự hạ độ tin cậy.</a:t>
+                      </a:r>
+                      <a:endParaRPr lang="en-US" sz="1150" dirty="0">
+                        <a:latin typeface="Calibri" charset="0"/>
+                        <a:ea typeface="Calibri" charset="0"/>
+                        <a:cs typeface="Calibri" charset="0"/>
+                      </a:endParaRPr>
+                    </a:p>
+                  </a:txBody>
+                  <a:tcPr marL="127000" marR="127000" marT="76200" marB="76200" anchor="ctr">
+                    <a:lnL w="9525" cap="flat" cmpd="sng" algn="ctr">
+                      <a:solidFill>
+                        <a:srgbClr val="D6DEE6"/>
+                      </a:solidFill>
+                      <a:prstDash val="solid"/>
+                      <a:round/>
+                      <a:headEnd type="none" w="med" len="med"/>
+                      <a:tailEnd type="none" w="med" len="med"/>
+                    </a:lnL>
+                    <a:lnR w="9525" cap="flat" cmpd="sng" algn="ctr">
+                      <a:solidFill>
+                        <a:srgbClr val="D6DEE6"/>
+                      </a:solidFill>
+                      <a:prstDash val="solid"/>
+                      <a:round/>
+                      <a:headEnd type="none" w="med" len="med"/>
+                      <a:tailEnd type="none" w="med" len="med"/>
+                    </a:lnR>
+                    <a:lnT w="9525" cap="flat" cmpd="sng" algn="ctr">
+                      <a:solidFill>
+                        <a:srgbClr val="D6DEE6"/>
+                      </a:solidFill>
+                      <a:prstDash val="solid"/>
+                      <a:round/>
+                      <a:headEnd type="none" w="med" len="med"/>
+                      <a:tailEnd type="none" w="med" len="med"/>
+                    </a:lnT>
+                    <a:lnB w="9525" cap="flat" cmpd="sng" algn="ctr">
+                      <a:solidFill>
+                        <a:srgbClr val="D6DEE6"/>
+                      </a:solidFill>
+                      <a:prstDash val="solid"/>
+                      <a:round/>
+                      <a:headEnd type="none" w="med" len="med"/>
+                      <a:tailEnd type="none" w="med" len="med"/>
+                    </a:lnB>
+                    <a:solidFill>
+                      <a:srgbClr val="FFFFFF"/>
+                    </a:solidFill>
+                  </a:tcPr>
+                </a:tc>
+              </a:tr>
+              <a:tr h="795528">
+                <a:tc>
+                  <a:txBody>
+                    <a:bodyPr/>
+                    <a:lstStyle/>
+                    <a:p>
+                      <a:pPr algn="l" indent="0" marL="0">
+                        <a:buNone/>
+                      </a:pPr>
+                      <a:r>
+                        <a:rPr lang="en-US" sz="1250" b="1" dirty="0">
+                          <a:solidFill>
+                            <a:srgbClr val="12395C"/>
+                          </a:solidFill>
+                          <a:latin typeface="Calibri" pitchFamily="34" charset="0"/>
+                          <a:ea typeface="Calibri" pitchFamily="34" charset="-122"/>
+                          <a:cs typeface="Calibri" pitchFamily="34" charset="-120"/>
+                        </a:rPr>
+                        <a:t>yolo_confidence</a:t>
+                      </a:r>
+                      <a:endParaRPr lang="en-US" sz="1250" dirty="0">
+                        <a:latin typeface="Calibri" charset="0"/>
+                        <a:ea typeface="Calibri" charset="0"/>
+                        <a:cs typeface="Calibri" charset="0"/>
+                      </a:endParaRPr>
+                    </a:p>
+                  </a:txBody>
+                  <a:tcPr marL="127000" marR="127000" marT="76200" marB="76200" anchor="ctr">
+                    <a:lnL w="9525" cap="flat" cmpd="sng" algn="ctr">
+                      <a:solidFill>
+                        <a:srgbClr val="D6DEE6"/>
+                      </a:solidFill>
+                      <a:prstDash val="solid"/>
+                      <a:round/>
+                      <a:headEnd type="none" w="med" len="med"/>
+                      <a:tailEnd type="none" w="med" len="med"/>
+                    </a:lnL>
+                    <a:lnR w="9525" cap="flat" cmpd="sng" algn="ctr">
+                      <a:solidFill>
+                        <a:srgbClr val="D6DEE6"/>
+                      </a:solidFill>
+                      <a:prstDash val="solid"/>
+                      <a:round/>
+                      <a:headEnd type="none" w="med" len="med"/>
+                      <a:tailEnd type="none" w="med" len="med"/>
+                    </a:lnR>
+                    <a:lnT w="9525" cap="flat" cmpd="sng" algn="ctr">
+                      <a:solidFill>
+                        <a:srgbClr val="D6DEE6"/>
+                      </a:solidFill>
+                      <a:prstDash val="solid"/>
+                      <a:round/>
+                      <a:headEnd type="none" w="med" len="med"/>
+                      <a:tailEnd type="none" w="med" len="med"/>
+                    </a:lnT>
+                    <a:lnB w="9525" cap="flat" cmpd="sng" algn="ctr">
+                      <a:solidFill>
+                        <a:srgbClr val="D6DEE6"/>
+                      </a:solidFill>
+                      <a:prstDash val="solid"/>
+                      <a:round/>
+                      <a:headEnd type="none" w="med" len="med"/>
+                      <a:tailEnd type="none" w="med" len="med"/>
+                    </a:lnB>
+                    <a:solidFill>
+                      <a:srgbClr val="EEF3F8"/>
+                    </a:solidFill>
+                  </a:tcPr>
+                </a:tc>
+                <a:tc>
+                  <a:txBody>
+                    <a:bodyPr/>
+                    <a:lstStyle/>
+                    <a:p>
+                      <a:pPr algn="l" indent="0" marL="0">
+                        <a:buNone/>
+                      </a:pPr>
+                      <a:r>
+                        <a:rPr lang="en-US" sz="1150" dirty="0">
+                          <a:solidFill>
+                            <a:srgbClr val="000000"/>
+                          </a:solidFill>
+                          <a:latin typeface="Calibri" pitchFamily="34" charset="0"/>
+                          <a:ea typeface="Calibri" pitchFamily="34" charset="-122"/>
+                          <a:cs typeface="Calibri" pitchFamily="34" charset="-120"/>
+                        </a:rPr>
+                        <a:t>Độ tin cậy cao nhất trong các vùng do YOLOv11 phát hiện.</a:t>
+                      </a:r>
+                      <a:endParaRPr lang="en-US" sz="1150" dirty="0">
+                        <a:latin typeface="Calibri" charset="0"/>
+                        <a:ea typeface="Calibri" charset="0"/>
+                        <a:cs typeface="Calibri" charset="0"/>
+                      </a:endParaRPr>
+                    </a:p>
+                  </a:txBody>
+                  <a:tcPr marL="127000" marR="127000" marT="76200" marB="76200" anchor="ctr">
+                    <a:lnL w="9525" cap="flat" cmpd="sng" algn="ctr">
+                      <a:solidFill>
+                        <a:srgbClr val="D6DEE6"/>
+                      </a:solidFill>
+                      <a:prstDash val="solid"/>
+                      <a:round/>
+                      <a:headEnd type="none" w="med" len="med"/>
+                      <a:tailEnd type="none" w="med" len="med"/>
+                    </a:lnL>
+                    <a:lnR w="9525" cap="flat" cmpd="sng" algn="ctr">
+                      <a:solidFill>
+                        <a:srgbClr val="D6DEE6"/>
+                      </a:solidFill>
+                      <a:prstDash val="solid"/>
+                      <a:round/>
+                      <a:headEnd type="none" w="med" len="med"/>
+                      <a:tailEnd type="none" w="med" len="med"/>
+                    </a:lnR>
+                    <a:lnT w="9525" cap="flat" cmpd="sng" algn="ctr">
+                      <a:solidFill>
+                        <a:srgbClr val="D6DEE6"/>
+                      </a:solidFill>
+                      <a:prstDash val="solid"/>
+                      <a:round/>
+                      <a:headEnd type="none" w="med" len="med"/>
+                      <a:tailEnd type="none" w="med" len="med"/>
+                    </a:lnT>
+                    <a:lnB w="9525" cap="flat" cmpd="sng" algn="ctr">
+                      <a:solidFill>
+                        <a:srgbClr val="D6DEE6"/>
+                      </a:solidFill>
+                      <a:prstDash val="solid"/>
+                      <a:round/>
+                      <a:headEnd type="none" w="med" len="med"/>
+                      <a:tailEnd type="none" w="med" len="med"/>
+                    </a:lnB>
+                    <a:solidFill>
+                      <a:srgbClr val="EEF3F8"/>
+                    </a:solidFill>
+                  </a:tcPr>
+                </a:tc>
+                <a:tc>
+                  <a:txBody>
+                    <a:bodyPr/>
+                    <a:lstStyle/>
+                    <a:p>
+                      <a:pPr algn="l" indent="0" marL="0">
+                        <a:buNone/>
+                      </a:pPr>
+                      <a:r>
+                        <a:rPr lang="en-US" sz="1150" dirty="0">
+                          <a:solidFill>
+                            <a:srgbClr val="000000"/>
+                          </a:solidFill>
+                          <a:latin typeface="Calibri" pitchFamily="34" charset="0"/>
+                          <a:ea typeface="Calibri" pitchFamily="34" charset="-122"/>
+                          <a:cs typeface="Calibri" pitchFamily="34" charset="-120"/>
+                        </a:rPr>
+                        <a:t>Thể hiện mức “chắc chắn” của mô hình học sâu — vùng YOLO tự tin cao thì ảnh hưởng nhiều hơn tới điểm rủi ro.</a:t>
+                      </a:r>
+                      <a:endParaRPr lang="en-US" sz="1150" dirty="0">
+                        <a:latin typeface="Calibri" charset="0"/>
+                        <a:ea typeface="Calibri" charset="0"/>
+                        <a:cs typeface="Calibri" charset="0"/>
+                      </a:endParaRPr>
+                    </a:p>
+                  </a:txBody>
+                  <a:tcPr marL="127000" marR="127000" marT="76200" marB="76200" anchor="ctr">
+                    <a:lnL w="9525" cap="flat" cmpd="sng" algn="ctr">
+                      <a:solidFill>
+                        <a:srgbClr val="D6DEE6"/>
+                      </a:solidFill>
+                      <a:prstDash val="solid"/>
+                      <a:round/>
+                      <a:headEnd type="none" w="med" len="med"/>
+                      <a:tailEnd type="none" w="med" len="med"/>
+                    </a:lnL>
+                    <a:lnR w="9525" cap="flat" cmpd="sng" algn="ctr">
+                      <a:solidFill>
+                        <a:srgbClr val="D6DEE6"/>
+                      </a:solidFill>
+                      <a:prstDash val="solid"/>
+                      <a:round/>
+                      <a:headEnd type="none" w="med" len="med"/>
+                      <a:tailEnd type="none" w="med" len="med"/>
+                    </a:lnR>
+                    <a:lnT w="9525" cap="flat" cmpd="sng" algn="ctr">
+                      <a:solidFill>
+                        <a:srgbClr val="D6DEE6"/>
+                      </a:solidFill>
+                      <a:prstDash val="solid"/>
+                      <a:round/>
+                      <a:headEnd type="none" w="med" len="med"/>
+                      <a:tailEnd type="none" w="med" len="med"/>
+                    </a:lnT>
+                    <a:lnB w="9525" cap="flat" cmpd="sng" algn="ctr">
+                      <a:solidFill>
+                        <a:srgbClr val="D6DEE6"/>
+                      </a:solidFill>
+                      <a:prstDash val="solid"/>
+                      <a:round/>
+                      <a:headEnd type="none" w="med" len="med"/>
+                      <a:tailEnd type="none" w="med" len="med"/>
+                    </a:lnB>
+                    <a:solidFill>
+                      <a:srgbClr val="EEF3F8"/>
+                    </a:solidFill>
+                  </a:tcPr>
+                </a:tc>
+              </a:tr>
+              <a:tr h="795528">
+                <a:tc>
+                  <a:txBody>
+                    <a:bodyPr/>
+                    <a:lstStyle/>
+                    <a:p>
+                      <a:pPr algn="l" indent="0" marL="0">
+                        <a:buNone/>
+                      </a:pPr>
+                      <a:r>
+                        <a:rPr lang="en-US" sz="1250" b="1" dirty="0">
+                          <a:solidFill>
+                            <a:srgbClr val="12395C"/>
+                          </a:solidFill>
+                          <a:latin typeface="Calibri" pitchFamily="34" charset="0"/>
+                          <a:ea typeface="Calibri" pitchFamily="34" charset="-122"/>
+                          <a:cs typeface="Calibri" pitchFamily="34" charset="-120"/>
+                        </a:rPr>
+                        <a:t>region_burden</a:t>
+                      </a:r>
+                      <a:endParaRPr lang="en-US" sz="1250" dirty="0">
+                        <a:latin typeface="Calibri" charset="0"/>
+                        <a:ea typeface="Calibri" charset="0"/>
+                        <a:cs typeface="Calibri" charset="0"/>
+                      </a:endParaRPr>
+                    </a:p>
+                  </a:txBody>
+                  <a:tcPr marL="127000" marR="127000" marT="76200" marB="76200" anchor="ctr">
+                    <a:lnL w="9525" cap="flat" cmpd="sng" algn="ctr">
+                      <a:solidFill>
+                        <a:srgbClr val="D6DEE6"/>
+                      </a:solidFill>
+                      <a:prstDash val="solid"/>
+                      <a:round/>
+                      <a:headEnd type="none" w="med" len="med"/>
+                      <a:tailEnd type="none" w="med" len="med"/>
+                    </a:lnL>
+                    <a:lnR w="9525" cap="flat" cmpd="sng" algn="ctr">
+                      <a:solidFill>
+                        <a:srgbClr val="D6DEE6"/>
+                      </a:solidFill>
+                      <a:prstDash val="solid"/>
+                      <a:round/>
+                      <a:headEnd type="none" w="med" len="med"/>
+                      <a:tailEnd type="none" w="med" len="med"/>
+                    </a:lnR>
+                    <a:lnT w="9525" cap="flat" cmpd="sng" algn="ctr">
+                      <a:solidFill>
+                        <a:srgbClr val="D6DEE6"/>
+                      </a:solidFill>
+                      <a:prstDash val="solid"/>
+                      <a:round/>
+                      <a:headEnd type="none" w="med" len="med"/>
+                      <a:tailEnd type="none" w="med" len="med"/>
+                    </a:lnT>
+                    <a:lnB w="9525" cap="flat" cmpd="sng" algn="ctr">
+                      <a:solidFill>
+                        <a:srgbClr val="D6DEE6"/>
+                      </a:solidFill>
+                      <a:prstDash val="solid"/>
+                      <a:round/>
+                      <a:headEnd type="none" w="med" len="med"/>
+                      <a:tailEnd type="none" w="med" len="med"/>
+                    </a:lnB>
+                    <a:solidFill>
+                      <a:srgbClr val="FFFFFF"/>
+                    </a:solidFill>
+                  </a:tcPr>
+                </a:tc>
+                <a:tc>
+                  <a:txBody>
+                    <a:bodyPr/>
+                    <a:lstStyle/>
+                    <a:p>
+                      <a:pPr algn="l" indent="0" marL="0">
+                        <a:buNone/>
+                      </a:pPr>
+                      <a:r>
+                        <a:rPr lang="en-US" sz="1150" dirty="0">
+                          <a:solidFill>
+                            <a:srgbClr val="000000"/>
+                          </a:solidFill>
+                          <a:latin typeface="Calibri" pitchFamily="34" charset="0"/>
+                          <a:ea typeface="Calibri" pitchFamily="34" charset="-122"/>
+                          <a:cs typeface="Calibri" pitchFamily="34" charset="-120"/>
+                        </a:rPr>
+                        <a:t>Kết hợp diện tích vùng nghi ngờ / diện tích ảnh (55%) + số lượng vùng phát hiện, tối đa 4 vùng (45%).</a:t>
+                      </a:r>
+                      <a:endParaRPr lang="en-US" sz="1150" dirty="0">
+                        <a:latin typeface="Calibri" charset="0"/>
+                        <a:ea typeface="Calibri" charset="0"/>
+                        <a:cs typeface="Calibri" charset="0"/>
+                      </a:endParaRPr>
+                    </a:p>
+                  </a:txBody>
+                  <a:tcPr marL="127000" marR="127000" marT="76200" marB="76200" anchor="ctr">
+                    <a:lnL w="9525" cap="flat" cmpd="sng" algn="ctr">
+                      <a:solidFill>
+                        <a:srgbClr val="D6DEE6"/>
+                      </a:solidFill>
+                      <a:prstDash val="solid"/>
+                      <a:round/>
+                      <a:headEnd type="none" w="med" len="med"/>
+                      <a:tailEnd type="none" w="med" len="med"/>
+                    </a:lnL>
+                    <a:lnR w="9525" cap="flat" cmpd="sng" algn="ctr">
+                      <a:solidFill>
+                        <a:srgbClr val="D6DEE6"/>
+                      </a:solidFill>
+                      <a:prstDash val="solid"/>
+                      <a:round/>
+                      <a:headEnd type="none" w="med" len="med"/>
+                      <a:tailEnd type="none" w="med" len="med"/>
+                    </a:lnR>
+                    <a:lnT w="9525" cap="flat" cmpd="sng" algn="ctr">
+                      <a:solidFill>
+                        <a:srgbClr val="D6DEE6"/>
+                      </a:solidFill>
+                      <a:prstDash val="solid"/>
+                      <a:round/>
+                      <a:headEnd type="none" w="med" len="med"/>
+                      <a:tailEnd type="none" w="med" len="med"/>
+                    </a:lnT>
+                    <a:lnB w="9525" cap="flat" cmpd="sng" algn="ctr">
+                      <a:solidFill>
+                        <a:srgbClr val="D6DEE6"/>
+                      </a:solidFill>
+                      <a:prstDash val="solid"/>
+                      <a:round/>
+                      <a:headEnd type="none" w="med" len="med"/>
+                      <a:tailEnd type="none" w="med" len="med"/>
+                    </a:lnB>
+                    <a:solidFill>
+                      <a:srgbClr val="FFFFFF"/>
+                    </a:solidFill>
+                  </a:tcPr>
+                </a:tc>
+                <a:tc>
+                  <a:txBody>
+                    <a:bodyPr/>
+                    <a:lstStyle/>
+                    <a:p>
+                      <a:pPr algn="l" indent="0" marL="0">
+                        <a:buNone/>
+                      </a:pPr>
+                      <a:r>
+                        <a:rPr lang="en-US" sz="1150" dirty="0">
+                          <a:solidFill>
+                            <a:srgbClr val="000000"/>
+                          </a:solidFill>
+                          <a:latin typeface="Calibri" pitchFamily="34" charset="0"/>
+                          <a:ea typeface="Calibri" pitchFamily="34" charset="-122"/>
+                          <a:cs typeface="Calibri" pitchFamily="34" charset="-120"/>
+                        </a:rPr>
+                        <a:t>Đo “gánh nặng tổn thương”: lan rộng hoặc nhiều điểm nghi ngờ cùng lúc → rủi ro tổng thể cao hơn 1 điểm nhỏ đơn lẻ.</a:t>
+                      </a:r>
+                      <a:endParaRPr lang="en-US" sz="1150" dirty="0">
+                        <a:latin typeface="Calibri" charset="0"/>
+                        <a:ea typeface="Calibri" charset="0"/>
+                        <a:cs typeface="Calibri" charset="0"/>
+                      </a:endParaRPr>
+                    </a:p>
+                  </a:txBody>
+                  <a:tcPr marL="127000" marR="127000" marT="76200" marB="76200" anchor="ctr">
+                    <a:lnL w="9525" cap="flat" cmpd="sng" algn="ctr">
+                      <a:solidFill>
+                        <a:srgbClr val="D6DEE6"/>
+                      </a:solidFill>
+                      <a:prstDash val="solid"/>
+                      <a:round/>
+                      <a:headEnd type="none" w="med" len="med"/>
+                      <a:tailEnd type="none" w="med" len="med"/>
+                    </a:lnL>
+                    <a:lnR w="9525" cap="flat" cmpd="sng" algn="ctr">
+                      <a:solidFill>
+                        <a:srgbClr val="D6DEE6"/>
+                      </a:solidFill>
+                      <a:prstDash val="solid"/>
+                      <a:round/>
+                      <a:headEnd type="none" w="med" len="med"/>
+                      <a:tailEnd type="none" w="med" len="med"/>
+                    </a:lnR>
+                    <a:lnT w="9525" cap="flat" cmpd="sng" algn="ctr">
+                      <a:solidFill>
+                        <a:srgbClr val="D6DEE6"/>
+                      </a:solidFill>
+                      <a:prstDash val="solid"/>
+                      <a:round/>
+                      <a:headEnd type="none" w="med" len="med"/>
+                      <a:tailEnd type="none" w="med" len="med"/>
+                    </a:lnT>
+                    <a:lnB w="9525" cap="flat" cmpd="sng" algn="ctr">
+                      <a:solidFill>
+                        <a:srgbClr val="D6DEE6"/>
+                      </a:solidFill>
+                      <a:prstDash val="solid"/>
+                      <a:round/>
+                      <a:headEnd type="none" w="med" len="med"/>
+                      <a:tailEnd type="none" w="med" len="med"/>
+                    </a:lnB>
+                    <a:solidFill>
+                      <a:srgbClr val="FFFFFF"/>
+                    </a:solidFill>
+                  </a:tcPr>
+                </a:tc>
+              </a:tr>
+              <a:tr h="795528">
+                <a:tc>
+                  <a:txBody>
+                    <a:bodyPr/>
+                    <a:lstStyle/>
+                    <a:p>
+                      <a:pPr algn="l" indent="0" marL="0">
+                        <a:buNone/>
+                      </a:pPr>
+                      <a:r>
+                        <a:rPr lang="en-US" sz="1250" b="1" dirty="0">
+                          <a:solidFill>
+                            <a:srgbClr val="12395C"/>
+                          </a:solidFill>
+                          <a:latin typeface="Calibri" pitchFamily="34" charset="0"/>
+                          <a:ea typeface="Calibri" pitchFamily="34" charset="-122"/>
+                          <a:cs typeface="Calibri" pitchFamily="34" charset="-120"/>
+                        </a:rPr>
+                        <a:t>morphology_strength</a:t>
+                      </a:r>
+                      <a:endParaRPr lang="en-US" sz="1250" dirty="0">
+                        <a:latin typeface="Calibri" charset="0"/>
+                        <a:ea typeface="Calibri" charset="0"/>
+                        <a:cs typeface="Calibri" charset="0"/>
+                      </a:endParaRPr>
+                    </a:p>
+                  </a:txBody>
+                  <a:tcPr marL="127000" marR="127000" marT="76200" marB="76200" anchor="ctr">
+                    <a:lnL w="9525" cap="flat" cmpd="sng" algn="ctr">
+                      <a:solidFill>
+                        <a:srgbClr val="D6DEE6"/>
+                      </a:solidFill>
+                      <a:prstDash val="solid"/>
+                      <a:round/>
+                      <a:headEnd type="none" w="med" len="med"/>
+                      <a:tailEnd type="none" w="med" len="med"/>
+                    </a:lnL>
+                    <a:lnR w="9525" cap="flat" cmpd="sng" algn="ctr">
+                      <a:solidFill>
+                        <a:srgbClr val="D6DEE6"/>
+                      </a:solidFill>
+                      <a:prstDash val="solid"/>
+                      <a:round/>
+                      <a:headEnd type="none" w="med" len="med"/>
+                      <a:tailEnd type="none" w="med" len="med"/>
+                    </a:lnR>
+                    <a:lnT w="9525" cap="flat" cmpd="sng" algn="ctr">
+                      <a:solidFill>
+                        <a:srgbClr val="D6DEE6"/>
+                      </a:solidFill>
+                      <a:prstDash val="solid"/>
+                      <a:round/>
+                      <a:headEnd type="none" w="med" len="med"/>
+                      <a:tailEnd type="none" w="med" len="med"/>
+                    </a:lnT>
+                    <a:lnB w="9525" cap="flat" cmpd="sng" algn="ctr">
+                      <a:solidFill>
+                        <a:srgbClr val="D6DEE6"/>
+                      </a:solidFill>
+                      <a:prstDash val="solid"/>
+                      <a:round/>
+                      <a:headEnd type="none" w="med" len="med"/>
+                      <a:tailEnd type="none" w="med" len="med"/>
+                    </a:lnB>
+                    <a:solidFill>
+                      <a:srgbClr val="EEF3F8"/>
+                    </a:solidFill>
+                  </a:tcPr>
+                </a:tc>
+                <a:tc>
+                  <a:txBody>
+                    <a:bodyPr/>
+                    <a:lstStyle/>
+                    <a:p>
+                      <a:pPr algn="l" indent="0" marL="0">
+                        <a:buNone/>
+                      </a:pPr>
+                      <a:r>
+                        <a:rPr lang="en-US" sz="1150" dirty="0">
+                          <a:solidFill>
+                            <a:srgbClr val="000000"/>
+                          </a:solidFill>
+                          <a:latin typeface="Calibri" pitchFamily="34" charset="0"/>
+                          <a:ea typeface="Calibri" pitchFamily="34" charset="-122"/>
+                          <a:cs typeface="Calibri" pitchFamily="34" charset="-120"/>
+                        </a:rPr>
+                        <a:t>Tổ hợp: hình dạng thuôn dài (40% fractal + 25% aspect ratio + 20% conf. + 15% diện tích), lấy giá trị lớn nhất.</a:t>
+                      </a:r>
+                      <a:endParaRPr lang="en-US" sz="1150" dirty="0">
+                        <a:latin typeface="Calibri" charset="0"/>
+                        <a:ea typeface="Calibri" charset="0"/>
+                        <a:cs typeface="Calibri" charset="0"/>
+                      </a:endParaRPr>
+                    </a:p>
+                  </a:txBody>
+                  <a:tcPr marL="127000" marR="127000" marT="76200" marB="76200" anchor="ctr">
+                    <a:lnL w="9525" cap="flat" cmpd="sng" algn="ctr">
+                      <a:solidFill>
+                        <a:srgbClr val="D6DEE6"/>
+                      </a:solidFill>
+                      <a:prstDash val="solid"/>
+                      <a:round/>
+                      <a:headEnd type="none" w="med" len="med"/>
+                      <a:tailEnd type="none" w="med" len="med"/>
+                    </a:lnL>
+                    <a:lnR w="9525" cap="flat" cmpd="sng" algn="ctr">
+                      <a:solidFill>
+                        <a:srgbClr val="D6DEE6"/>
+                      </a:solidFill>
+                      <a:prstDash val="solid"/>
+                      <a:round/>
+                      <a:headEnd type="none" w="med" len="med"/>
+                      <a:tailEnd type="none" w="med" len="med"/>
+                    </a:lnR>
+                    <a:lnT w="9525" cap="flat" cmpd="sng" algn="ctr">
+                      <a:solidFill>
+                        <a:srgbClr val="D6DEE6"/>
+                      </a:solidFill>
+                      <a:prstDash val="solid"/>
+                      <a:round/>
+                      <a:headEnd type="none" w="med" len="med"/>
+                      <a:tailEnd type="none" w="med" len="med"/>
+                    </a:lnT>
+                    <a:lnB w="9525" cap="flat" cmpd="sng" algn="ctr">
+                      <a:solidFill>
+                        <a:srgbClr val="D6DEE6"/>
+                      </a:solidFill>
+                      <a:prstDash val="solid"/>
+                      <a:round/>
+                      <a:headEnd type="none" w="med" len="med"/>
+                      <a:tailEnd type="none" w="med" len="med"/>
+                    </a:lnB>
+                    <a:solidFill>
+                      <a:srgbClr val="EEF3F8"/>
+                    </a:solidFill>
+                  </a:tcPr>
+                </a:tc>
+                <a:tc>
+                  <a:txBody>
+                    <a:bodyPr/>
+                    <a:lstStyle/>
+                    <a:p>
+                      <a:pPr algn="l" indent="0" marL="0">
+                        <a:buNone/>
+                      </a:pPr>
+                      <a:r>
+                        <a:rPr lang="en-US" sz="1150" dirty="0">
+                          <a:solidFill>
+                            <a:srgbClr val="000000"/>
+                          </a:solidFill>
+                          <a:latin typeface="Calibri" pitchFamily="34" charset="0"/>
+                          <a:ea typeface="Calibri" pitchFamily="34" charset="-122"/>
+                          <a:cs typeface="Calibri" pitchFamily="34" charset="-120"/>
+                        </a:rPr>
+                        <a:t>Đường gãy thật thường dài, mảnh, viền phức tạp — khác các đốm nhiễu tròn/nhỏ do ảnh nhiễu hoặc thiết bị.</a:t>
+                      </a:r>
+                      <a:endParaRPr lang="en-US" sz="1150" dirty="0">
+                        <a:latin typeface="Calibri" charset="0"/>
+                        <a:ea typeface="Calibri" charset="0"/>
+                        <a:cs typeface="Calibri" charset="0"/>
+                      </a:endParaRPr>
+                    </a:p>
+                  </a:txBody>
+                  <a:tcPr marL="127000" marR="127000" marT="76200" marB="76200" anchor="ctr">
+                    <a:lnL w="9525" cap="flat" cmpd="sng" algn="ctr">
+                      <a:solidFill>
+                        <a:srgbClr val="D6DEE6"/>
+                      </a:solidFill>
+                      <a:prstDash val="solid"/>
+                      <a:round/>
+                      <a:headEnd type="none" w="med" len="med"/>
+                      <a:tailEnd type="none" w="med" len="med"/>
+                    </a:lnL>
+                    <a:lnR w="9525" cap="flat" cmpd="sng" algn="ctr">
+                      <a:solidFill>
+                        <a:srgbClr val="D6DEE6"/>
+                      </a:solidFill>
+                      <a:prstDash val="solid"/>
+                      <a:round/>
+                      <a:headEnd type="none" w="med" len="med"/>
+                      <a:tailEnd type="none" w="med" len="med"/>
+                    </a:lnR>
+                    <a:lnT w="9525" cap="flat" cmpd="sng" algn="ctr">
+                      <a:solidFill>
+                        <a:srgbClr val="D6DEE6"/>
+                      </a:solidFill>
+                      <a:prstDash val="solid"/>
+                      <a:round/>
+                      <a:headEnd type="none" w="med" len="med"/>
+                      <a:tailEnd type="none" w="med" len="med"/>
+                    </a:lnT>
+                    <a:lnB w="9525" cap="flat" cmpd="sng" algn="ctr">
+                      <a:solidFill>
+                        <a:srgbClr val="D6DEE6"/>
+                      </a:solidFill>
+                      <a:prstDash val="solid"/>
+                      <a:round/>
+                      <a:headEnd type="none" w="med" len="med"/>
+                      <a:tailEnd type="none" w="med" len="med"/>
+                    </a:lnB>
+                    <a:solidFill>
+                      <a:srgbClr val="EEF3F8"/>
+                    </a:solidFill>
+                  </a:tcPr>
+                </a:tc>
+              </a:tr>
+            </a:tbl>
+          </a:graphicData>
+        </a:graphic>
+      </p:graphicFrame>
+      <p:sp>
+        <p:nvSpPr>
+          <p:cNvPr id="5" name="Text 2"/>
+          <p:cNvSpPr/>
+          <p:nvPr/>
+        </p:nvSpPr>
+        <p:spPr>
+          <a:xfrm>
+            <a:off x="548640" y="6263640"/>
+            <a:ext cx="11094415" cy="320040"/>
           </a:xfrm>
           <a:prstGeom prst="rect">
             <a:avLst/>
@@ -3681,402 +5346,15 @@
               <a:buNone/>
             </a:pPr>
             <a:r>
-              <a:rPr lang="en-US" sz="1300" b="1" dirty="0">
-                <a:solidFill>
-                  <a:srgbClr val="FFFFFF"/>
-                </a:solidFill>
-                <a:latin typeface="Cambria" pitchFamily="34" charset="0"/>
-                <a:ea typeface="Cambria" pitchFamily="34" charset="-122"/>
-                <a:cs typeface="Cambria" pitchFamily="34" charset="-120"/>
-              </a:rPr>
-              <a:t>1</a:t>
-            </a:r>
-            <a:endParaRPr lang="en-US" sz="1300" dirty="0"/>
-          </a:p>
-        </p:txBody>
-      </p:sp>
-      <p:sp>
-        <p:nvSpPr>
-          <p:cNvPr id="6" name="Shape 4"/>
-          <p:cNvSpPr/>
-          <p:nvPr/>
-        </p:nvSpPr>
-        <p:spPr>
-          <a:xfrm>
-            <a:off x="2935224" y="2322576"/>
-            <a:ext cx="292608" cy="292608"/>
-          </a:xfrm>
-          <a:prstGeom prst="ellipse">
-            <a:avLst/>
-          </a:prstGeom>
-          <a:solidFill>
-            <a:srgbClr val="D97C2B"/>
-          </a:solidFill>
-          <a:ln/>
-        </p:spPr>
-      </p:sp>
-      <p:sp>
-        <p:nvSpPr>
-          <p:cNvPr id="7" name="Text 5"/>
-          <p:cNvSpPr/>
-          <p:nvPr/>
-        </p:nvSpPr>
-        <p:spPr>
-          <a:xfrm>
-            <a:off x="2935224" y="2322576"/>
-            <a:ext cx="292608" cy="292608"/>
-          </a:xfrm>
-          <a:prstGeom prst="rect">
-            <a:avLst/>
-          </a:prstGeom>
-          <a:noFill/>
-          <a:ln/>
-        </p:spPr>
-        <p:txBody>
-          <a:bodyPr wrap="square" rtlCol="0" anchor="ctr"/>
-          <a:lstStyle/>
-          <a:p>
-            <a:pPr algn="ctr" indent="0" marL="0">
-              <a:buNone/>
-            </a:pPr>
-            <a:r>
-              <a:rPr lang="en-US" sz="1300" b="1" dirty="0">
-                <a:solidFill>
-                  <a:srgbClr val="FFFFFF"/>
-                </a:solidFill>
-                <a:latin typeface="Cambria" pitchFamily="34" charset="0"/>
-                <a:ea typeface="Cambria" pitchFamily="34" charset="-122"/>
-                <a:cs typeface="Cambria" pitchFamily="34" charset="-120"/>
-              </a:rPr>
-              <a:t>2</a:t>
-            </a:r>
-            <a:endParaRPr lang="en-US" sz="1300" dirty="0"/>
-          </a:p>
-        </p:txBody>
-      </p:sp>
-      <p:sp>
-        <p:nvSpPr>
-          <p:cNvPr id="8" name="Shape 6"/>
-          <p:cNvSpPr/>
-          <p:nvPr/>
-        </p:nvSpPr>
-        <p:spPr>
-          <a:xfrm>
-            <a:off x="4727448" y="2322576"/>
-            <a:ext cx="292608" cy="292608"/>
-          </a:xfrm>
-          <a:prstGeom prst="ellipse">
-            <a:avLst/>
-          </a:prstGeom>
-          <a:solidFill>
-            <a:srgbClr val="D97C2B"/>
-          </a:solidFill>
-          <a:ln/>
-        </p:spPr>
-      </p:sp>
-      <p:sp>
-        <p:nvSpPr>
-          <p:cNvPr id="9" name="Text 7"/>
-          <p:cNvSpPr/>
-          <p:nvPr/>
-        </p:nvSpPr>
-        <p:spPr>
-          <a:xfrm>
-            <a:off x="4727448" y="2322576"/>
-            <a:ext cx="292608" cy="292608"/>
-          </a:xfrm>
-          <a:prstGeom prst="rect">
-            <a:avLst/>
-          </a:prstGeom>
-          <a:noFill/>
-          <a:ln/>
-        </p:spPr>
-        <p:txBody>
-          <a:bodyPr wrap="square" rtlCol="0" anchor="ctr"/>
-          <a:lstStyle/>
-          <a:p>
-            <a:pPr algn="ctr" indent="0" marL="0">
-              <a:buNone/>
-            </a:pPr>
-            <a:r>
-              <a:rPr lang="en-US" sz="1300" b="1" dirty="0">
-                <a:solidFill>
-                  <a:srgbClr val="FFFFFF"/>
-                </a:solidFill>
-                <a:latin typeface="Cambria" pitchFamily="34" charset="0"/>
-                <a:ea typeface="Cambria" pitchFamily="34" charset="-122"/>
-                <a:cs typeface="Cambria" pitchFamily="34" charset="-120"/>
-              </a:rPr>
-              <a:t>3</a:t>
-            </a:r>
-            <a:endParaRPr lang="en-US" sz="1300" dirty="0"/>
-          </a:p>
-        </p:txBody>
-      </p:sp>
-      <p:sp>
-        <p:nvSpPr>
-          <p:cNvPr id="10" name="Shape 8"/>
-          <p:cNvSpPr/>
-          <p:nvPr/>
-        </p:nvSpPr>
-        <p:spPr>
-          <a:xfrm>
-            <a:off x="6519672" y="2322576"/>
-            <a:ext cx="292608" cy="292608"/>
-          </a:xfrm>
-          <a:prstGeom prst="ellipse">
-            <a:avLst/>
-          </a:prstGeom>
-          <a:solidFill>
-            <a:srgbClr val="D97C2B"/>
-          </a:solidFill>
-          <a:ln/>
-        </p:spPr>
-      </p:sp>
-      <p:sp>
-        <p:nvSpPr>
-          <p:cNvPr id="11" name="Text 9"/>
-          <p:cNvSpPr/>
-          <p:nvPr/>
-        </p:nvSpPr>
-        <p:spPr>
-          <a:xfrm>
-            <a:off x="6519672" y="2322576"/>
-            <a:ext cx="292608" cy="292608"/>
-          </a:xfrm>
-          <a:prstGeom prst="rect">
-            <a:avLst/>
-          </a:prstGeom>
-          <a:noFill/>
-          <a:ln/>
-        </p:spPr>
-        <p:txBody>
-          <a:bodyPr wrap="square" rtlCol="0" anchor="ctr"/>
-          <a:lstStyle/>
-          <a:p>
-            <a:pPr algn="ctr" indent="0" marL="0">
-              <a:buNone/>
-            </a:pPr>
-            <a:r>
-              <a:rPr lang="en-US" sz="1300" b="1" dirty="0">
-                <a:solidFill>
-                  <a:srgbClr val="FFFFFF"/>
-                </a:solidFill>
-                <a:latin typeface="Cambria" pitchFamily="34" charset="0"/>
-                <a:ea typeface="Cambria" pitchFamily="34" charset="-122"/>
-                <a:cs typeface="Cambria" pitchFamily="34" charset="-120"/>
-              </a:rPr>
-              <a:t>4</a:t>
-            </a:r>
-            <a:endParaRPr lang="en-US" sz="1300" dirty="0"/>
-          </a:p>
-        </p:txBody>
-      </p:sp>
-      <p:sp>
-        <p:nvSpPr>
-          <p:cNvPr id="12" name="Shape 10"/>
-          <p:cNvSpPr/>
-          <p:nvPr/>
-        </p:nvSpPr>
-        <p:spPr>
-          <a:xfrm>
-            <a:off x="8311896" y="2322576"/>
-            <a:ext cx="292608" cy="292608"/>
-          </a:xfrm>
-          <a:prstGeom prst="ellipse">
-            <a:avLst/>
-          </a:prstGeom>
-          <a:solidFill>
-            <a:srgbClr val="D97C2B"/>
-          </a:solidFill>
-          <a:ln/>
-        </p:spPr>
-      </p:sp>
-      <p:sp>
-        <p:nvSpPr>
-          <p:cNvPr id="13" name="Text 11"/>
-          <p:cNvSpPr/>
-          <p:nvPr/>
-        </p:nvSpPr>
-        <p:spPr>
-          <a:xfrm>
-            <a:off x="8311896" y="2322576"/>
-            <a:ext cx="292608" cy="292608"/>
-          </a:xfrm>
-          <a:prstGeom prst="rect">
-            <a:avLst/>
-          </a:prstGeom>
-          <a:noFill/>
-          <a:ln/>
-        </p:spPr>
-        <p:txBody>
-          <a:bodyPr wrap="square" rtlCol="0" anchor="ctr"/>
-          <a:lstStyle/>
-          <a:p>
-            <a:pPr algn="ctr" indent="0" marL="0">
-              <a:buNone/>
-            </a:pPr>
-            <a:r>
-              <a:rPr lang="en-US" sz="1300" b="1" dirty="0">
-                <a:solidFill>
-                  <a:srgbClr val="FFFFFF"/>
-                </a:solidFill>
-                <a:latin typeface="Cambria" pitchFamily="34" charset="0"/>
-                <a:ea typeface="Cambria" pitchFamily="34" charset="-122"/>
-                <a:cs typeface="Cambria" pitchFamily="34" charset="-120"/>
-              </a:rPr>
-              <a:t>5</a:t>
-            </a:r>
-            <a:endParaRPr lang="en-US" sz="1300" dirty="0"/>
-          </a:p>
-        </p:txBody>
-      </p:sp>
-      <p:sp>
-        <p:nvSpPr>
-          <p:cNvPr id="14" name="Shape 12"/>
-          <p:cNvSpPr/>
-          <p:nvPr/>
-        </p:nvSpPr>
-        <p:spPr>
-          <a:xfrm>
-            <a:off x="10104120" y="2322576"/>
-            <a:ext cx="292608" cy="292608"/>
-          </a:xfrm>
-          <a:prstGeom prst="ellipse">
-            <a:avLst/>
-          </a:prstGeom>
-          <a:solidFill>
-            <a:srgbClr val="D97C2B"/>
-          </a:solidFill>
-          <a:ln/>
-        </p:spPr>
-      </p:sp>
-      <p:sp>
-        <p:nvSpPr>
-          <p:cNvPr id="15" name="Text 13"/>
-          <p:cNvSpPr/>
-          <p:nvPr/>
-        </p:nvSpPr>
-        <p:spPr>
-          <a:xfrm>
-            <a:off x="10104120" y="2322576"/>
-            <a:ext cx="292608" cy="292608"/>
-          </a:xfrm>
-          <a:prstGeom prst="rect">
-            <a:avLst/>
-          </a:prstGeom>
-          <a:noFill/>
-          <a:ln/>
-        </p:spPr>
-        <p:txBody>
-          <a:bodyPr wrap="square" rtlCol="0" anchor="ctr"/>
-          <a:lstStyle/>
-          <a:p>
-            <a:pPr algn="ctr" indent="0" marL="0">
-              <a:buNone/>
-            </a:pPr>
-            <a:r>
-              <a:rPr lang="en-US" sz="1300" b="1" dirty="0">
-                <a:solidFill>
-                  <a:srgbClr val="FFFFFF"/>
-                </a:solidFill>
-                <a:latin typeface="Cambria" pitchFamily="34" charset="0"/>
-                <a:ea typeface="Cambria" pitchFamily="34" charset="-122"/>
-                <a:cs typeface="Cambria" pitchFamily="34" charset="-120"/>
-              </a:rPr>
-              <a:t>6</a:t>
-            </a:r>
-            <a:endParaRPr lang="en-US" sz="1300" dirty="0"/>
-          </a:p>
-        </p:txBody>
-      </p:sp>
-      <p:sp>
-        <p:nvSpPr>
-          <p:cNvPr id="16" name="Shape 14"/>
-          <p:cNvSpPr/>
-          <p:nvPr/>
-        </p:nvSpPr>
-        <p:spPr>
-          <a:xfrm>
-            <a:off x="548640" y="2743200"/>
-            <a:ext cx="1481328" cy="1234440"/>
-          </a:xfrm>
-          <a:prstGeom prst="roundRect">
-            <a:avLst>
-              <a:gd name="adj" fmla="val 7407"/>
-            </a:avLst>
-          </a:prstGeom>
-          <a:solidFill>
-            <a:srgbClr val="12395C"/>
-          </a:solidFill>
-          <a:ln/>
-          <a:effectLst>
-            <a:outerShdw sx="100000" sy="100000" kx="0" ky="0" algn="bl" rotWithShape="0" blurRad="76200" dist="25400" dir="5400000">
-              <a:srgbClr val="9AA7B4">
-                <a:alpha val="28000"/>
-              </a:srgbClr>
-            </a:outerShdw>
-          </a:effectLst>
-        </p:spPr>
-      </p:sp>
-      <p:pic>
-        <p:nvPicPr>
-          <p:cNvPr id="17" name="Image 0" descr="/home/claude/output2/icons/image.png">    </p:cNvPr>
-          <p:cNvPicPr>
-            <a:picLocks noChangeAspect="1"/>
-          </p:cNvPicPr>
-          <p:nvPr/>
-        </p:nvPicPr>
-        <p:blipFill>
-          <a:blip r:embed="rId1"/>
-          <a:stretch>
-            <a:fillRect/>
-          </a:stretch>
-        </p:blipFill>
-        <p:spPr>
-          <a:xfrm>
-            <a:off x="1051560" y="2871216"/>
-            <a:ext cx="475488" cy="475488"/>
-          </a:xfrm>
-          <a:prstGeom prst="rect">
-            <a:avLst/>
-          </a:prstGeom>
-        </p:spPr>
-      </p:pic>
-      <p:sp>
-        <p:nvSpPr>
-          <p:cNvPr id="18" name="Text 15"/>
-          <p:cNvSpPr/>
-          <p:nvPr/>
-        </p:nvSpPr>
-        <p:spPr>
-          <a:xfrm>
-            <a:off x="621792" y="3383280"/>
-            <a:ext cx="1335024" cy="320040"/>
-          </a:xfrm>
-          <a:prstGeom prst="rect">
-            <a:avLst/>
-          </a:prstGeom>
-          <a:noFill/>
-          <a:ln/>
-        </p:spPr>
-        <p:txBody>
-          <a:bodyPr wrap="square" rtlCol="0" anchor="ctr"/>
-          <a:lstStyle/>
-          <a:p>
-            <a:pPr algn="ctr" indent="0" marL="0">
-              <a:buNone/>
-            </a:pPr>
-            <a:r>
-              <a:rPr lang="en-US" sz="1150" b="1" dirty="0">
-                <a:solidFill>
-                  <a:srgbClr val="FFFFFF"/>
-                </a:solidFill>
-                <a:latin typeface="Calibri" pitchFamily="34" charset="0"/>
-                <a:ea typeface="Calibri" pitchFamily="34" charset="-122"/>
-                <a:cs typeface="Calibri" pitchFamily="34" charset="-120"/>
-              </a:rPr>
-              <a:t>Ảnh X-quang</a:t>
+              <a:rPr lang="en-US" sz="1150" i="1" dirty="0">
+                <a:solidFill>
+                  <a:srgbClr val="5B6774"/>
+                </a:solidFill>
+                <a:latin typeface="Calibri" pitchFamily="34" charset="0"/>
+                <a:ea typeface="Calibri" pitchFamily="34" charset="-122"/>
+                <a:cs typeface="Calibri" pitchFamily="34" charset="-120"/>
+              </a:rPr>
+              <a:t>5 đặc trưng này là toàn bộ “giác quan” của ANFIS — không có dữ liệu nào khác (tuổi, giới tính…) được đưa vào mạng.</a:t>
             </a:r>
             <a:endParaRPr lang="en-US" sz="1150" dirty="0"/>
           </a:p>
@@ -4084,1159 +5362,7 @@
       </p:sp>
       <p:sp>
         <p:nvSpPr>
-          <p:cNvPr id="19" name="Text 16"/>
-          <p:cNvSpPr/>
-          <p:nvPr/>
-        </p:nvSpPr>
-        <p:spPr>
-          <a:xfrm>
-            <a:off x="621792" y="3685032"/>
-            <a:ext cx="1335024" cy="274320"/>
-          </a:xfrm>
-          <a:prstGeom prst="rect">
-            <a:avLst/>
-          </a:prstGeom>
-          <a:noFill/>
-          <a:ln/>
-        </p:spPr>
-        <p:txBody>
-          <a:bodyPr wrap="square" rtlCol="0" anchor="ctr"/>
-          <a:lstStyle/>
-          <a:p>
-            <a:pPr algn="ctr" indent="0" marL="0">
-              <a:buNone/>
-            </a:pPr>
-            <a:r>
-              <a:rPr lang="en-US" sz="900" dirty="0">
-                <a:solidFill>
-                  <a:srgbClr val="E7EEF3"/>
-                </a:solidFill>
-                <a:latin typeface="Calibri" pitchFamily="34" charset="0"/>
-                <a:ea typeface="Calibri" pitchFamily="34" charset="-122"/>
-                <a:cs typeface="Calibri" pitchFamily="34" charset="-120"/>
-              </a:rPr>
-              <a:t>đầu vào</a:t>
-            </a:r>
-            <a:endParaRPr lang="en-US" sz="900" dirty="0"/>
-          </a:p>
-        </p:txBody>
-      </p:sp>
-      <p:sp>
-        <p:nvSpPr>
-          <p:cNvPr id="20" name="Shape 17"/>
-          <p:cNvSpPr/>
-          <p:nvPr/>
-        </p:nvSpPr>
-        <p:spPr>
-          <a:xfrm>
-            <a:off x="2340864" y="2743200"/>
-            <a:ext cx="1481328" cy="1234440"/>
-          </a:xfrm>
-          <a:prstGeom prst="roundRect">
-            <a:avLst>
-              <a:gd name="adj" fmla="val 7407"/>
-            </a:avLst>
-          </a:prstGeom>
-          <a:solidFill>
-            <a:srgbClr val="12395C"/>
-          </a:solidFill>
-          <a:ln/>
-          <a:effectLst>
-            <a:outerShdw sx="100000" sy="100000" kx="0" ky="0" algn="bl" rotWithShape="0" blurRad="76200" dist="25400" dir="5400000">
-              <a:srgbClr val="9AA7B4">
-                <a:alpha val="28000"/>
-              </a:srgbClr>
-            </a:outerShdw>
-          </a:effectLst>
-        </p:spPr>
-      </p:sp>
-      <p:pic>
-        <p:nvPicPr>
-          <p:cNvPr id="21" name="Image 1" descr="/home/claude/output2/icons/cogs.png">    </p:cNvPr>
-          <p:cNvPicPr>
-            <a:picLocks noChangeAspect="1"/>
-          </p:cNvPicPr>
-          <p:nvPr/>
-        </p:nvPicPr>
-        <p:blipFill>
-          <a:blip r:embed="rId2"/>
-          <a:stretch>
-            <a:fillRect/>
-          </a:stretch>
-        </p:blipFill>
-        <p:spPr>
-          <a:xfrm>
-            <a:off x="2843784" y="2871216"/>
-            <a:ext cx="475488" cy="475488"/>
-          </a:xfrm>
-          <a:prstGeom prst="rect">
-            <a:avLst/>
-          </a:prstGeom>
-        </p:spPr>
-      </p:pic>
-      <p:sp>
-        <p:nvSpPr>
-          <p:cNvPr id="22" name="Text 18"/>
-          <p:cNvSpPr/>
-          <p:nvPr/>
-        </p:nvSpPr>
-        <p:spPr>
-          <a:xfrm>
-            <a:off x="2414016" y="3383280"/>
-            <a:ext cx="1335024" cy="320040"/>
-          </a:xfrm>
-          <a:prstGeom prst="rect">
-            <a:avLst/>
-          </a:prstGeom>
-          <a:noFill/>
-          <a:ln/>
-        </p:spPr>
-        <p:txBody>
-          <a:bodyPr wrap="square" rtlCol="0" anchor="ctr"/>
-          <a:lstStyle/>
-          <a:p>
-            <a:pPr algn="ctr" indent="0" marL="0">
-              <a:buNone/>
-            </a:pPr>
-            <a:r>
-              <a:rPr lang="en-US" sz="1150" b="1" dirty="0">
-                <a:solidFill>
-                  <a:srgbClr val="FFFFFF"/>
-                </a:solidFill>
-                <a:latin typeface="Calibri" pitchFamily="34" charset="0"/>
-                <a:ea typeface="Calibri" pitchFamily="34" charset="-122"/>
-                <a:cs typeface="Calibri" pitchFamily="34" charset="-120"/>
-              </a:rPr>
-              <a:t>Tiền xử lý</a:t>
-            </a:r>
-            <a:endParaRPr lang="en-US" sz="1150" dirty="0"/>
-          </a:p>
-        </p:txBody>
-      </p:sp>
-      <p:sp>
-        <p:nvSpPr>
-          <p:cNvPr id="23" name="Text 19"/>
-          <p:cNvSpPr/>
-          <p:nvPr/>
-        </p:nvSpPr>
-        <p:spPr>
-          <a:xfrm>
-            <a:off x="2414016" y="3685032"/>
-            <a:ext cx="1335024" cy="274320"/>
-          </a:xfrm>
-          <a:prstGeom prst="rect">
-            <a:avLst/>
-          </a:prstGeom>
-          <a:noFill/>
-          <a:ln/>
-        </p:spPr>
-        <p:txBody>
-          <a:bodyPr wrap="square" rtlCol="0" anchor="ctr"/>
-          <a:lstStyle/>
-          <a:p>
-            <a:pPr algn="ctr" indent="0" marL="0">
-              <a:buNone/>
-            </a:pPr>
-            <a:r>
-              <a:rPr lang="en-US" sz="900" dirty="0">
-                <a:solidFill>
-                  <a:srgbClr val="E7EEF3"/>
-                </a:solidFill>
-                <a:latin typeface="Calibri" pitchFamily="34" charset="0"/>
-                <a:ea typeface="Calibri" pitchFamily="34" charset="-122"/>
-                <a:cs typeface="Calibri" pitchFamily="34" charset="-120"/>
-              </a:rPr>
-              <a:t>làm rõ ảnh (CLAHE)</a:t>
-            </a:r>
-            <a:endParaRPr lang="en-US" sz="900" dirty="0"/>
-          </a:p>
-        </p:txBody>
-      </p:sp>
-      <p:sp>
-        <p:nvSpPr>
-          <p:cNvPr id="24" name="Shape 20"/>
-          <p:cNvSpPr/>
-          <p:nvPr/>
-        </p:nvSpPr>
-        <p:spPr>
-          <a:xfrm>
-            <a:off x="2075688" y="3360420"/>
-            <a:ext cx="219456" cy="0"/>
-          </a:xfrm>
-          <a:prstGeom prst="line">
-            <a:avLst/>
-          </a:prstGeom>
-          <a:noFill/>
-          <a:ln w="22225">
-            <a:solidFill>
-              <a:srgbClr val="5B6774"/>
-            </a:solidFill>
-            <a:prstDash val="solid"/>
-            <a:tailEnd type="triangle"/>
-          </a:ln>
-        </p:spPr>
-      </p:sp>
-      <p:sp>
-        <p:nvSpPr>
-          <p:cNvPr id="25" name="Shape 21"/>
-          <p:cNvSpPr/>
-          <p:nvPr/>
-        </p:nvSpPr>
-        <p:spPr>
-          <a:xfrm>
-            <a:off x="3867912" y="3360420"/>
-            <a:ext cx="219456" cy="0"/>
-          </a:xfrm>
-          <a:prstGeom prst="line">
-            <a:avLst/>
-          </a:prstGeom>
-          <a:noFill/>
-          <a:ln w="22225">
-            <a:solidFill>
-              <a:srgbClr val="5B6774"/>
-            </a:solidFill>
-            <a:prstDash val="solid"/>
-            <a:tailEnd type="triangle"/>
-          </a:ln>
-        </p:spPr>
-      </p:sp>
-      <p:sp>
-        <p:nvSpPr>
-          <p:cNvPr id="26" name="Shape 22"/>
-          <p:cNvSpPr/>
-          <p:nvPr/>
-        </p:nvSpPr>
-        <p:spPr>
-          <a:xfrm>
-            <a:off x="4133088" y="1965960"/>
-            <a:ext cx="1481328" cy="1234440"/>
-          </a:xfrm>
-          <a:prstGeom prst="roundRect">
-            <a:avLst>
-              <a:gd name="adj" fmla="val 7407"/>
-            </a:avLst>
-          </a:prstGeom>
-          <a:solidFill>
-            <a:srgbClr val="12395C"/>
-          </a:solidFill>
-          <a:ln/>
-          <a:effectLst>
-            <a:outerShdw sx="100000" sy="100000" kx="0" ky="0" algn="bl" rotWithShape="0" blurRad="76200" dist="25400" dir="5400000">
-              <a:srgbClr val="9AA7B4">
-                <a:alpha val="28000"/>
-              </a:srgbClr>
-            </a:outerShdw>
-          </a:effectLst>
-        </p:spPr>
-      </p:sp>
-      <p:pic>
-        <p:nvPicPr>
-          <p:cNvPr id="27" name="Image 2" descr="/home/claude/output2/icons/yolo.png">    </p:cNvPr>
-          <p:cNvPicPr>
-            <a:picLocks noChangeAspect="1"/>
-          </p:cNvPicPr>
-          <p:nvPr/>
-        </p:nvPicPr>
-        <p:blipFill>
-          <a:blip r:embed="rId3"/>
-          <a:stretch>
-            <a:fillRect/>
-          </a:stretch>
-        </p:blipFill>
-        <p:spPr>
-          <a:xfrm>
-            <a:off x="4636008" y="2093976"/>
-            <a:ext cx="475488" cy="475488"/>
-          </a:xfrm>
-          <a:prstGeom prst="rect">
-            <a:avLst/>
-          </a:prstGeom>
-        </p:spPr>
-      </p:pic>
-      <p:sp>
-        <p:nvSpPr>
-          <p:cNvPr id="28" name="Text 23"/>
-          <p:cNvSpPr/>
-          <p:nvPr/>
-        </p:nvSpPr>
-        <p:spPr>
-          <a:xfrm>
-            <a:off x="4206240" y="2606040"/>
-            <a:ext cx="1335024" cy="320040"/>
-          </a:xfrm>
-          <a:prstGeom prst="rect">
-            <a:avLst/>
-          </a:prstGeom>
-          <a:noFill/>
-          <a:ln/>
-        </p:spPr>
-        <p:txBody>
-          <a:bodyPr wrap="square" rtlCol="0" anchor="ctr"/>
-          <a:lstStyle/>
-          <a:p>
-            <a:pPr algn="ctr" indent="0" marL="0">
-              <a:buNone/>
-            </a:pPr>
-            <a:r>
-              <a:rPr lang="en-US" sz="1150" b="1" dirty="0">
-                <a:solidFill>
-                  <a:srgbClr val="FFFFFF"/>
-                </a:solidFill>
-                <a:latin typeface="Calibri" pitchFamily="34" charset="0"/>
-                <a:ea typeface="Calibri" pitchFamily="34" charset="-122"/>
-                <a:cs typeface="Calibri" pitchFamily="34" charset="-120"/>
-              </a:rPr>
-              <a:t>YOLOv11</a:t>
-            </a:r>
-            <a:endParaRPr lang="en-US" sz="1150" dirty="0"/>
-          </a:p>
-        </p:txBody>
-      </p:sp>
-      <p:sp>
-        <p:nvSpPr>
-          <p:cNvPr id="29" name="Text 24"/>
-          <p:cNvSpPr/>
-          <p:nvPr/>
-        </p:nvSpPr>
-        <p:spPr>
-          <a:xfrm>
-            <a:off x="4206240" y="2907792"/>
-            <a:ext cx="1335024" cy="274320"/>
-          </a:xfrm>
-          <a:prstGeom prst="rect">
-            <a:avLst/>
-          </a:prstGeom>
-          <a:noFill/>
-          <a:ln/>
-        </p:spPr>
-        <p:txBody>
-          <a:bodyPr wrap="square" rtlCol="0" anchor="ctr"/>
-          <a:lstStyle/>
-          <a:p>
-            <a:pPr algn="ctr" indent="0" marL="0">
-              <a:buNone/>
-            </a:pPr>
-            <a:r>
-              <a:rPr lang="en-US" sz="900" dirty="0">
-                <a:solidFill>
-                  <a:srgbClr val="E7EEF3"/>
-                </a:solidFill>
-                <a:latin typeface="Calibri" pitchFamily="34" charset="0"/>
-                <a:ea typeface="Calibri" pitchFamily="34" charset="-122"/>
-                <a:cs typeface="Calibri" pitchFamily="34" charset="-120"/>
-              </a:rPr>
-              <a:t>dò vùng gãy</a:t>
-            </a:r>
-            <a:endParaRPr lang="en-US" sz="900" dirty="0"/>
-          </a:p>
-        </p:txBody>
-      </p:sp>
-      <p:sp>
-        <p:nvSpPr>
-          <p:cNvPr id="30" name="Shape 25"/>
-          <p:cNvSpPr/>
-          <p:nvPr/>
-        </p:nvSpPr>
-        <p:spPr>
-          <a:xfrm>
-            <a:off x="4133088" y="3520440"/>
-            <a:ext cx="1481328" cy="1234440"/>
-          </a:xfrm>
-          <a:prstGeom prst="roundRect">
-            <a:avLst>
-              <a:gd name="adj" fmla="val 7407"/>
-            </a:avLst>
-          </a:prstGeom>
-          <a:solidFill>
-            <a:srgbClr val="1C7293"/>
-          </a:solidFill>
-          <a:ln/>
-          <a:effectLst>
-            <a:outerShdw sx="100000" sy="100000" kx="0" ky="0" algn="bl" rotWithShape="0" blurRad="76200" dist="25400" dir="5400000">
-              <a:srgbClr val="9AA7B4">
-                <a:alpha val="28000"/>
-              </a:srgbClr>
-            </a:outerShdw>
-          </a:effectLst>
-        </p:spPr>
-      </p:sp>
-      <p:pic>
-        <p:nvPicPr>
-          <p:cNvPr id="31" name="Image 3" descr="/home/claude/output2/icons/fractal.png">    </p:cNvPr>
-          <p:cNvPicPr>
-            <a:picLocks noChangeAspect="1"/>
-          </p:cNvPicPr>
-          <p:nvPr/>
-        </p:nvPicPr>
-        <p:blipFill>
-          <a:blip r:embed="rId4"/>
-          <a:stretch>
-            <a:fillRect/>
-          </a:stretch>
-        </p:blipFill>
-        <p:spPr>
-          <a:xfrm>
-            <a:off x="4636008" y="3648456"/>
-            <a:ext cx="475488" cy="475488"/>
-          </a:xfrm>
-          <a:prstGeom prst="rect">
-            <a:avLst/>
-          </a:prstGeom>
-        </p:spPr>
-      </p:pic>
-      <p:sp>
-        <p:nvSpPr>
-          <p:cNvPr id="32" name="Text 26"/>
-          <p:cNvSpPr/>
-          <p:nvPr/>
-        </p:nvSpPr>
-        <p:spPr>
-          <a:xfrm>
-            <a:off x="4206240" y="4160520"/>
-            <a:ext cx="1335024" cy="320040"/>
-          </a:xfrm>
-          <a:prstGeom prst="rect">
-            <a:avLst/>
-          </a:prstGeom>
-          <a:noFill/>
-          <a:ln/>
-        </p:spPr>
-        <p:txBody>
-          <a:bodyPr wrap="square" rtlCol="0" anchor="ctr"/>
-          <a:lstStyle/>
-          <a:p>
-            <a:pPr algn="ctr" indent="0" marL="0">
-              <a:buNone/>
-            </a:pPr>
-            <a:r>
-              <a:rPr lang="en-US" sz="1150" b="1" dirty="0">
-                <a:solidFill>
-                  <a:srgbClr val="FFFFFF"/>
-                </a:solidFill>
-                <a:latin typeface="Calibri" pitchFamily="34" charset="0"/>
-                <a:ea typeface="Calibri" pitchFamily="34" charset="-122"/>
-                <a:cs typeface="Calibri" pitchFamily="34" charset="-120"/>
-              </a:rPr>
-              <a:t>Fractal</a:t>
-            </a:r>
-            <a:endParaRPr lang="en-US" sz="1150" dirty="0"/>
-          </a:p>
-        </p:txBody>
-      </p:sp>
-      <p:sp>
-        <p:nvSpPr>
-          <p:cNvPr id="33" name="Text 27"/>
-          <p:cNvSpPr/>
-          <p:nvPr/>
-        </p:nvSpPr>
-        <p:spPr>
-          <a:xfrm>
-            <a:off x="4206240" y="4462272"/>
-            <a:ext cx="1335024" cy="274320"/>
-          </a:xfrm>
-          <a:prstGeom prst="rect">
-            <a:avLst/>
-          </a:prstGeom>
-          <a:noFill/>
-          <a:ln/>
-        </p:spPr>
-        <p:txBody>
-          <a:bodyPr wrap="square" rtlCol="0" anchor="ctr"/>
-          <a:lstStyle/>
-          <a:p>
-            <a:pPr algn="ctr" indent="0" marL="0">
-              <a:buNone/>
-            </a:pPr>
-            <a:r>
-              <a:rPr lang="en-US" sz="900" dirty="0">
-                <a:solidFill>
-                  <a:srgbClr val="E7EEF3"/>
-                </a:solidFill>
-                <a:latin typeface="Calibri" pitchFamily="34" charset="0"/>
-                <a:ea typeface="Calibri" pitchFamily="34" charset="-122"/>
-                <a:cs typeface="Calibri" pitchFamily="34" charset="-120"/>
-              </a:rPr>
-              <a:t>đo độ gồ ghề viền</a:t>
-            </a:r>
-            <a:endParaRPr lang="en-US" sz="900" dirty="0"/>
-          </a:p>
-        </p:txBody>
-      </p:sp>
-      <p:sp>
-        <p:nvSpPr>
-          <p:cNvPr id="34" name="Shape 28"/>
-          <p:cNvSpPr/>
-          <p:nvPr/>
-        </p:nvSpPr>
-        <p:spPr>
-          <a:xfrm>
-            <a:off x="4087368" y="3360420"/>
-            <a:ext cx="0" cy="-777240"/>
-          </a:xfrm>
-          <a:prstGeom prst="line">
-            <a:avLst/>
-          </a:prstGeom>
-          <a:noFill/>
-          <a:ln w="22225">
-            <a:solidFill>
-              <a:srgbClr val="5B6774"/>
-            </a:solidFill>
-            <a:prstDash val="solid"/>
-            <a:tailEnd type="none"/>
-          </a:ln>
-        </p:spPr>
-      </p:sp>
-      <p:sp>
-        <p:nvSpPr>
-          <p:cNvPr id="35" name="Shape 29"/>
-          <p:cNvSpPr/>
-          <p:nvPr/>
-        </p:nvSpPr>
-        <p:spPr>
-          <a:xfrm>
-            <a:off x="4087368" y="3360420"/>
-            <a:ext cx="0" cy="777240"/>
-          </a:xfrm>
-          <a:prstGeom prst="line">
-            <a:avLst/>
-          </a:prstGeom>
-          <a:noFill/>
-          <a:ln w="22225">
-            <a:solidFill>
-              <a:srgbClr val="5B6774"/>
-            </a:solidFill>
-            <a:prstDash val="solid"/>
-            <a:tailEnd type="none"/>
-          </a:ln>
-        </p:spPr>
-      </p:sp>
-      <p:sp>
-        <p:nvSpPr>
-          <p:cNvPr id="36" name="Shape 30"/>
-          <p:cNvSpPr/>
-          <p:nvPr/>
-        </p:nvSpPr>
-        <p:spPr>
-          <a:xfrm>
-            <a:off x="4087368" y="2583180"/>
-            <a:ext cx="45720" cy="0"/>
-          </a:xfrm>
-          <a:prstGeom prst="line">
-            <a:avLst/>
-          </a:prstGeom>
-          <a:noFill/>
-          <a:ln w="22225">
-            <a:solidFill>
-              <a:srgbClr val="5B6774"/>
-            </a:solidFill>
-            <a:prstDash val="solid"/>
-            <a:tailEnd type="triangle"/>
-          </a:ln>
-        </p:spPr>
-      </p:sp>
-      <p:sp>
-        <p:nvSpPr>
-          <p:cNvPr id="37" name="Shape 31"/>
-          <p:cNvSpPr/>
-          <p:nvPr/>
-        </p:nvSpPr>
-        <p:spPr>
-          <a:xfrm>
-            <a:off x="4087368" y="4137660"/>
-            <a:ext cx="45720" cy="0"/>
-          </a:xfrm>
-          <a:prstGeom prst="line">
-            <a:avLst/>
-          </a:prstGeom>
-          <a:noFill/>
-          <a:ln w="22225">
-            <a:solidFill>
-              <a:srgbClr val="5B6774"/>
-            </a:solidFill>
-            <a:prstDash val="solid"/>
-            <a:tailEnd type="triangle"/>
-          </a:ln>
-        </p:spPr>
-      </p:sp>
-      <p:sp>
-        <p:nvSpPr>
-          <p:cNvPr id="38" name="Shape 32"/>
-          <p:cNvSpPr/>
-          <p:nvPr/>
-        </p:nvSpPr>
-        <p:spPr>
-          <a:xfrm>
-            <a:off x="5925312" y="2743200"/>
-            <a:ext cx="1481328" cy="1234440"/>
-          </a:xfrm>
-          <a:prstGeom prst="roundRect">
-            <a:avLst>
-              <a:gd name="adj" fmla="val 7407"/>
-            </a:avLst>
-          </a:prstGeom>
-          <a:solidFill>
-            <a:srgbClr val="D97C2B"/>
-          </a:solidFill>
-          <a:ln/>
-          <a:effectLst>
-            <a:outerShdw sx="100000" sy="100000" kx="0" ky="0" algn="bl" rotWithShape="0" blurRad="76200" dist="25400" dir="5400000">
-              <a:srgbClr val="9AA7B4">
-                <a:alpha val="28000"/>
-              </a:srgbClr>
-            </a:outerShdw>
-          </a:effectLst>
-        </p:spPr>
-      </p:sp>
-      <p:pic>
-        <p:nvPicPr>
-          <p:cNvPr id="39" name="Image 4" descr="/home/claude/output2/icons/filter.png">    </p:cNvPr>
-          <p:cNvPicPr>
-            <a:picLocks noChangeAspect="1"/>
-          </p:cNvPicPr>
-          <p:nvPr/>
-        </p:nvPicPr>
-        <p:blipFill>
-          <a:blip r:embed="rId5"/>
-          <a:stretch>
-            <a:fillRect/>
-          </a:stretch>
-        </p:blipFill>
-        <p:spPr>
-          <a:xfrm>
-            <a:off x="6428232" y="2871216"/>
-            <a:ext cx="475488" cy="475488"/>
-          </a:xfrm>
-          <a:prstGeom prst="rect">
-            <a:avLst/>
-          </a:prstGeom>
-        </p:spPr>
-      </p:pic>
-      <p:sp>
-        <p:nvSpPr>
-          <p:cNvPr id="40" name="Text 33"/>
-          <p:cNvSpPr/>
-          <p:nvPr/>
-        </p:nvSpPr>
-        <p:spPr>
-          <a:xfrm>
-            <a:off x="5998464" y="3383280"/>
-            <a:ext cx="1335024" cy="320040"/>
-          </a:xfrm>
-          <a:prstGeom prst="rect">
-            <a:avLst/>
-          </a:prstGeom>
-          <a:noFill/>
-          <a:ln/>
-        </p:spPr>
-        <p:txBody>
-          <a:bodyPr wrap="square" rtlCol="0" anchor="ctr"/>
-          <a:lstStyle/>
-          <a:p>
-            <a:pPr algn="ctr" indent="0" marL="0">
-              <a:buNone/>
-            </a:pPr>
-            <a:r>
-              <a:rPr lang="en-US" sz="1150" b="1" dirty="0">
-                <a:solidFill>
-                  <a:srgbClr val="FFFFFF"/>
-                </a:solidFill>
-                <a:latin typeface="Calibri" pitchFamily="34" charset="0"/>
-                <a:ea typeface="Calibri" pitchFamily="34" charset="-122"/>
-                <a:cs typeface="Calibri" pitchFamily="34" charset="-120"/>
-              </a:rPr>
-              <a:t>Gộp &amp; trích</a:t>
-            </a:r>
-            <a:endParaRPr lang="en-US" sz="1150" dirty="0"/>
-          </a:p>
-        </p:txBody>
-      </p:sp>
-      <p:sp>
-        <p:nvSpPr>
-          <p:cNvPr id="41" name="Text 34"/>
-          <p:cNvSpPr/>
-          <p:nvPr/>
-        </p:nvSpPr>
-        <p:spPr>
-          <a:xfrm>
-            <a:off x="5998464" y="3685032"/>
-            <a:ext cx="1335024" cy="274320"/>
-          </a:xfrm>
-          <a:prstGeom prst="rect">
-            <a:avLst/>
-          </a:prstGeom>
-          <a:noFill/>
-          <a:ln/>
-        </p:spPr>
-        <p:txBody>
-          <a:bodyPr wrap="square" rtlCol="0" anchor="ctr"/>
-          <a:lstStyle/>
-          <a:p>
-            <a:pPr algn="ctr" indent="0" marL="0">
-              <a:buNone/>
-            </a:pPr>
-            <a:r>
-              <a:rPr lang="en-US" sz="900" dirty="0">
-                <a:solidFill>
-                  <a:srgbClr val="E7EEF3"/>
-                </a:solidFill>
-                <a:latin typeface="Calibri" pitchFamily="34" charset="0"/>
-                <a:ea typeface="Calibri" pitchFamily="34" charset="-122"/>
-                <a:cs typeface="Calibri" pitchFamily="34" charset="-120"/>
-              </a:rPr>
-              <a:t>NMS + 9 đặc trưng</a:t>
-            </a:r>
-            <a:endParaRPr lang="en-US" sz="900" dirty="0"/>
-          </a:p>
-        </p:txBody>
-      </p:sp>
-      <p:sp>
-        <p:nvSpPr>
-          <p:cNvPr id="42" name="Shape 35"/>
-          <p:cNvSpPr/>
-          <p:nvPr/>
-        </p:nvSpPr>
-        <p:spPr>
-          <a:xfrm>
-            <a:off x="5660136" y="2583180"/>
-            <a:ext cx="0" cy="777240"/>
-          </a:xfrm>
-          <a:prstGeom prst="line">
-            <a:avLst/>
-          </a:prstGeom>
-          <a:noFill/>
-          <a:ln w="22225">
-            <a:solidFill>
-              <a:srgbClr val="5B6774"/>
-            </a:solidFill>
-            <a:prstDash val="solid"/>
-            <a:tailEnd type="none"/>
-          </a:ln>
-        </p:spPr>
-      </p:sp>
-      <p:sp>
-        <p:nvSpPr>
-          <p:cNvPr id="43" name="Shape 36"/>
-          <p:cNvSpPr/>
-          <p:nvPr/>
-        </p:nvSpPr>
-        <p:spPr>
-          <a:xfrm>
-            <a:off x="5660136" y="4137660"/>
-            <a:ext cx="0" cy="-777240"/>
-          </a:xfrm>
-          <a:prstGeom prst="line">
-            <a:avLst/>
-          </a:prstGeom>
-          <a:noFill/>
-          <a:ln w="22225">
-            <a:solidFill>
-              <a:srgbClr val="5B6774"/>
-            </a:solidFill>
-            <a:prstDash val="solid"/>
-            <a:tailEnd type="none"/>
-          </a:ln>
-        </p:spPr>
-      </p:sp>
-      <p:sp>
-        <p:nvSpPr>
-          <p:cNvPr id="44" name="Shape 37"/>
-          <p:cNvSpPr/>
-          <p:nvPr/>
-        </p:nvSpPr>
-        <p:spPr>
-          <a:xfrm>
-            <a:off x="5660136" y="2583180"/>
-            <a:ext cx="265176" cy="0"/>
-          </a:xfrm>
-          <a:prstGeom prst="line">
-            <a:avLst/>
-          </a:prstGeom>
-          <a:noFill/>
-          <a:ln w="22225">
-            <a:solidFill>
-              <a:srgbClr val="5B6774"/>
-            </a:solidFill>
-            <a:prstDash val="solid"/>
-            <a:tailEnd type="triangle"/>
-          </a:ln>
-        </p:spPr>
-      </p:sp>
-      <p:sp>
-        <p:nvSpPr>
-          <p:cNvPr id="45" name="Shape 38"/>
-          <p:cNvSpPr/>
-          <p:nvPr/>
-        </p:nvSpPr>
-        <p:spPr>
-          <a:xfrm>
-            <a:off x="5660136" y="4137660"/>
-            <a:ext cx="264262" cy="0"/>
-          </a:xfrm>
-          <a:prstGeom prst="line">
-            <a:avLst/>
-          </a:prstGeom>
-          <a:noFill/>
-          <a:ln w="22225">
-            <a:solidFill>
-              <a:srgbClr val="5B6774"/>
-            </a:solidFill>
-            <a:prstDash val="solid"/>
-            <a:tailEnd type="triangle"/>
-          </a:ln>
-        </p:spPr>
-      </p:sp>
-      <p:sp>
-        <p:nvSpPr>
-          <p:cNvPr id="46" name="Shape 39"/>
-          <p:cNvSpPr/>
-          <p:nvPr/>
-        </p:nvSpPr>
-        <p:spPr>
-          <a:xfrm>
-            <a:off x="7717536" y="2743200"/>
-            <a:ext cx="1481328" cy="1234440"/>
-          </a:xfrm>
-          <a:prstGeom prst="roundRect">
-            <a:avLst>
-              <a:gd name="adj" fmla="val 7407"/>
-            </a:avLst>
-          </a:prstGeom>
-          <a:solidFill>
-            <a:srgbClr val="D97C2B"/>
-          </a:solidFill>
-          <a:ln/>
-          <a:effectLst>
-            <a:outerShdw sx="100000" sy="100000" kx="0" ky="0" algn="bl" rotWithShape="0" blurRad="76200" dist="25400" dir="5400000">
-              <a:srgbClr val="9AA7B4">
-                <a:alpha val="28000"/>
-              </a:srgbClr>
-            </a:outerShdw>
-          </a:effectLst>
-        </p:spPr>
-      </p:sp>
-      <p:pic>
-        <p:nvPicPr>
-          <p:cNvPr id="47" name="Image 5" descr="/home/claude/output2/icons/anfis.png">    </p:cNvPr>
-          <p:cNvPicPr>
-            <a:picLocks noChangeAspect="1"/>
-          </p:cNvPicPr>
-          <p:nvPr/>
-        </p:nvPicPr>
-        <p:blipFill>
-          <a:blip r:embed="rId6"/>
-          <a:stretch>
-            <a:fillRect/>
-          </a:stretch>
-        </p:blipFill>
-        <p:spPr>
-          <a:xfrm>
-            <a:off x="8220456" y="2871216"/>
-            <a:ext cx="475488" cy="475488"/>
-          </a:xfrm>
-          <a:prstGeom prst="rect">
-            <a:avLst/>
-          </a:prstGeom>
-        </p:spPr>
-      </p:pic>
-      <p:sp>
-        <p:nvSpPr>
-          <p:cNvPr id="48" name="Text 40"/>
-          <p:cNvSpPr/>
-          <p:nvPr/>
-        </p:nvSpPr>
-        <p:spPr>
-          <a:xfrm>
-            <a:off x="7790688" y="3383280"/>
-            <a:ext cx="1335024" cy="320040"/>
-          </a:xfrm>
-          <a:prstGeom prst="rect">
-            <a:avLst/>
-          </a:prstGeom>
-          <a:noFill/>
-          <a:ln/>
-        </p:spPr>
-        <p:txBody>
-          <a:bodyPr wrap="square" rtlCol="0" anchor="ctr"/>
-          <a:lstStyle/>
-          <a:p>
-            <a:pPr algn="ctr" indent="0" marL="0">
-              <a:buNone/>
-            </a:pPr>
-            <a:r>
-              <a:rPr lang="en-US" sz="1150" b="1" dirty="0">
-                <a:solidFill>
-                  <a:srgbClr val="FFFFFF"/>
-                </a:solidFill>
-                <a:latin typeface="Calibri" pitchFamily="34" charset="0"/>
-                <a:ea typeface="Calibri" pitchFamily="34" charset="-122"/>
-                <a:cs typeface="Calibri" pitchFamily="34" charset="-120"/>
-              </a:rPr>
-              <a:t>ANFIS</a:t>
-            </a:r>
-            <a:endParaRPr lang="en-US" sz="1150" dirty="0"/>
-          </a:p>
-        </p:txBody>
-      </p:sp>
-      <p:sp>
-        <p:nvSpPr>
-          <p:cNvPr id="49" name="Text 41"/>
-          <p:cNvSpPr/>
-          <p:nvPr/>
-        </p:nvSpPr>
-        <p:spPr>
-          <a:xfrm>
-            <a:off x="7790688" y="3685032"/>
-            <a:ext cx="1335024" cy="274320"/>
-          </a:xfrm>
-          <a:prstGeom prst="rect">
-            <a:avLst/>
-          </a:prstGeom>
-          <a:noFill/>
-          <a:ln/>
-        </p:spPr>
-        <p:txBody>
-          <a:bodyPr wrap="square" rtlCol="0" anchor="ctr"/>
-          <a:lstStyle/>
-          <a:p>
-            <a:pPr algn="ctr" indent="0" marL="0">
-              <a:buNone/>
-            </a:pPr>
-            <a:r>
-              <a:rPr lang="en-US" sz="900" dirty="0">
-                <a:solidFill>
-                  <a:srgbClr val="E7EEF3"/>
-                </a:solidFill>
-                <a:latin typeface="Calibri" pitchFamily="34" charset="0"/>
-                <a:ea typeface="Calibri" pitchFamily="34" charset="-122"/>
-                <a:cs typeface="Calibri" pitchFamily="34" charset="-120"/>
-              </a:rPr>
-              <a:t>chấm điểm 0–100</a:t>
-            </a:r>
-            <a:endParaRPr lang="en-US" sz="900" dirty="0"/>
-          </a:p>
-        </p:txBody>
-      </p:sp>
-      <p:sp>
-        <p:nvSpPr>
-          <p:cNvPr id="50" name="Shape 42"/>
-          <p:cNvSpPr/>
-          <p:nvPr/>
-        </p:nvSpPr>
-        <p:spPr>
-          <a:xfrm>
-            <a:off x="7452360" y="3360420"/>
-            <a:ext cx="219456" cy="0"/>
-          </a:xfrm>
-          <a:prstGeom prst="line">
-            <a:avLst/>
-          </a:prstGeom>
-          <a:noFill/>
-          <a:ln w="22225">
-            <a:solidFill>
-              <a:srgbClr val="5B6774"/>
-            </a:solidFill>
-            <a:prstDash val="solid"/>
-            <a:tailEnd type="triangle"/>
-          </a:ln>
-        </p:spPr>
-      </p:sp>
-      <p:sp>
-        <p:nvSpPr>
-          <p:cNvPr id="51" name="Shape 43"/>
-          <p:cNvSpPr/>
-          <p:nvPr/>
-        </p:nvSpPr>
-        <p:spPr>
-          <a:xfrm>
-            <a:off x="9509760" y="2743200"/>
-            <a:ext cx="1481328" cy="1234440"/>
-          </a:xfrm>
-          <a:prstGeom prst="roundRect">
-            <a:avLst>
-              <a:gd name="adj" fmla="val 7407"/>
-            </a:avLst>
-          </a:prstGeom>
-          <a:solidFill>
-            <a:srgbClr val="1C7293"/>
-          </a:solidFill>
-          <a:ln/>
-          <a:effectLst>
-            <a:outerShdw sx="100000" sy="100000" kx="0" ky="0" algn="bl" rotWithShape="0" blurRad="76200" dist="25400" dir="5400000">
-              <a:srgbClr val="9AA7B4">
-                <a:alpha val="28000"/>
-              </a:srgbClr>
-            </a:outerShdw>
-          </a:effectLst>
-        </p:spPr>
-      </p:sp>
-      <p:pic>
-        <p:nvPicPr>
-          <p:cNvPr id="52" name="Image 6" descr="/home/claude/output2/icons/report.png">    </p:cNvPr>
-          <p:cNvPicPr>
-            <a:picLocks noChangeAspect="1"/>
-          </p:cNvPicPr>
-          <p:nvPr/>
-        </p:nvPicPr>
-        <p:blipFill>
-          <a:blip r:embed="rId7"/>
-          <a:stretch>
-            <a:fillRect/>
-          </a:stretch>
-        </p:blipFill>
-        <p:spPr>
-          <a:xfrm>
-            <a:off x="10012680" y="2871216"/>
-            <a:ext cx="475488" cy="475488"/>
-          </a:xfrm>
-          <a:prstGeom prst="rect">
-            <a:avLst/>
-          </a:prstGeom>
-        </p:spPr>
-      </p:pic>
-      <p:sp>
-        <p:nvSpPr>
-          <p:cNvPr id="53" name="Text 44"/>
-          <p:cNvSpPr/>
-          <p:nvPr/>
-        </p:nvSpPr>
-        <p:spPr>
-          <a:xfrm>
-            <a:off x="9582912" y="3383280"/>
-            <a:ext cx="1335024" cy="320040"/>
-          </a:xfrm>
-          <a:prstGeom prst="rect">
-            <a:avLst/>
-          </a:prstGeom>
-          <a:noFill/>
-          <a:ln/>
-        </p:spPr>
-        <p:txBody>
-          <a:bodyPr wrap="square" rtlCol="0" anchor="ctr"/>
-          <a:lstStyle/>
-          <a:p>
-            <a:pPr algn="ctr" indent="0" marL="0">
-              <a:buNone/>
-            </a:pPr>
-            <a:r>
-              <a:rPr lang="en-US" sz="1150" b="1" dirty="0">
-                <a:solidFill>
-                  <a:srgbClr val="FFFFFF"/>
-                </a:solidFill>
-                <a:latin typeface="Calibri" pitchFamily="34" charset="0"/>
-                <a:ea typeface="Calibri" pitchFamily="34" charset="-122"/>
-                <a:cs typeface="Calibri" pitchFamily="34" charset="-120"/>
-              </a:rPr>
-              <a:t>Kết quả</a:t>
-            </a:r>
-            <a:endParaRPr lang="en-US" sz="1150" dirty="0"/>
-          </a:p>
-        </p:txBody>
-      </p:sp>
-      <p:sp>
-        <p:nvSpPr>
-          <p:cNvPr id="54" name="Text 45"/>
-          <p:cNvSpPr/>
-          <p:nvPr/>
-        </p:nvSpPr>
-        <p:spPr>
-          <a:xfrm>
-            <a:off x="9582912" y="3685032"/>
-            <a:ext cx="1335024" cy="274320"/>
-          </a:xfrm>
-          <a:prstGeom prst="rect">
-            <a:avLst/>
-          </a:prstGeom>
-          <a:noFill/>
-          <a:ln/>
-        </p:spPr>
-        <p:txBody>
-          <a:bodyPr wrap="square" rtlCol="0" anchor="ctr"/>
-          <a:lstStyle/>
-          <a:p>
-            <a:pPr algn="ctr" indent="0" marL="0">
-              <a:buNone/>
-            </a:pPr>
-            <a:r>
-              <a:rPr lang="en-US" sz="900" dirty="0">
-                <a:solidFill>
-                  <a:srgbClr val="E7EEF3"/>
-                </a:solidFill>
-                <a:latin typeface="Calibri" pitchFamily="34" charset="0"/>
-                <a:ea typeface="Calibri" pitchFamily="34" charset="-122"/>
-                <a:cs typeface="Calibri" pitchFamily="34" charset="-120"/>
-              </a:rPr>
-              <a:t>score + risk_level</a:t>
-            </a:r>
-            <a:endParaRPr lang="en-US" sz="900" dirty="0"/>
-          </a:p>
-        </p:txBody>
-      </p:sp>
-      <p:sp>
-        <p:nvSpPr>
-          <p:cNvPr id="55" name="Shape 46"/>
-          <p:cNvSpPr/>
-          <p:nvPr/>
-        </p:nvSpPr>
-        <p:spPr>
-          <a:xfrm>
-            <a:off x="9244584" y="3360420"/>
-            <a:ext cx="219456" cy="0"/>
-          </a:xfrm>
-          <a:prstGeom prst="line">
-            <a:avLst/>
-          </a:prstGeom>
-          <a:noFill/>
-          <a:ln w="22225">
-            <a:solidFill>
-              <a:srgbClr val="5B6774"/>
-            </a:solidFill>
-            <a:prstDash val="solid"/>
-            <a:tailEnd type="triangle"/>
-          </a:ln>
-        </p:spPr>
-      </p:sp>
-      <p:sp>
-        <p:nvSpPr>
-          <p:cNvPr id="56" name="Text 47"/>
-          <p:cNvSpPr/>
-          <p:nvPr/>
-        </p:nvSpPr>
-        <p:spPr>
-          <a:xfrm>
-            <a:off x="548640" y="5532120"/>
-            <a:ext cx="11094415" cy="548640"/>
-          </a:xfrm>
-          <a:prstGeom prst="rect">
-            <a:avLst/>
-          </a:prstGeom>
-          <a:noFill/>
-          <a:ln/>
-        </p:spPr>
-        <p:txBody>
-          <a:bodyPr wrap="square" rtlCol="0" anchor="ctr"/>
-          <a:lstStyle/>
-          <a:p>
-            <a:pPr algn="ctr" indent="0" marL="0">
-              <a:buNone/>
-            </a:pPr>
-            <a:r>
-              <a:rPr lang="en-US" sz="1300" i="1" dirty="0">
-                <a:solidFill>
-                  <a:srgbClr val="5B6774"/>
-                </a:solidFill>
-                <a:latin typeface="Calibri" pitchFamily="34" charset="0"/>
-                <a:ea typeface="Calibri" pitchFamily="34" charset="-122"/>
-                <a:cs typeface="Calibri" pitchFamily="34" charset="-120"/>
-              </a:rPr>
-              <a:t>Toàn bộ quy trình chạy trong vài giây. Kết quả trả về Spring Boot gồm: ảnh đã khoanh vùng, điểm rủi ro (score), mức độ (risk_level) và mô tả gợi ý — bác sĩ xem và ra kết luận cuối cùng.</a:t>
-            </a:r>
-            <a:endParaRPr lang="en-US" sz="1300" dirty="0"/>
-          </a:p>
-        </p:txBody>
-      </p:sp>
-      <p:sp>
-        <p:nvSpPr>
-          <p:cNvPr id="57" name="Text 48"/>
+          <p:cNvPr id="6" name="Text 3"/>
           <p:cNvSpPr/>
           <p:nvPr/>
         </p:nvSpPr>
@@ -5275,7 +5401,7 @@
       </p:sp>
       <p:sp>
         <p:nvSpPr>
-          <p:cNvPr id="58" name="Text 49"/>
+          <p:cNvPr id="7" name="Text 4"/>
           <p:cNvSpPr/>
           <p:nvPr/>
         </p:nvSpPr>
@@ -5377,7 +5503,7 @@
                 <a:ea typeface="Calibri" pitchFamily="34" charset="-122"/>
                 <a:cs typeface="Calibri" pitchFamily="34" charset="-120"/>
               </a:rPr>
-              <a:t>THIẾT KẾ HỆ THỐNG</a:t>
+              <a:t>HUẤN LUYỆN AI</a:t>
             </a:r>
             <a:endParaRPr lang="en-US" sz="1300" dirty="0"/>
           </a:p>
@@ -5416,7 +5542,7 @@
                 <a:ea typeface="Cambria" pitchFamily="34" charset="-122"/>
                 <a:cs typeface="Cambria" pitchFamily="34" charset="-120"/>
               </a:rPr>
-              <a:t>Thiết kế Actor — 5 vai trò</a:t>
+              <a:t>ANFIS được huấn luyện như thế nào?</a:t>
             </a:r>
             <a:endParaRPr lang="en-US" sz="3000" dirty="0"/>
           </a:p>
@@ -5430,12 +5556,102 @@
         </p:nvSpPr>
         <p:spPr>
           <a:xfrm>
-            <a:off x="548640" y="1965960"/>
-            <a:ext cx="1962851" cy="4114800"/>
+            <a:off x="548640" y="1783080"/>
+            <a:ext cx="11094415" cy="777240"/>
           </a:xfrm>
           <a:prstGeom prst="roundRect">
             <a:avLst>
-              <a:gd name="adj" fmla="val 4193"/>
+              <a:gd name="adj" fmla="val 10588"/>
+            </a:avLst>
+          </a:prstGeom>
+          <a:solidFill>
+            <a:srgbClr val="FBEEE1"/>
+          </a:solidFill>
+          <a:ln w="12700">
+            <a:solidFill>
+              <a:srgbClr val="D97C2B"/>
+            </a:solidFill>
+            <a:prstDash val="solid"/>
+          </a:ln>
+        </p:spPr>
+      </p:sp>
+      <p:pic>
+        <p:nvPicPr>
+          <p:cNvPr id="5" name="Image 0" descr="/home/claude/output2/icons/warning-navy.png">    </p:cNvPr>
+          <p:cNvPicPr>
+            <a:picLocks noChangeAspect="1"/>
+          </p:cNvPicPr>
+          <p:nvPr/>
+        </p:nvPicPr>
+        <p:blipFill>
+          <a:blip r:embed="rId1"/>
+          <a:stretch>
+            <a:fillRect/>
+          </a:stretch>
+        </p:blipFill>
+        <p:spPr>
+          <a:xfrm>
+            <a:off x="777240" y="1965960"/>
+            <a:ext cx="411480" cy="411480"/>
+          </a:xfrm>
+          <a:prstGeom prst="rect">
+            <a:avLst/>
+          </a:prstGeom>
+        </p:spPr>
+      </p:pic>
+      <p:sp>
+        <p:nvSpPr>
+          <p:cNvPr id="6" name="Text 3"/>
+          <p:cNvSpPr/>
+          <p:nvPr/>
+        </p:nvSpPr>
+        <p:spPr>
+          <a:xfrm>
+            <a:off x="1371600" y="1783080"/>
+            <a:ext cx="10180015" cy="777240"/>
+          </a:xfrm>
+          <a:prstGeom prst="rect">
+            <a:avLst/>
+          </a:prstGeom>
+          <a:noFill/>
+          <a:ln/>
+        </p:spPr>
+        <p:txBody>
+          <a:bodyPr wrap="square" rtlCol="0" anchor="ctr"/>
+          <a:lstStyle/>
+          <a:p>
+            <a:pPr indent="0" marL="0">
+              <a:buNone/>
+            </a:pPr>
+            <a:r>
+              <a:rPr lang="en-US" sz="1400" b="1" dirty="0">
+                <a:solidFill>
+                  <a:srgbClr val="7A3B0F"/>
+                </a:solidFill>
+                <a:latin typeface="Calibri" pitchFamily="34" charset="0"/>
+                <a:ea typeface="Calibri" pitchFamily="34" charset="-122"/>
+                <a:cs typeface="Calibri" pitchFamily="34" charset="-120"/>
+              </a:rPr>
+              <a:t>Dự án CHƯA có dữ liệu lâm sàng gán nhãn thật (ảnh X-quang đã bác sĩ xác nhận đúng/sai gãy).</a:t>
+            </a:r>
+            <a:endParaRPr lang="en-US" sz="1400" dirty="0"/>
+          </a:p>
+        </p:txBody>
+      </p:sp>
+      <p:sp>
+        <p:nvSpPr>
+          <p:cNvPr id="7" name="Shape 4"/>
+          <p:cNvSpPr/>
+          <p:nvPr/>
+        </p:nvSpPr>
+        <p:spPr>
+          <a:xfrm>
+            <a:off x="548640" y="2788920"/>
+            <a:ext cx="2430704" cy="2331720"/>
+          </a:xfrm>
+          <a:prstGeom prst="roundRect">
+            <a:avLst>
+              <a:gd name="adj" fmla="val 3529"/>
             </a:avLst>
           </a:prstGeom>
           <a:solidFill>
@@ -5458,14 +5674,14 @@
       </p:sp>
       <p:sp>
         <p:nvSpPr>
-          <p:cNvPr id="5" name="Shape 3"/>
-          <p:cNvSpPr/>
-          <p:nvPr/>
-        </p:nvSpPr>
-        <p:spPr>
-          <a:xfrm>
-            <a:off x="1050006" y="2354580"/>
-            <a:ext cx="960120" cy="960120"/>
+          <p:cNvPr id="8" name="Shape 5"/>
+          <p:cNvSpPr/>
+          <p:nvPr/>
+        </p:nvSpPr>
+        <p:spPr>
+          <a:xfrm>
+            <a:off x="1489672" y="3017520"/>
+            <a:ext cx="548640" cy="548640"/>
           </a:xfrm>
           <a:prstGeom prst="ellipse">
             <a:avLst/>
@@ -5476,40 +5692,16 @@
           <a:ln/>
         </p:spPr>
       </p:sp>
-      <p:pic>
-        <p:nvPicPr>
-          <p:cNvPr id="6" name="Image 0" descr="/home/claude/output2/icons/patient.png">    </p:cNvPr>
-          <p:cNvPicPr>
-            <a:picLocks noChangeAspect="1"/>
-          </p:cNvPicPr>
-          <p:nvPr/>
-        </p:nvPicPr>
-        <p:blipFill>
-          <a:blip r:embed="rId1"/>
-          <a:stretch>
-            <a:fillRect/>
-          </a:stretch>
-        </p:blipFill>
-        <p:spPr>
-          <a:xfrm>
-            <a:off x="1290036" y="2594610"/>
-            <a:ext cx="480060" cy="480060"/>
-          </a:xfrm>
-          <a:prstGeom prst="rect">
-            <a:avLst/>
-          </a:prstGeom>
-        </p:spPr>
-      </p:pic>
-      <p:sp>
-        <p:nvSpPr>
-          <p:cNvPr id="7" name="Text 4"/>
-          <p:cNvSpPr/>
-          <p:nvPr/>
-        </p:nvSpPr>
-        <p:spPr>
-          <a:xfrm>
-            <a:off x="640080" y="3474720"/>
-            <a:ext cx="1779971" cy="365760"/>
+      <p:sp>
+        <p:nvSpPr>
+          <p:cNvPr id="9" name="Text 6"/>
+          <p:cNvSpPr/>
+          <p:nvPr/>
+        </p:nvSpPr>
+        <p:spPr>
+          <a:xfrm>
+            <a:off x="1489672" y="3017520"/>
+            <a:ext cx="548640" cy="548640"/>
           </a:xfrm>
           <a:prstGeom prst="rect">
             <a:avLst/>
@@ -5525,30 +5717,30 @@
               <a:buNone/>
             </a:pPr>
             <a:r>
-              <a:rPr lang="en-US" sz="1550" b="1" dirty="0">
-                <a:solidFill>
-                  <a:srgbClr val="12395C"/>
+              <a:rPr lang="en-US" sz="2000" b="1" dirty="0">
+                <a:solidFill>
+                  <a:srgbClr val="FFFFFF"/>
                 </a:solidFill>
                 <a:latin typeface="Cambria" pitchFamily="34" charset="0"/>
                 <a:ea typeface="Cambria" pitchFamily="34" charset="-122"/>
                 <a:cs typeface="Cambria" pitchFamily="34" charset="-120"/>
               </a:rPr>
-              <a:t>Bệnh nhân</a:t>
-            </a:r>
-            <a:endParaRPr lang="en-US" sz="1550" dirty="0"/>
-          </a:p>
-        </p:txBody>
-      </p:sp>
-      <p:sp>
-        <p:nvSpPr>
-          <p:cNvPr id="8" name="Text 5"/>
-          <p:cNvSpPr/>
-          <p:nvPr/>
-        </p:nvSpPr>
-        <p:spPr>
-          <a:xfrm>
-            <a:off x="640080" y="3813048"/>
-            <a:ext cx="1779971" cy="256032"/>
+              <a:t>1</a:t>
+            </a:r>
+            <a:endParaRPr lang="en-US" sz="2000" dirty="0"/>
+          </a:p>
+        </p:txBody>
+      </p:sp>
+      <p:sp>
+        <p:nvSpPr>
+          <p:cNvPr id="10" name="Text 7"/>
+          <p:cNvSpPr/>
+          <p:nvPr/>
+        </p:nvSpPr>
+        <p:spPr>
+          <a:xfrm>
+            <a:off x="685800" y="3703320"/>
+            <a:ext cx="2156384" cy="502920"/>
           </a:xfrm>
           <a:prstGeom prst="rect">
             <a:avLst/>
@@ -5564,30 +5756,30 @@
               <a:buNone/>
             </a:pPr>
             <a:r>
-              <a:rPr lang="en-US" sz="1000" i="1" dirty="0">
-                <a:solidFill>
-                  <a:srgbClr val="5B6774"/>
-                </a:solidFill>
-                <a:latin typeface="Calibri" pitchFamily="34" charset="0"/>
-                <a:ea typeface="Calibri" pitchFamily="34" charset="-122"/>
-                <a:cs typeface="Calibri" pitchFamily="34" charset="-120"/>
-              </a:rPr>
-              <a:t>Patient</a:t>
-            </a:r>
-            <a:endParaRPr lang="en-US" sz="1000" dirty="0"/>
-          </a:p>
-        </p:txBody>
-      </p:sp>
-      <p:sp>
-        <p:nvSpPr>
-          <p:cNvPr id="9" name="Text 6"/>
-          <p:cNvSpPr/>
-          <p:nvPr/>
-        </p:nvSpPr>
-        <p:spPr>
-          <a:xfrm>
-            <a:off x="713232" y="4206240"/>
-            <a:ext cx="1633667" cy="1737360"/>
+              <a:rPr lang="en-US" sz="1250" b="1" dirty="0">
+                <a:solidFill>
+                  <a:srgbClr val="12395C"/>
+                </a:solidFill>
+                <a:latin typeface="Calibri" pitchFamily="34" charset="0"/>
+                <a:ea typeface="Calibri" pitchFamily="34" charset="-122"/>
+                <a:cs typeface="Calibri" pitchFamily="34" charset="-120"/>
+              </a:rPr>
+              <a:t>Viết tay luật mờ chuyên gia</a:t>
+            </a:r>
+            <a:endParaRPr lang="en-US" sz="1250" dirty="0"/>
+          </a:p>
+        </p:txBody>
+      </p:sp>
+      <p:sp>
+        <p:nvSpPr>
+          <p:cNvPr id="11" name="Text 8"/>
+          <p:cNvSpPr/>
+          <p:nvPr/>
+        </p:nvSpPr>
+        <p:spPr>
+          <a:xfrm>
+            <a:off x="685800" y="4206240"/>
+            <a:ext cx="2156384" cy="868680"/>
           </a:xfrm>
           <a:prstGeom prst="rect">
             <a:avLst/>
@@ -5603,7 +5795,7 @@
               <a:buNone/>
             </a:pPr>
             <a:r>
-              <a:rPr lang="en-US" sz="1100" dirty="0">
+              <a:rPr lang="en-US" sz="1050" dirty="0">
                 <a:solidFill>
                   <a:srgbClr val="16212E"/>
                 </a:solidFill>
@@ -5611,26 +5803,50 @@
                 <a:ea typeface="Calibri" pitchFamily="34" charset="-122"/>
                 <a:cs typeface="Calibri" pitchFamily="34" charset="-120"/>
               </a:rPr>
-              <a:t>Đặt lịch khám, tự tải X-quang kiểm tra nhanh, xem kết quả &amp; hồ sơ.</a:t>
-            </a:r>
-            <a:endParaRPr lang="en-US" sz="1100" dirty="0"/>
-          </a:p>
-        </p:txBody>
-      </p:sp>
-      <p:sp>
-        <p:nvSpPr>
-          <p:cNvPr id="10" name="Shape 7"/>
-          <p:cNvSpPr/>
-          <p:nvPr/>
-        </p:nvSpPr>
-        <p:spPr>
-          <a:xfrm>
-            <a:off x="2831531" y="1965960"/>
-            <a:ext cx="1962851" cy="4114800"/>
+              <a:t>Nhóm tự thiết kế 20 luật mờ (scikit-fuzzy) mã hoá kiến thức nghiệp vụ → làm “giáo viên” (teacher).</a:t>
+            </a:r>
+            <a:endParaRPr lang="en-US" sz="1050" dirty="0"/>
+          </a:p>
+        </p:txBody>
+      </p:sp>
+      <p:sp>
+        <p:nvSpPr>
+          <p:cNvPr id="12" name="Shape 9"/>
+          <p:cNvSpPr/>
+          <p:nvPr/>
+        </p:nvSpPr>
+        <p:spPr>
+          <a:xfrm>
+            <a:off x="3034208" y="3291840"/>
+            <a:ext cx="347472" cy="0"/>
+          </a:xfrm>
+          <a:prstGeom prst="line">
+            <a:avLst/>
+          </a:prstGeom>
+          <a:noFill/>
+          <a:ln w="19050">
+            <a:solidFill>
+              <a:srgbClr val="5B6774"/>
+            </a:solidFill>
+            <a:prstDash val="solid"/>
+            <a:tailEnd type="triangle"/>
+          </a:ln>
+        </p:spPr>
+      </p:sp>
+      <p:sp>
+        <p:nvSpPr>
+          <p:cNvPr id="13" name="Shape 10"/>
+          <p:cNvSpPr/>
+          <p:nvPr/>
+        </p:nvSpPr>
+        <p:spPr>
+          <a:xfrm>
+            <a:off x="3436544" y="2788920"/>
+            <a:ext cx="2430704" cy="2331720"/>
           </a:xfrm>
           <a:prstGeom prst="roundRect">
             <a:avLst>
-              <a:gd name="adj" fmla="val 4193"/>
+              <a:gd name="adj" fmla="val 3529"/>
             </a:avLst>
           </a:prstGeom>
           <a:solidFill>
@@ -5653,58 +5869,34 @@
       </p:sp>
       <p:sp>
         <p:nvSpPr>
-          <p:cNvPr id="11" name="Shape 8"/>
-          <p:cNvSpPr/>
-          <p:nvPr/>
-        </p:nvSpPr>
-        <p:spPr>
-          <a:xfrm>
-            <a:off x="3332897" y="2354580"/>
-            <a:ext cx="960120" cy="960120"/>
+          <p:cNvPr id="14" name="Shape 11"/>
+          <p:cNvSpPr/>
+          <p:nvPr/>
+        </p:nvSpPr>
+        <p:spPr>
+          <a:xfrm>
+            <a:off x="4377576" y="3017520"/>
+            <a:ext cx="548640" cy="548640"/>
           </a:xfrm>
           <a:prstGeom prst="ellipse">
             <a:avLst/>
           </a:prstGeom>
           <a:solidFill>
-            <a:srgbClr val="1C7293"/>
+            <a:srgbClr val="12395C"/>
           </a:solidFill>
           <a:ln/>
         </p:spPr>
       </p:sp>
-      <p:pic>
-        <p:nvPicPr>
-          <p:cNvPr id="12" name="Image 1" descr="/home/claude/output2/icons/receptionist.png">    </p:cNvPr>
-          <p:cNvPicPr>
-            <a:picLocks noChangeAspect="1"/>
-          </p:cNvPicPr>
-          <p:nvPr/>
-        </p:nvPicPr>
-        <p:blipFill>
-          <a:blip r:embed="rId2"/>
-          <a:stretch>
-            <a:fillRect/>
-          </a:stretch>
-        </p:blipFill>
-        <p:spPr>
-          <a:xfrm>
-            <a:off x="3572927" y="2594610"/>
-            <a:ext cx="480060" cy="480060"/>
-          </a:xfrm>
-          <a:prstGeom prst="rect">
-            <a:avLst/>
-          </a:prstGeom>
-        </p:spPr>
-      </p:pic>
-      <p:sp>
-        <p:nvSpPr>
-          <p:cNvPr id="13" name="Text 9"/>
-          <p:cNvSpPr/>
-          <p:nvPr/>
-        </p:nvSpPr>
-        <p:spPr>
-          <a:xfrm>
-            <a:off x="2922971" y="3474720"/>
-            <a:ext cx="1779971" cy="365760"/>
+      <p:sp>
+        <p:nvSpPr>
+          <p:cNvPr id="15" name="Text 12"/>
+          <p:cNvSpPr/>
+          <p:nvPr/>
+        </p:nvSpPr>
+        <p:spPr>
+          <a:xfrm>
+            <a:off x="4377576" y="3017520"/>
+            <a:ext cx="548640" cy="548640"/>
           </a:xfrm>
           <a:prstGeom prst="rect">
             <a:avLst/>
@@ -5720,30 +5912,30 @@
               <a:buNone/>
             </a:pPr>
             <a:r>
-              <a:rPr lang="en-US" sz="1550" b="1" dirty="0">
-                <a:solidFill>
-                  <a:srgbClr val="12395C"/>
+              <a:rPr lang="en-US" sz="2000" b="1" dirty="0">
+                <a:solidFill>
+                  <a:srgbClr val="FFFFFF"/>
                 </a:solidFill>
                 <a:latin typeface="Cambria" pitchFamily="34" charset="0"/>
                 <a:ea typeface="Cambria" pitchFamily="34" charset="-122"/>
                 <a:cs typeface="Cambria" pitchFamily="34" charset="-120"/>
               </a:rPr>
-              <a:t>Lễ tân</a:t>
-            </a:r>
-            <a:endParaRPr lang="en-US" sz="1550" dirty="0"/>
-          </a:p>
-        </p:txBody>
-      </p:sp>
-      <p:sp>
-        <p:nvSpPr>
-          <p:cNvPr id="14" name="Text 10"/>
-          <p:cNvSpPr/>
-          <p:nvPr/>
-        </p:nvSpPr>
-        <p:spPr>
-          <a:xfrm>
-            <a:off x="2922971" y="3813048"/>
-            <a:ext cx="1779971" cy="256032"/>
+              <a:t>2</a:t>
+            </a:r>
+            <a:endParaRPr lang="en-US" sz="2000" dirty="0"/>
+          </a:p>
+        </p:txBody>
+      </p:sp>
+      <p:sp>
+        <p:nvSpPr>
+          <p:cNvPr id="16" name="Text 13"/>
+          <p:cNvSpPr/>
+          <p:nvPr/>
+        </p:nvSpPr>
+        <p:spPr>
+          <a:xfrm>
+            <a:off x="3573704" y="3703320"/>
+            <a:ext cx="2156384" cy="502920"/>
           </a:xfrm>
           <a:prstGeom prst="rect">
             <a:avLst/>
@@ -5759,30 +5951,30 @@
               <a:buNone/>
             </a:pPr>
             <a:r>
-              <a:rPr lang="en-US" sz="1000" i="1" dirty="0">
-                <a:solidFill>
-                  <a:srgbClr val="5B6774"/>
-                </a:solidFill>
-                <a:latin typeface="Calibri" pitchFamily="34" charset="0"/>
-                <a:ea typeface="Calibri" pitchFamily="34" charset="-122"/>
-                <a:cs typeface="Calibri" pitchFamily="34" charset="-120"/>
-              </a:rPr>
-              <a:t>Receptionist</a:t>
-            </a:r>
-            <a:endParaRPr lang="en-US" sz="1000" dirty="0"/>
-          </a:p>
-        </p:txBody>
-      </p:sp>
-      <p:sp>
-        <p:nvSpPr>
-          <p:cNvPr id="15" name="Text 11"/>
-          <p:cNvSpPr/>
-          <p:nvPr/>
-        </p:nvSpPr>
-        <p:spPr>
-          <a:xfrm>
-            <a:off x="2996123" y="4206240"/>
-            <a:ext cx="1633667" cy="1737360"/>
+              <a:rPr lang="en-US" sz="1250" b="1" dirty="0">
+                <a:solidFill>
+                  <a:srgbClr val="12395C"/>
+                </a:solidFill>
+                <a:latin typeface="Calibri" pitchFamily="34" charset="0"/>
+                <a:ea typeface="Calibri" pitchFamily="34" charset="-122"/>
+                <a:cs typeface="Calibri" pitchFamily="34" charset="-120"/>
+              </a:rPr>
+              <a:t>Sinh dữ liệu tổng hợp</a:t>
+            </a:r>
+            <a:endParaRPr lang="en-US" sz="1250" dirty="0"/>
+          </a:p>
+        </p:txBody>
+      </p:sp>
+      <p:sp>
+        <p:nvSpPr>
+          <p:cNvPr id="17" name="Text 14"/>
+          <p:cNvSpPr/>
+          <p:nvPr/>
+        </p:nvSpPr>
+        <p:spPr>
+          <a:xfrm>
+            <a:off x="3573704" y="4206240"/>
+            <a:ext cx="2156384" cy="868680"/>
           </a:xfrm>
           <a:prstGeom prst="rect">
             <a:avLst/>
@@ -5798,7 +5990,7 @@
               <a:buNone/>
             </a:pPr>
             <a:r>
-              <a:rPr lang="en-US" sz="1100" dirty="0">
+              <a:rPr lang="en-US" sz="1050" dirty="0">
                 <a:solidFill>
                   <a:srgbClr val="16212E"/>
                 </a:solidFill>
@@ -5806,26 +5998,50 @@
                 <a:ea typeface="Calibri" pitchFamily="34" charset="-122"/>
                 <a:cs typeface="Calibri" pitchFamily="34" charset="-120"/>
               </a:rPr>
-              <a:t>Quản lý lịch hẹn, check-in, gọi số khám, tiếp nhận khách vãng lai.</a:t>
-            </a:r>
-            <a:endParaRPr lang="en-US" sz="1100" dirty="0"/>
-          </a:p>
-        </p:txBody>
-      </p:sp>
-      <p:sp>
-        <p:nvSpPr>
-          <p:cNvPr id="16" name="Shape 12"/>
-          <p:cNvSpPr/>
-          <p:nvPr/>
-        </p:nvSpPr>
-        <p:spPr>
-          <a:xfrm>
-            <a:off x="5114422" y="1965960"/>
-            <a:ext cx="1962851" cy="4114800"/>
+              <a:t>Sinh ngẫu nhiên 8.000 mẫu 5 chiều, cho giáo viên chấm điểm để tạo nhãn “đúng” cho từng mẫu.</a:t>
+            </a:r>
+            <a:endParaRPr lang="en-US" sz="1050" dirty="0"/>
+          </a:p>
+        </p:txBody>
+      </p:sp>
+      <p:sp>
+        <p:nvSpPr>
+          <p:cNvPr id="18" name="Shape 15"/>
+          <p:cNvSpPr/>
+          <p:nvPr/>
+        </p:nvSpPr>
+        <p:spPr>
+          <a:xfrm>
+            <a:off x="5922112" y="3291840"/>
+            <a:ext cx="347472" cy="0"/>
+          </a:xfrm>
+          <a:prstGeom prst="line">
+            <a:avLst/>
+          </a:prstGeom>
+          <a:noFill/>
+          <a:ln w="19050">
+            <a:solidFill>
+              <a:srgbClr val="5B6774"/>
+            </a:solidFill>
+            <a:prstDash val="solid"/>
+            <a:tailEnd type="triangle"/>
+          </a:ln>
+        </p:spPr>
+      </p:sp>
+      <p:sp>
+        <p:nvSpPr>
+          <p:cNvPr id="19" name="Shape 16"/>
+          <p:cNvSpPr/>
+          <p:nvPr/>
+        </p:nvSpPr>
+        <p:spPr>
+          <a:xfrm>
+            <a:off x="6324448" y="2788920"/>
+            <a:ext cx="2430704" cy="2331720"/>
           </a:xfrm>
           <a:prstGeom prst="roundRect">
             <a:avLst>
-              <a:gd name="adj" fmla="val 4193"/>
+              <a:gd name="adj" fmla="val 3529"/>
             </a:avLst>
           </a:prstGeom>
           <a:solidFill>
@@ -5848,58 +6064,34 @@
       </p:sp>
       <p:sp>
         <p:nvSpPr>
-          <p:cNvPr id="17" name="Shape 13"/>
-          <p:cNvSpPr/>
-          <p:nvPr/>
-        </p:nvSpPr>
-        <p:spPr>
-          <a:xfrm>
-            <a:off x="5615788" y="2354580"/>
-            <a:ext cx="960120" cy="960120"/>
+          <p:cNvPr id="20" name="Shape 17"/>
+          <p:cNvSpPr/>
+          <p:nvPr/>
+        </p:nvSpPr>
+        <p:spPr>
+          <a:xfrm>
+            <a:off x="7265480" y="3017520"/>
+            <a:ext cx="548640" cy="548640"/>
           </a:xfrm>
           <a:prstGeom prst="ellipse">
             <a:avLst/>
           </a:prstGeom>
           <a:solidFill>
-            <a:srgbClr val="D97C2B"/>
+            <a:srgbClr val="12395C"/>
           </a:solidFill>
           <a:ln/>
         </p:spPr>
       </p:sp>
-      <p:pic>
-        <p:nvPicPr>
-          <p:cNvPr id="18" name="Image 2" descr="/home/claude/output2/icons/technician.png">    </p:cNvPr>
-          <p:cNvPicPr>
-            <a:picLocks noChangeAspect="1"/>
-          </p:cNvPicPr>
-          <p:nvPr/>
-        </p:nvPicPr>
-        <p:blipFill>
-          <a:blip r:embed="rId3"/>
-          <a:stretch>
-            <a:fillRect/>
-          </a:stretch>
-        </p:blipFill>
-        <p:spPr>
-          <a:xfrm>
-            <a:off x="5855818" y="2594610"/>
-            <a:ext cx="480060" cy="480060"/>
-          </a:xfrm>
-          <a:prstGeom prst="rect">
-            <a:avLst/>
-          </a:prstGeom>
-        </p:spPr>
-      </p:pic>
-      <p:sp>
-        <p:nvSpPr>
-          <p:cNvPr id="19" name="Text 14"/>
-          <p:cNvSpPr/>
-          <p:nvPr/>
-        </p:nvSpPr>
-        <p:spPr>
-          <a:xfrm>
-            <a:off x="5205862" y="3474720"/>
-            <a:ext cx="1779971" cy="365760"/>
+      <p:sp>
+        <p:nvSpPr>
+          <p:cNvPr id="21" name="Text 18"/>
+          <p:cNvSpPr/>
+          <p:nvPr/>
+        </p:nvSpPr>
+        <p:spPr>
+          <a:xfrm>
+            <a:off x="7265480" y="3017520"/>
+            <a:ext cx="548640" cy="548640"/>
           </a:xfrm>
           <a:prstGeom prst="rect">
             <a:avLst/>
@@ -5915,30 +6107,30 @@
               <a:buNone/>
             </a:pPr>
             <a:r>
-              <a:rPr lang="en-US" sz="1550" b="1" dirty="0">
-                <a:solidFill>
-                  <a:srgbClr val="12395C"/>
+              <a:rPr lang="en-US" sz="2000" b="1" dirty="0">
+                <a:solidFill>
+                  <a:srgbClr val="FFFFFF"/>
                 </a:solidFill>
                 <a:latin typeface="Cambria" pitchFamily="34" charset="0"/>
                 <a:ea typeface="Cambria" pitchFamily="34" charset="-122"/>
                 <a:cs typeface="Cambria" pitchFamily="34" charset="-120"/>
               </a:rPr>
-              <a:t>Kỹ thuật viên</a:t>
-            </a:r>
-            <a:endParaRPr lang="en-US" sz="1550" dirty="0"/>
-          </a:p>
-        </p:txBody>
-      </p:sp>
-      <p:sp>
-        <p:nvSpPr>
-          <p:cNvPr id="20" name="Text 15"/>
-          <p:cNvSpPr/>
-          <p:nvPr/>
-        </p:nvSpPr>
-        <p:spPr>
-          <a:xfrm>
-            <a:off x="5205862" y="3813048"/>
-            <a:ext cx="1779971" cy="256032"/>
+              <a:t>3</a:t>
+            </a:r>
+            <a:endParaRPr lang="en-US" sz="2000" dirty="0"/>
+          </a:p>
+        </p:txBody>
+      </p:sp>
+      <p:sp>
+        <p:nvSpPr>
+          <p:cNvPr id="22" name="Text 19"/>
+          <p:cNvSpPr/>
+          <p:nvPr/>
+        </p:nvSpPr>
+        <p:spPr>
+          <a:xfrm>
+            <a:off x="6461608" y="3703320"/>
+            <a:ext cx="2156384" cy="502920"/>
           </a:xfrm>
           <a:prstGeom prst="rect">
             <a:avLst/>
@@ -5954,30 +6146,30 @@
               <a:buNone/>
             </a:pPr>
             <a:r>
-              <a:rPr lang="en-US" sz="1000" i="1" dirty="0">
-                <a:solidFill>
-                  <a:srgbClr val="5B6774"/>
-                </a:solidFill>
-                <a:latin typeface="Calibri" pitchFamily="34" charset="0"/>
-                <a:ea typeface="Calibri" pitchFamily="34" charset="-122"/>
-                <a:cs typeface="Calibri" pitchFamily="34" charset="-120"/>
-              </a:rPr>
-              <a:t>Technician</a:t>
-            </a:r>
-            <a:endParaRPr lang="en-US" sz="1000" dirty="0"/>
-          </a:p>
-        </p:txBody>
-      </p:sp>
-      <p:sp>
-        <p:nvSpPr>
-          <p:cNvPr id="21" name="Text 16"/>
-          <p:cNvSpPr/>
-          <p:nvPr/>
-        </p:nvSpPr>
-        <p:spPr>
-          <a:xfrm>
-            <a:off x="5279014" y="4206240"/>
-            <a:ext cx="1633667" cy="1737360"/>
+              <a:rPr lang="en-US" sz="1250" b="1" dirty="0">
+                <a:solidFill>
+                  <a:srgbClr val="12395C"/>
+                </a:solidFill>
+                <a:latin typeface="Calibri" pitchFamily="34" charset="0"/>
+                <a:ea typeface="Calibri" pitchFamily="34" charset="-122"/>
+                <a:cs typeface="Calibri" pitchFamily="34" charset="-120"/>
+              </a:rPr>
+              <a:t>Huấn luyện mạng ANFIS</a:t>
+            </a:r>
+            <a:endParaRPr lang="en-US" sz="1250" dirty="0"/>
+          </a:p>
+        </p:txBody>
+      </p:sp>
+      <p:sp>
+        <p:nvSpPr>
+          <p:cNvPr id="23" name="Text 20"/>
+          <p:cNvSpPr/>
+          <p:nvPr/>
+        </p:nvSpPr>
+        <p:spPr>
+          <a:xfrm>
+            <a:off x="6461608" y="4206240"/>
+            <a:ext cx="2156384" cy="868680"/>
           </a:xfrm>
           <a:prstGeom prst="rect">
             <a:avLst/>
@@ -5993,7 +6185,7 @@
               <a:buNone/>
             </a:pPr>
             <a:r>
-              <a:rPr lang="en-US" sz="1100" dirty="0">
+              <a:rPr lang="en-US" sz="1050" dirty="0">
                 <a:solidFill>
                   <a:srgbClr val="16212E"/>
                 </a:solidFill>
@@ -6001,26 +6193,50 @@
                 <a:ea typeface="Calibri" pitchFamily="34" charset="-122"/>
                 <a:cs typeface="Calibri" pitchFamily="34" charset="-120"/>
               </a:rPr>
-              <a:t>Chụp &amp; tải ảnh X-quang, gửi ảnh cho AI Service phân tích.</a:t>
-            </a:r>
-            <a:endParaRPr lang="en-US" sz="1100" dirty="0"/>
-          </a:p>
-        </p:txBody>
-      </p:sp>
-      <p:sp>
-        <p:nvSpPr>
-          <p:cNvPr id="22" name="Shape 17"/>
-          <p:cNvSpPr/>
-          <p:nvPr/>
-        </p:nvSpPr>
-        <p:spPr>
-          <a:xfrm>
-            <a:off x="7397313" y="1965960"/>
-            <a:ext cx="1962851" cy="4114800"/>
+              <a:t>Train 80 epoch, batch size 128, learning rate 0.003 — để mạng tái tạo lại đúng đầu ra của giáo viên.</a:t>
+            </a:r>
+            <a:endParaRPr lang="en-US" sz="1050" dirty="0"/>
+          </a:p>
+        </p:txBody>
+      </p:sp>
+      <p:sp>
+        <p:nvSpPr>
+          <p:cNvPr id="24" name="Shape 21"/>
+          <p:cNvSpPr/>
+          <p:nvPr/>
+        </p:nvSpPr>
+        <p:spPr>
+          <a:xfrm>
+            <a:off x="8810015" y="3291840"/>
+            <a:ext cx="347472" cy="0"/>
+          </a:xfrm>
+          <a:prstGeom prst="line">
+            <a:avLst/>
+          </a:prstGeom>
+          <a:noFill/>
+          <a:ln w="19050">
+            <a:solidFill>
+              <a:srgbClr val="5B6774"/>
+            </a:solidFill>
+            <a:prstDash val="solid"/>
+            <a:tailEnd type="triangle"/>
+          </a:ln>
+        </p:spPr>
+      </p:sp>
+      <p:sp>
+        <p:nvSpPr>
+          <p:cNvPr id="25" name="Shape 22"/>
+          <p:cNvSpPr/>
+          <p:nvPr/>
+        </p:nvSpPr>
+        <p:spPr>
+          <a:xfrm>
+            <a:off x="9212351" y="2788920"/>
+            <a:ext cx="2430704" cy="2331720"/>
           </a:xfrm>
           <a:prstGeom prst="roundRect">
             <a:avLst>
-              <a:gd name="adj" fmla="val 4193"/>
+              <a:gd name="adj" fmla="val 3529"/>
             </a:avLst>
           </a:prstGeom>
           <a:solidFill>
@@ -6043,14 +6259,14 @@
       </p:sp>
       <p:sp>
         <p:nvSpPr>
-          <p:cNvPr id="23" name="Shape 18"/>
-          <p:cNvSpPr/>
-          <p:nvPr/>
-        </p:nvSpPr>
-        <p:spPr>
-          <a:xfrm>
-            <a:off x="7898679" y="2354580"/>
-            <a:ext cx="960120" cy="960120"/>
+          <p:cNvPr id="26" name="Shape 23"/>
+          <p:cNvSpPr/>
+          <p:nvPr/>
+        </p:nvSpPr>
+        <p:spPr>
+          <a:xfrm>
+            <a:off x="10153383" y="3017520"/>
+            <a:ext cx="548640" cy="548640"/>
           </a:xfrm>
           <a:prstGeom prst="ellipse">
             <a:avLst/>
@@ -6061,40 +6277,16 @@
           <a:ln/>
         </p:spPr>
       </p:sp>
-      <p:pic>
-        <p:nvPicPr>
-          <p:cNvPr id="24" name="Image 3" descr="/home/claude/output2/icons/doctor.png">    </p:cNvPr>
-          <p:cNvPicPr>
-            <a:picLocks noChangeAspect="1"/>
-          </p:cNvPicPr>
-          <p:nvPr/>
-        </p:nvPicPr>
-        <p:blipFill>
-          <a:blip r:embed="rId4"/>
-          <a:stretch>
-            <a:fillRect/>
-          </a:stretch>
-        </p:blipFill>
-        <p:spPr>
-          <a:xfrm>
-            <a:off x="8138709" y="2594610"/>
-            <a:ext cx="480060" cy="480060"/>
-          </a:xfrm>
-          <a:prstGeom prst="rect">
-            <a:avLst/>
-          </a:prstGeom>
-        </p:spPr>
-      </p:pic>
-      <p:sp>
-        <p:nvSpPr>
-          <p:cNvPr id="25" name="Text 19"/>
-          <p:cNvSpPr/>
-          <p:nvPr/>
-        </p:nvSpPr>
-        <p:spPr>
-          <a:xfrm>
-            <a:off x="7488753" y="3474720"/>
-            <a:ext cx="1779971" cy="365760"/>
+      <p:sp>
+        <p:nvSpPr>
+          <p:cNvPr id="27" name="Text 24"/>
+          <p:cNvSpPr/>
+          <p:nvPr/>
+        </p:nvSpPr>
+        <p:spPr>
+          <a:xfrm>
+            <a:off x="10153383" y="3017520"/>
+            <a:ext cx="548640" cy="548640"/>
           </a:xfrm>
           <a:prstGeom prst="rect">
             <a:avLst/>
@@ -6110,30 +6302,30 @@
               <a:buNone/>
             </a:pPr>
             <a:r>
-              <a:rPr lang="en-US" sz="1550" b="1" dirty="0">
-                <a:solidFill>
-                  <a:srgbClr val="12395C"/>
+              <a:rPr lang="en-US" sz="2000" b="1" dirty="0">
+                <a:solidFill>
+                  <a:srgbClr val="FFFFFF"/>
                 </a:solidFill>
                 <a:latin typeface="Cambria" pitchFamily="34" charset="0"/>
                 <a:ea typeface="Cambria" pitchFamily="34" charset="-122"/>
                 <a:cs typeface="Cambria" pitchFamily="34" charset="-120"/>
               </a:rPr>
-              <a:t>Bác sĩ</a:t>
-            </a:r>
-            <a:endParaRPr lang="en-US" sz="1550" dirty="0"/>
-          </a:p>
-        </p:txBody>
-      </p:sp>
-      <p:sp>
-        <p:nvSpPr>
-          <p:cNvPr id="26" name="Text 20"/>
-          <p:cNvSpPr/>
-          <p:nvPr/>
-        </p:nvSpPr>
-        <p:spPr>
-          <a:xfrm>
-            <a:off x="7488753" y="3813048"/>
-            <a:ext cx="1779971" cy="256032"/>
+              <a:t>4</a:t>
+            </a:r>
+            <a:endParaRPr lang="en-US" sz="2000" dirty="0"/>
+          </a:p>
+        </p:txBody>
+      </p:sp>
+      <p:sp>
+        <p:nvSpPr>
+          <p:cNvPr id="28" name="Text 25"/>
+          <p:cNvSpPr/>
+          <p:nvPr/>
+        </p:nvSpPr>
+        <p:spPr>
+          <a:xfrm>
+            <a:off x="9349511" y="3703320"/>
+            <a:ext cx="2156384" cy="502920"/>
           </a:xfrm>
           <a:prstGeom prst="rect">
             <a:avLst/>
@@ -6149,30 +6341,30 @@
               <a:buNone/>
             </a:pPr>
             <a:r>
-              <a:rPr lang="en-US" sz="1000" i="1" dirty="0">
-                <a:solidFill>
-                  <a:srgbClr val="5B6774"/>
-                </a:solidFill>
-                <a:latin typeface="Calibri" pitchFamily="34" charset="0"/>
-                <a:ea typeface="Calibri" pitchFamily="34" charset="-122"/>
-                <a:cs typeface="Calibri" pitchFamily="34" charset="-120"/>
-              </a:rPr>
-              <a:t>Doctor</a:t>
-            </a:r>
-            <a:endParaRPr lang="en-US" sz="1000" dirty="0"/>
-          </a:p>
-        </p:txBody>
-      </p:sp>
-      <p:sp>
-        <p:nvSpPr>
-          <p:cNvPr id="27" name="Text 21"/>
-          <p:cNvSpPr/>
-          <p:nvPr/>
-        </p:nvSpPr>
-        <p:spPr>
-          <a:xfrm>
-            <a:off x="7561905" y="4206240"/>
-            <a:ext cx="1633667" cy="1737360"/>
+              <a:rPr lang="en-US" sz="1250" b="1" dirty="0">
+                <a:solidFill>
+                  <a:srgbClr val="12395C"/>
+                </a:solidFill>
+                <a:latin typeface="Calibri" pitchFamily="34" charset="0"/>
+                <a:ea typeface="Calibri" pitchFamily="34" charset="-122"/>
+                <a:cs typeface="Calibri" pitchFamily="34" charset="-120"/>
+              </a:rPr>
+              <a:t>Lưu trọng số + cơ chế dự phòng</a:t>
+            </a:r>
+            <a:endParaRPr lang="en-US" sz="1250" dirty="0"/>
+          </a:p>
+        </p:txBody>
+      </p:sp>
+      <p:sp>
+        <p:nvSpPr>
+          <p:cNvPr id="29" name="Text 26"/>
+          <p:cNvSpPr/>
+          <p:nvPr/>
+        </p:nvSpPr>
+        <p:spPr>
+          <a:xfrm>
+            <a:off x="9349511" y="4206240"/>
+            <a:ext cx="2156384" cy="868680"/>
           </a:xfrm>
           <a:prstGeom prst="rect">
             <a:avLst/>
@@ -6188,7 +6380,7 @@
               <a:buNone/>
             </a:pPr>
             <a:r>
-              <a:rPr lang="en-US" sz="1100" dirty="0">
+              <a:rPr lang="en-US" sz="1050" dirty="0">
                 <a:solidFill>
                   <a:srgbClr val="16212E"/>
                 </a:solidFill>
@@ -6196,194 +6388,79 @@
                 <a:ea typeface="Calibri" pitchFamily="34" charset="-122"/>
                 <a:cs typeface="Calibri" pitchFamily="34" charset="-120"/>
               </a:rPr>
-              <a:t>Duyệt kết quả AI, ghi kết luận chẩn đoán cuối cùng.</a:t>
-            </a:r>
-            <a:endParaRPr lang="en-US" sz="1100" dirty="0"/>
-          </a:p>
-        </p:txBody>
-      </p:sp>
-      <p:sp>
-        <p:nvSpPr>
-          <p:cNvPr id="28" name="Shape 22"/>
-          <p:cNvSpPr/>
-          <p:nvPr/>
-        </p:nvSpPr>
-        <p:spPr>
-          <a:xfrm>
-            <a:off x="9680204" y="1965960"/>
-            <a:ext cx="1962851" cy="4114800"/>
+              <a:t>Lưu weights đã học; nếu file lỗi/thiếu → tự động fallback dùng lại hệ luật viết tay, hệ thống không bao giờ “chết”.</a:t>
+            </a:r>
+            <a:endParaRPr lang="en-US" sz="1050" dirty="0"/>
+          </a:p>
+        </p:txBody>
+      </p:sp>
+      <p:sp>
+        <p:nvSpPr>
+          <p:cNvPr id="30" name="Shape 27"/>
+          <p:cNvSpPr/>
+          <p:nvPr/>
+        </p:nvSpPr>
+        <p:spPr>
+          <a:xfrm>
+            <a:off x="548640" y="5349240"/>
+            <a:ext cx="11094415" cy="868680"/>
           </a:xfrm>
           <a:prstGeom prst="roundRect">
             <a:avLst>
-              <a:gd name="adj" fmla="val 4193"/>
+              <a:gd name="adj" fmla="val 9474"/>
             </a:avLst>
           </a:prstGeom>
           <a:solidFill>
-            <a:srgbClr val="EEF3F8"/>
+            <a:srgbClr val="E9F2F6"/>
           </a:solidFill>
           <a:ln w="12700">
             <a:solidFill>
-              <a:srgbClr val="D6DEE6"/>
+              <a:srgbClr val="1C7293"/>
             </a:solidFill>
             <a:prstDash val="solid"/>
           </a:ln>
-          <a:effectLst>
-            <a:outerShdw sx="100000" sy="100000" kx="0" ky="0" algn="bl" rotWithShape="0" blurRad="101600" dist="38100" dir="5400000">
-              <a:srgbClr val="9AA7B4">
-                <a:alpha val="28000"/>
-              </a:srgbClr>
-            </a:outerShdw>
-          </a:effectLst>
-        </p:spPr>
-      </p:sp>
-      <p:sp>
-        <p:nvSpPr>
-          <p:cNvPr id="29" name="Shape 23"/>
-          <p:cNvSpPr/>
-          <p:nvPr/>
-        </p:nvSpPr>
-        <p:spPr>
-          <a:xfrm>
-            <a:off x="10181570" y="2354580"/>
-            <a:ext cx="960120" cy="960120"/>
-          </a:xfrm>
-          <a:prstGeom prst="ellipse">
-            <a:avLst/>
-          </a:prstGeom>
-          <a:solidFill>
-            <a:srgbClr val="1C7293"/>
-          </a:solidFill>
-          <a:ln/>
-        </p:spPr>
-      </p:sp>
-      <p:pic>
-        <p:nvPicPr>
-          <p:cNvPr id="30" name="Image 4" descr="/home/claude/output2/icons/admin.png">    </p:cNvPr>
-          <p:cNvPicPr>
-            <a:picLocks noChangeAspect="1"/>
-          </p:cNvPicPr>
-          <p:nvPr/>
-        </p:nvPicPr>
-        <p:blipFill>
-          <a:blip r:embed="rId5"/>
-          <a:stretch>
-            <a:fillRect/>
-          </a:stretch>
-        </p:blipFill>
-        <p:spPr>
-          <a:xfrm>
-            <a:off x="10421600" y="2594610"/>
-            <a:ext cx="480060" cy="480060"/>
-          </a:xfrm>
-          <a:prstGeom prst="rect">
-            <a:avLst/>
-          </a:prstGeom>
-        </p:spPr>
-      </p:pic>
-      <p:sp>
-        <p:nvSpPr>
-          <p:cNvPr id="31" name="Text 24"/>
-          <p:cNvSpPr/>
-          <p:nvPr/>
-        </p:nvSpPr>
-        <p:spPr>
-          <a:xfrm>
-            <a:off x="9771644" y="3474720"/>
-            <a:ext cx="1779971" cy="365760"/>
-          </a:xfrm>
-          <a:prstGeom prst="rect">
-            <a:avLst/>
-          </a:prstGeom>
-          <a:noFill/>
-          <a:ln/>
-        </p:spPr>
-        <p:txBody>
-          <a:bodyPr wrap="square" rtlCol="0" anchor="ctr"/>
-          <a:lstStyle/>
-          <a:p>
-            <a:pPr algn="ctr" indent="0" marL="0">
-              <a:buNone/>
-            </a:pPr>
-            <a:r>
-              <a:rPr lang="en-US" sz="1550" b="1" dirty="0">
-                <a:solidFill>
-                  <a:srgbClr val="12395C"/>
-                </a:solidFill>
-                <a:latin typeface="Cambria" pitchFamily="34" charset="0"/>
-                <a:ea typeface="Cambria" pitchFamily="34" charset="-122"/>
-                <a:cs typeface="Cambria" pitchFamily="34" charset="-120"/>
-              </a:rPr>
-              <a:t>Quản trị viên</a:t>
-            </a:r>
-            <a:endParaRPr lang="en-US" sz="1550" dirty="0"/>
-          </a:p>
-        </p:txBody>
-      </p:sp>
-      <p:sp>
-        <p:nvSpPr>
-          <p:cNvPr id="32" name="Text 25"/>
-          <p:cNvSpPr/>
-          <p:nvPr/>
-        </p:nvSpPr>
-        <p:spPr>
-          <a:xfrm>
-            <a:off x="9771644" y="3813048"/>
-            <a:ext cx="1779971" cy="256032"/>
-          </a:xfrm>
-          <a:prstGeom prst="rect">
-            <a:avLst/>
-          </a:prstGeom>
-          <a:noFill/>
-          <a:ln/>
-        </p:spPr>
-        <p:txBody>
-          <a:bodyPr wrap="square" rtlCol="0" anchor="ctr"/>
-          <a:lstStyle/>
-          <a:p>
-            <a:pPr algn="ctr" indent="0" marL="0">
-              <a:buNone/>
-            </a:pPr>
-            <a:r>
-              <a:rPr lang="en-US" sz="1000" i="1" dirty="0">
-                <a:solidFill>
-                  <a:srgbClr val="5B6774"/>
-                </a:solidFill>
-                <a:latin typeface="Calibri" pitchFamily="34" charset="0"/>
-                <a:ea typeface="Calibri" pitchFamily="34" charset="-122"/>
-                <a:cs typeface="Calibri" pitchFamily="34" charset="-120"/>
-              </a:rPr>
-              <a:t>Admin</a:t>
-            </a:r>
-            <a:endParaRPr lang="en-US" sz="1000" dirty="0"/>
-          </a:p>
-        </p:txBody>
-      </p:sp>
-      <p:sp>
-        <p:nvSpPr>
-          <p:cNvPr id="33" name="Text 26"/>
-          <p:cNvSpPr/>
-          <p:nvPr/>
-        </p:nvSpPr>
-        <p:spPr>
-          <a:xfrm>
-            <a:off x="9844796" y="4206240"/>
-            <a:ext cx="1633667" cy="1737360"/>
-          </a:xfrm>
-          <a:prstGeom prst="rect">
-            <a:avLst/>
-          </a:prstGeom>
-          <a:noFill/>
-          <a:ln/>
-        </p:spPr>
-        <p:txBody>
-          <a:bodyPr wrap="square" rtlCol="0" anchor="t"/>
-          <a:lstStyle/>
-          <a:p>
-            <a:pPr algn="ctr" indent="0" marL="0">
-              <a:buNone/>
-            </a:pPr>
-            <a:r>
-              <a:rPr lang="en-US" sz="1100" dirty="0">
+        </p:spPr>
+      </p:sp>
+      <p:sp>
+        <p:nvSpPr>
+          <p:cNvPr id="31" name="Text 28"/>
+          <p:cNvSpPr/>
+          <p:nvPr/>
+        </p:nvSpPr>
+        <p:spPr>
+          <a:xfrm>
+            <a:off x="777240" y="5349240"/>
+            <a:ext cx="10637215" cy="868680"/>
+          </a:xfrm>
+          <a:prstGeom prst="rect">
+            <a:avLst/>
+          </a:prstGeom>
+          <a:noFill/>
+          <a:ln/>
+        </p:spPr>
+        <p:txBody>
+          <a:bodyPr wrap="square" rtlCol="0" anchor="ctr"/>
+          <a:lstStyle/>
+          <a:p>
+            <a:pPr indent="0" marL="0">
+              <a:buNone/>
+            </a:pPr>
+            <a:r>
+              <a:rPr lang="en-US" sz="1250" b="1" dirty="0">
+                <a:solidFill>
+                  <a:srgbClr val="1C7293"/>
+                </a:solidFill>
+                <a:latin typeface="Calibri" pitchFamily="34" charset="0"/>
+                <a:ea typeface="Calibri" pitchFamily="34" charset="-122"/>
+                <a:cs typeface="Calibri" pitchFamily="34" charset="-120"/>
+              </a:rPr>
+              <a:t>Câu trả lời gợi ý khi bị hỏi “ANFIS train trên dữ liệu gì”:  </a:t>
+            </a:r>
+            <a:pPr indent="0" marL="0">
+              <a:buNone/>
+            </a:pPr>
+            <a:r>
+              <a:rPr lang="en-US" sz="1250" i="1" dirty="0">
                 <a:solidFill>
                   <a:srgbClr val="16212E"/>
                 </a:solidFill>
@@ -6391,15 +6468,15 @@
                 <a:ea typeface="Calibri" pitchFamily="34" charset="-122"/>
                 <a:cs typeface="Calibri" pitchFamily="34" charset="-120"/>
               </a:rPr>
-              <a:t>Quản lý người dùng/vai trò, giám sát AI, cấu hình hệ thống.</a:t>
-            </a:r>
-            <a:endParaRPr lang="en-US" sz="1100" dirty="0"/>
-          </a:p>
-        </p:txBody>
-      </p:sp>
-      <p:sp>
-        <p:nvSpPr>
-          <p:cNvPr id="34" name="Text 27"/>
+              <a:t>“ANFIS không train trên dữ liệu bệnh nhân thật, mà học lại cách suy luận của một hệ luật mờ do nhóm tự thiết kế — kỹ thuật distillation.”</a:t>
+            </a:r>
+            <a:endParaRPr lang="en-US" sz="1250" dirty="0"/>
+          </a:p>
+        </p:txBody>
+      </p:sp>
+      <p:sp>
+        <p:nvSpPr>
+          <p:cNvPr id="32" name="Text 29"/>
           <p:cNvSpPr/>
           <p:nvPr/>
         </p:nvSpPr>
@@ -6438,7 +6515,7 @@
       </p:sp>
       <p:sp>
         <p:nvSpPr>
-          <p:cNvPr id="35" name="Text 28"/>
+          <p:cNvPr id="33" name="Text 30"/>
           <p:cNvSpPr/>
           <p:nvPr/>
         </p:nvSpPr>
@@ -6540,7 +6617,7 @@
                 <a:ea typeface="Calibri" pitchFamily="34" charset="-122"/>
                 <a:cs typeface="Calibri" pitchFamily="34" charset="-120"/>
               </a:rPr>
-              <a:t>THIẾT KẾ HỆ THỐNG</a:t>
+              <a:t>QUAN TRỌNG NHẤT</a:t>
             </a:r>
             <a:endParaRPr lang="en-US" sz="1300" dirty="0"/>
           </a:p>
@@ -6579,15 +6656,398 @@
                 <a:ea typeface="Cambria" pitchFamily="34" charset="-122"/>
                 <a:cs typeface="Cambria" pitchFamily="34" charset="-120"/>
               </a:rPr>
-              <a:t>Sơ đồ ngữ cảnh (Context Diagram)</a:t>
+              <a:t>Luồng xử lý AI — từ ảnh đến kết quả</a:t>
             </a:r>
             <a:endParaRPr lang="en-US" sz="3000" dirty="0"/>
           </a:p>
         </p:txBody>
+      </p:sp>
+      <p:sp>
+        <p:nvSpPr>
+          <p:cNvPr id="4" name="Shape 2"/>
+          <p:cNvSpPr/>
+          <p:nvPr/>
+        </p:nvSpPr>
+        <p:spPr>
+          <a:xfrm>
+            <a:off x="1143000" y="2322576"/>
+            <a:ext cx="292608" cy="292608"/>
+          </a:xfrm>
+          <a:prstGeom prst="ellipse">
+            <a:avLst/>
+          </a:prstGeom>
+          <a:solidFill>
+            <a:srgbClr val="D97C2B"/>
+          </a:solidFill>
+          <a:ln/>
+        </p:spPr>
+      </p:sp>
+      <p:sp>
+        <p:nvSpPr>
+          <p:cNvPr id="5" name="Text 3"/>
+          <p:cNvSpPr/>
+          <p:nvPr/>
+        </p:nvSpPr>
+        <p:spPr>
+          <a:xfrm>
+            <a:off x="1143000" y="2322576"/>
+            <a:ext cx="292608" cy="292608"/>
+          </a:xfrm>
+          <a:prstGeom prst="rect">
+            <a:avLst/>
+          </a:prstGeom>
+          <a:noFill/>
+          <a:ln/>
+        </p:spPr>
+        <p:txBody>
+          <a:bodyPr wrap="square" rtlCol="0" anchor="ctr"/>
+          <a:lstStyle/>
+          <a:p>
+            <a:pPr algn="ctr" indent="0" marL="0">
+              <a:buNone/>
+            </a:pPr>
+            <a:r>
+              <a:rPr lang="en-US" sz="1300" b="1" dirty="0">
+                <a:solidFill>
+                  <a:srgbClr val="FFFFFF"/>
+                </a:solidFill>
+                <a:latin typeface="Cambria" pitchFamily="34" charset="0"/>
+                <a:ea typeface="Cambria" pitchFamily="34" charset="-122"/>
+                <a:cs typeface="Cambria" pitchFamily="34" charset="-120"/>
+              </a:rPr>
+              <a:t>1</a:t>
+            </a:r>
+            <a:endParaRPr lang="en-US" sz="1300" dirty="0"/>
+          </a:p>
+        </p:txBody>
+      </p:sp>
+      <p:sp>
+        <p:nvSpPr>
+          <p:cNvPr id="6" name="Shape 4"/>
+          <p:cNvSpPr/>
+          <p:nvPr/>
+        </p:nvSpPr>
+        <p:spPr>
+          <a:xfrm>
+            <a:off x="2935224" y="2322576"/>
+            <a:ext cx="292608" cy="292608"/>
+          </a:xfrm>
+          <a:prstGeom prst="ellipse">
+            <a:avLst/>
+          </a:prstGeom>
+          <a:solidFill>
+            <a:srgbClr val="D97C2B"/>
+          </a:solidFill>
+          <a:ln/>
+        </p:spPr>
+      </p:sp>
+      <p:sp>
+        <p:nvSpPr>
+          <p:cNvPr id="7" name="Text 5"/>
+          <p:cNvSpPr/>
+          <p:nvPr/>
+        </p:nvSpPr>
+        <p:spPr>
+          <a:xfrm>
+            <a:off x="2935224" y="2322576"/>
+            <a:ext cx="292608" cy="292608"/>
+          </a:xfrm>
+          <a:prstGeom prst="rect">
+            <a:avLst/>
+          </a:prstGeom>
+          <a:noFill/>
+          <a:ln/>
+        </p:spPr>
+        <p:txBody>
+          <a:bodyPr wrap="square" rtlCol="0" anchor="ctr"/>
+          <a:lstStyle/>
+          <a:p>
+            <a:pPr algn="ctr" indent="0" marL="0">
+              <a:buNone/>
+            </a:pPr>
+            <a:r>
+              <a:rPr lang="en-US" sz="1300" b="1" dirty="0">
+                <a:solidFill>
+                  <a:srgbClr val="FFFFFF"/>
+                </a:solidFill>
+                <a:latin typeface="Cambria" pitchFamily="34" charset="0"/>
+                <a:ea typeface="Cambria" pitchFamily="34" charset="-122"/>
+                <a:cs typeface="Cambria" pitchFamily="34" charset="-120"/>
+              </a:rPr>
+              <a:t>2</a:t>
+            </a:r>
+            <a:endParaRPr lang="en-US" sz="1300" dirty="0"/>
+          </a:p>
+        </p:txBody>
+      </p:sp>
+      <p:sp>
+        <p:nvSpPr>
+          <p:cNvPr id="8" name="Shape 6"/>
+          <p:cNvSpPr/>
+          <p:nvPr/>
+        </p:nvSpPr>
+        <p:spPr>
+          <a:xfrm>
+            <a:off x="4727448" y="2322576"/>
+            <a:ext cx="292608" cy="292608"/>
+          </a:xfrm>
+          <a:prstGeom prst="ellipse">
+            <a:avLst/>
+          </a:prstGeom>
+          <a:solidFill>
+            <a:srgbClr val="D97C2B"/>
+          </a:solidFill>
+          <a:ln/>
+        </p:spPr>
+      </p:sp>
+      <p:sp>
+        <p:nvSpPr>
+          <p:cNvPr id="9" name="Text 7"/>
+          <p:cNvSpPr/>
+          <p:nvPr/>
+        </p:nvSpPr>
+        <p:spPr>
+          <a:xfrm>
+            <a:off x="4727448" y="2322576"/>
+            <a:ext cx="292608" cy="292608"/>
+          </a:xfrm>
+          <a:prstGeom prst="rect">
+            <a:avLst/>
+          </a:prstGeom>
+          <a:noFill/>
+          <a:ln/>
+        </p:spPr>
+        <p:txBody>
+          <a:bodyPr wrap="square" rtlCol="0" anchor="ctr"/>
+          <a:lstStyle/>
+          <a:p>
+            <a:pPr algn="ctr" indent="0" marL="0">
+              <a:buNone/>
+            </a:pPr>
+            <a:r>
+              <a:rPr lang="en-US" sz="1300" b="1" dirty="0">
+                <a:solidFill>
+                  <a:srgbClr val="FFFFFF"/>
+                </a:solidFill>
+                <a:latin typeface="Cambria" pitchFamily="34" charset="0"/>
+                <a:ea typeface="Cambria" pitchFamily="34" charset="-122"/>
+                <a:cs typeface="Cambria" pitchFamily="34" charset="-120"/>
+              </a:rPr>
+              <a:t>3</a:t>
+            </a:r>
+            <a:endParaRPr lang="en-US" sz="1300" dirty="0"/>
+          </a:p>
+        </p:txBody>
+      </p:sp>
+      <p:sp>
+        <p:nvSpPr>
+          <p:cNvPr id="10" name="Shape 8"/>
+          <p:cNvSpPr/>
+          <p:nvPr/>
+        </p:nvSpPr>
+        <p:spPr>
+          <a:xfrm>
+            <a:off x="6519672" y="2322576"/>
+            <a:ext cx="292608" cy="292608"/>
+          </a:xfrm>
+          <a:prstGeom prst="ellipse">
+            <a:avLst/>
+          </a:prstGeom>
+          <a:solidFill>
+            <a:srgbClr val="D97C2B"/>
+          </a:solidFill>
+          <a:ln/>
+        </p:spPr>
+      </p:sp>
+      <p:sp>
+        <p:nvSpPr>
+          <p:cNvPr id="11" name="Text 9"/>
+          <p:cNvSpPr/>
+          <p:nvPr/>
+        </p:nvSpPr>
+        <p:spPr>
+          <a:xfrm>
+            <a:off x="6519672" y="2322576"/>
+            <a:ext cx="292608" cy="292608"/>
+          </a:xfrm>
+          <a:prstGeom prst="rect">
+            <a:avLst/>
+          </a:prstGeom>
+          <a:noFill/>
+          <a:ln/>
+        </p:spPr>
+        <p:txBody>
+          <a:bodyPr wrap="square" rtlCol="0" anchor="ctr"/>
+          <a:lstStyle/>
+          <a:p>
+            <a:pPr algn="ctr" indent="0" marL="0">
+              <a:buNone/>
+            </a:pPr>
+            <a:r>
+              <a:rPr lang="en-US" sz="1300" b="1" dirty="0">
+                <a:solidFill>
+                  <a:srgbClr val="FFFFFF"/>
+                </a:solidFill>
+                <a:latin typeface="Cambria" pitchFamily="34" charset="0"/>
+                <a:ea typeface="Cambria" pitchFamily="34" charset="-122"/>
+                <a:cs typeface="Cambria" pitchFamily="34" charset="-120"/>
+              </a:rPr>
+              <a:t>4</a:t>
+            </a:r>
+            <a:endParaRPr lang="en-US" sz="1300" dirty="0"/>
+          </a:p>
+        </p:txBody>
+      </p:sp>
+      <p:sp>
+        <p:nvSpPr>
+          <p:cNvPr id="12" name="Shape 10"/>
+          <p:cNvSpPr/>
+          <p:nvPr/>
+        </p:nvSpPr>
+        <p:spPr>
+          <a:xfrm>
+            <a:off x="8311896" y="2322576"/>
+            <a:ext cx="292608" cy="292608"/>
+          </a:xfrm>
+          <a:prstGeom prst="ellipse">
+            <a:avLst/>
+          </a:prstGeom>
+          <a:solidFill>
+            <a:srgbClr val="D97C2B"/>
+          </a:solidFill>
+          <a:ln/>
+        </p:spPr>
+      </p:sp>
+      <p:sp>
+        <p:nvSpPr>
+          <p:cNvPr id="13" name="Text 11"/>
+          <p:cNvSpPr/>
+          <p:nvPr/>
+        </p:nvSpPr>
+        <p:spPr>
+          <a:xfrm>
+            <a:off x="8311896" y="2322576"/>
+            <a:ext cx="292608" cy="292608"/>
+          </a:xfrm>
+          <a:prstGeom prst="rect">
+            <a:avLst/>
+          </a:prstGeom>
+          <a:noFill/>
+          <a:ln/>
+        </p:spPr>
+        <p:txBody>
+          <a:bodyPr wrap="square" rtlCol="0" anchor="ctr"/>
+          <a:lstStyle/>
+          <a:p>
+            <a:pPr algn="ctr" indent="0" marL="0">
+              <a:buNone/>
+            </a:pPr>
+            <a:r>
+              <a:rPr lang="en-US" sz="1300" b="1" dirty="0">
+                <a:solidFill>
+                  <a:srgbClr val="FFFFFF"/>
+                </a:solidFill>
+                <a:latin typeface="Cambria" pitchFamily="34" charset="0"/>
+                <a:ea typeface="Cambria" pitchFamily="34" charset="-122"/>
+                <a:cs typeface="Cambria" pitchFamily="34" charset="-120"/>
+              </a:rPr>
+              <a:t>5</a:t>
+            </a:r>
+            <a:endParaRPr lang="en-US" sz="1300" dirty="0"/>
+          </a:p>
+        </p:txBody>
+      </p:sp>
+      <p:sp>
+        <p:nvSpPr>
+          <p:cNvPr id="14" name="Shape 12"/>
+          <p:cNvSpPr/>
+          <p:nvPr/>
+        </p:nvSpPr>
+        <p:spPr>
+          <a:xfrm>
+            <a:off x="10104120" y="2322576"/>
+            <a:ext cx="292608" cy="292608"/>
+          </a:xfrm>
+          <a:prstGeom prst="ellipse">
+            <a:avLst/>
+          </a:prstGeom>
+          <a:solidFill>
+            <a:srgbClr val="D97C2B"/>
+          </a:solidFill>
+          <a:ln/>
+        </p:spPr>
+      </p:sp>
+      <p:sp>
+        <p:nvSpPr>
+          <p:cNvPr id="15" name="Text 13"/>
+          <p:cNvSpPr/>
+          <p:nvPr/>
+        </p:nvSpPr>
+        <p:spPr>
+          <a:xfrm>
+            <a:off x="10104120" y="2322576"/>
+            <a:ext cx="292608" cy="292608"/>
+          </a:xfrm>
+          <a:prstGeom prst="rect">
+            <a:avLst/>
+          </a:prstGeom>
+          <a:noFill/>
+          <a:ln/>
+        </p:spPr>
+        <p:txBody>
+          <a:bodyPr wrap="square" rtlCol="0" anchor="ctr"/>
+          <a:lstStyle/>
+          <a:p>
+            <a:pPr algn="ctr" indent="0" marL="0">
+              <a:buNone/>
+            </a:pPr>
+            <a:r>
+              <a:rPr lang="en-US" sz="1300" b="1" dirty="0">
+                <a:solidFill>
+                  <a:srgbClr val="FFFFFF"/>
+                </a:solidFill>
+                <a:latin typeface="Cambria" pitchFamily="34" charset="0"/>
+                <a:ea typeface="Cambria" pitchFamily="34" charset="-122"/>
+                <a:cs typeface="Cambria" pitchFamily="34" charset="-120"/>
+              </a:rPr>
+              <a:t>6</a:t>
+            </a:r>
+            <a:endParaRPr lang="en-US" sz="1300" dirty="0"/>
+          </a:p>
+        </p:txBody>
+      </p:sp>
+      <p:sp>
+        <p:nvSpPr>
+          <p:cNvPr id="16" name="Shape 14"/>
+          <p:cNvSpPr/>
+          <p:nvPr/>
+        </p:nvSpPr>
+        <p:spPr>
+          <a:xfrm>
+            <a:off x="548640" y="2743200"/>
+            <a:ext cx="1481328" cy="1234440"/>
+          </a:xfrm>
+          <a:prstGeom prst="roundRect">
+            <a:avLst>
+              <a:gd name="adj" fmla="val 7407"/>
+            </a:avLst>
+          </a:prstGeom>
+          <a:solidFill>
+            <a:srgbClr val="12395C"/>
+          </a:solidFill>
+          <a:ln/>
+          <a:effectLst>
+            <a:outerShdw sx="100000" sy="100000" kx="0" ky="0" algn="bl" rotWithShape="0" blurRad="76200" dist="25400" dir="5400000">
+              <a:srgbClr val="9AA7B4">
+                <a:alpha val="28000"/>
+              </a:srgbClr>
+            </a:outerShdw>
+          </a:effectLst>
+        </p:spPr>
       </p:sp>
       <p:pic>
         <p:nvPicPr>
-          <p:cNvPr id="4" name="Image 0" descr="/home/claude/diagrams/slide_context.png">    </p:cNvPr>
+          <p:cNvPr id="17" name="Image 0" descr="/home/claude/output2/icons/image.png">    </p:cNvPr>
           <p:cNvPicPr>
             <a:picLocks noChangeAspect="1"/>
           </p:cNvPicPr>
@@ -6601,8 +7061,8 @@
         </p:blipFill>
         <p:spPr>
           <a:xfrm>
-            <a:off x="2488540" y="1463040"/>
-            <a:ext cx="7214616" cy="4983480"/>
+            <a:off x="1051560" y="2871216"/>
+            <a:ext cx="475488" cy="475488"/>
           </a:xfrm>
           <a:prstGeom prst="rect">
             <a:avLst/>
@@ -6611,7 +7071,1198 @@
       </p:pic>
       <p:sp>
         <p:nvSpPr>
-          <p:cNvPr id="5" name="Text 2"/>
+          <p:cNvPr id="18" name="Text 15"/>
+          <p:cNvSpPr/>
+          <p:nvPr/>
+        </p:nvSpPr>
+        <p:spPr>
+          <a:xfrm>
+            <a:off x="621792" y="3383280"/>
+            <a:ext cx="1335024" cy="320040"/>
+          </a:xfrm>
+          <a:prstGeom prst="rect">
+            <a:avLst/>
+          </a:prstGeom>
+          <a:noFill/>
+          <a:ln/>
+        </p:spPr>
+        <p:txBody>
+          <a:bodyPr wrap="square" rtlCol="0" anchor="ctr"/>
+          <a:lstStyle/>
+          <a:p>
+            <a:pPr algn="ctr" indent="0" marL="0">
+              <a:buNone/>
+            </a:pPr>
+            <a:r>
+              <a:rPr lang="en-US" sz="1150" b="1" dirty="0">
+                <a:solidFill>
+                  <a:srgbClr val="FFFFFF"/>
+                </a:solidFill>
+                <a:latin typeface="Calibri" pitchFamily="34" charset="0"/>
+                <a:ea typeface="Calibri" pitchFamily="34" charset="-122"/>
+                <a:cs typeface="Calibri" pitchFamily="34" charset="-120"/>
+              </a:rPr>
+              <a:t>Ảnh X-quang</a:t>
+            </a:r>
+            <a:endParaRPr lang="en-US" sz="1150" dirty="0"/>
+          </a:p>
+        </p:txBody>
+      </p:sp>
+      <p:sp>
+        <p:nvSpPr>
+          <p:cNvPr id="19" name="Text 16"/>
+          <p:cNvSpPr/>
+          <p:nvPr/>
+        </p:nvSpPr>
+        <p:spPr>
+          <a:xfrm>
+            <a:off x="621792" y="3685032"/>
+            <a:ext cx="1335024" cy="274320"/>
+          </a:xfrm>
+          <a:prstGeom prst="rect">
+            <a:avLst/>
+          </a:prstGeom>
+          <a:noFill/>
+          <a:ln/>
+        </p:spPr>
+        <p:txBody>
+          <a:bodyPr wrap="square" rtlCol="0" anchor="ctr"/>
+          <a:lstStyle/>
+          <a:p>
+            <a:pPr algn="ctr" indent="0" marL="0">
+              <a:buNone/>
+            </a:pPr>
+            <a:r>
+              <a:rPr lang="en-US" sz="900" dirty="0">
+                <a:solidFill>
+                  <a:srgbClr val="E7EEF3"/>
+                </a:solidFill>
+                <a:latin typeface="Calibri" pitchFamily="34" charset="0"/>
+                <a:ea typeface="Calibri" pitchFamily="34" charset="-122"/>
+                <a:cs typeface="Calibri" pitchFamily="34" charset="-120"/>
+              </a:rPr>
+              <a:t>đầu vào</a:t>
+            </a:r>
+            <a:endParaRPr lang="en-US" sz="900" dirty="0"/>
+          </a:p>
+        </p:txBody>
+      </p:sp>
+      <p:sp>
+        <p:nvSpPr>
+          <p:cNvPr id="20" name="Shape 17"/>
+          <p:cNvSpPr/>
+          <p:nvPr/>
+        </p:nvSpPr>
+        <p:spPr>
+          <a:xfrm>
+            <a:off x="2340864" y="2743200"/>
+            <a:ext cx="1481328" cy="1234440"/>
+          </a:xfrm>
+          <a:prstGeom prst="roundRect">
+            <a:avLst>
+              <a:gd name="adj" fmla="val 7407"/>
+            </a:avLst>
+          </a:prstGeom>
+          <a:solidFill>
+            <a:srgbClr val="12395C"/>
+          </a:solidFill>
+          <a:ln/>
+          <a:effectLst>
+            <a:outerShdw sx="100000" sy="100000" kx="0" ky="0" algn="bl" rotWithShape="0" blurRad="76200" dist="25400" dir="5400000">
+              <a:srgbClr val="9AA7B4">
+                <a:alpha val="28000"/>
+              </a:srgbClr>
+            </a:outerShdw>
+          </a:effectLst>
+        </p:spPr>
+      </p:sp>
+      <p:pic>
+        <p:nvPicPr>
+          <p:cNvPr id="21" name="Image 1" descr="/home/claude/output2/icons/cogs.png">    </p:cNvPr>
+          <p:cNvPicPr>
+            <a:picLocks noChangeAspect="1"/>
+          </p:cNvPicPr>
+          <p:nvPr/>
+        </p:nvPicPr>
+        <p:blipFill>
+          <a:blip r:embed="rId2"/>
+          <a:stretch>
+            <a:fillRect/>
+          </a:stretch>
+        </p:blipFill>
+        <p:spPr>
+          <a:xfrm>
+            <a:off x="2843784" y="2871216"/>
+            <a:ext cx="475488" cy="475488"/>
+          </a:xfrm>
+          <a:prstGeom prst="rect">
+            <a:avLst/>
+          </a:prstGeom>
+        </p:spPr>
+      </p:pic>
+      <p:sp>
+        <p:nvSpPr>
+          <p:cNvPr id="22" name="Text 18"/>
+          <p:cNvSpPr/>
+          <p:nvPr/>
+        </p:nvSpPr>
+        <p:spPr>
+          <a:xfrm>
+            <a:off x="2414016" y="3383280"/>
+            <a:ext cx="1335024" cy="320040"/>
+          </a:xfrm>
+          <a:prstGeom prst="rect">
+            <a:avLst/>
+          </a:prstGeom>
+          <a:noFill/>
+          <a:ln/>
+        </p:spPr>
+        <p:txBody>
+          <a:bodyPr wrap="square" rtlCol="0" anchor="ctr"/>
+          <a:lstStyle/>
+          <a:p>
+            <a:pPr algn="ctr" indent="0" marL="0">
+              <a:buNone/>
+            </a:pPr>
+            <a:r>
+              <a:rPr lang="en-US" sz="1150" b="1" dirty="0">
+                <a:solidFill>
+                  <a:srgbClr val="FFFFFF"/>
+                </a:solidFill>
+                <a:latin typeface="Calibri" pitchFamily="34" charset="0"/>
+                <a:ea typeface="Calibri" pitchFamily="34" charset="-122"/>
+                <a:cs typeface="Calibri" pitchFamily="34" charset="-120"/>
+              </a:rPr>
+              <a:t>Tiền xử lý</a:t>
+            </a:r>
+            <a:endParaRPr lang="en-US" sz="1150" dirty="0"/>
+          </a:p>
+        </p:txBody>
+      </p:sp>
+      <p:sp>
+        <p:nvSpPr>
+          <p:cNvPr id="23" name="Text 19"/>
+          <p:cNvSpPr/>
+          <p:nvPr/>
+        </p:nvSpPr>
+        <p:spPr>
+          <a:xfrm>
+            <a:off x="2414016" y="3685032"/>
+            <a:ext cx="1335024" cy="274320"/>
+          </a:xfrm>
+          <a:prstGeom prst="rect">
+            <a:avLst/>
+          </a:prstGeom>
+          <a:noFill/>
+          <a:ln/>
+        </p:spPr>
+        <p:txBody>
+          <a:bodyPr wrap="square" rtlCol="0" anchor="ctr"/>
+          <a:lstStyle/>
+          <a:p>
+            <a:pPr algn="ctr" indent="0" marL="0">
+              <a:buNone/>
+            </a:pPr>
+            <a:r>
+              <a:rPr lang="en-US" sz="900" dirty="0">
+                <a:solidFill>
+                  <a:srgbClr val="E7EEF3"/>
+                </a:solidFill>
+                <a:latin typeface="Calibri" pitchFamily="34" charset="0"/>
+                <a:ea typeface="Calibri" pitchFamily="34" charset="-122"/>
+                <a:cs typeface="Calibri" pitchFamily="34" charset="-120"/>
+              </a:rPr>
+              <a:t>làm rõ ảnh (CLAHE)</a:t>
+            </a:r>
+            <a:endParaRPr lang="en-US" sz="900" dirty="0"/>
+          </a:p>
+        </p:txBody>
+      </p:sp>
+      <p:sp>
+        <p:nvSpPr>
+          <p:cNvPr id="24" name="Shape 20"/>
+          <p:cNvSpPr/>
+          <p:nvPr/>
+        </p:nvSpPr>
+        <p:spPr>
+          <a:xfrm>
+            <a:off x="2075688" y="3360420"/>
+            <a:ext cx="219456" cy="0"/>
+          </a:xfrm>
+          <a:prstGeom prst="line">
+            <a:avLst/>
+          </a:prstGeom>
+          <a:noFill/>
+          <a:ln w="22225">
+            <a:solidFill>
+              <a:srgbClr val="5B6774"/>
+            </a:solidFill>
+            <a:prstDash val="solid"/>
+            <a:tailEnd type="triangle"/>
+          </a:ln>
+        </p:spPr>
+      </p:sp>
+      <p:sp>
+        <p:nvSpPr>
+          <p:cNvPr id="25" name="Shape 21"/>
+          <p:cNvSpPr/>
+          <p:nvPr/>
+        </p:nvSpPr>
+        <p:spPr>
+          <a:xfrm>
+            <a:off x="3867912" y="3360420"/>
+            <a:ext cx="219456" cy="0"/>
+          </a:xfrm>
+          <a:prstGeom prst="line">
+            <a:avLst/>
+          </a:prstGeom>
+          <a:noFill/>
+          <a:ln w="22225">
+            <a:solidFill>
+              <a:srgbClr val="5B6774"/>
+            </a:solidFill>
+            <a:prstDash val="solid"/>
+            <a:tailEnd type="triangle"/>
+          </a:ln>
+        </p:spPr>
+      </p:sp>
+      <p:sp>
+        <p:nvSpPr>
+          <p:cNvPr id="26" name="Shape 22"/>
+          <p:cNvSpPr/>
+          <p:nvPr/>
+        </p:nvSpPr>
+        <p:spPr>
+          <a:xfrm>
+            <a:off x="4133088" y="1965960"/>
+            <a:ext cx="1481328" cy="1234440"/>
+          </a:xfrm>
+          <a:prstGeom prst="roundRect">
+            <a:avLst>
+              <a:gd name="adj" fmla="val 7407"/>
+            </a:avLst>
+          </a:prstGeom>
+          <a:solidFill>
+            <a:srgbClr val="12395C"/>
+          </a:solidFill>
+          <a:ln/>
+          <a:effectLst>
+            <a:outerShdw sx="100000" sy="100000" kx="0" ky="0" algn="bl" rotWithShape="0" blurRad="76200" dist="25400" dir="5400000">
+              <a:srgbClr val="9AA7B4">
+                <a:alpha val="28000"/>
+              </a:srgbClr>
+            </a:outerShdw>
+          </a:effectLst>
+        </p:spPr>
+      </p:sp>
+      <p:pic>
+        <p:nvPicPr>
+          <p:cNvPr id="27" name="Image 2" descr="/home/claude/output2/icons/yolo.png">    </p:cNvPr>
+          <p:cNvPicPr>
+            <a:picLocks noChangeAspect="1"/>
+          </p:cNvPicPr>
+          <p:nvPr/>
+        </p:nvPicPr>
+        <p:blipFill>
+          <a:blip r:embed="rId3"/>
+          <a:stretch>
+            <a:fillRect/>
+          </a:stretch>
+        </p:blipFill>
+        <p:spPr>
+          <a:xfrm>
+            <a:off x="4636008" y="2093976"/>
+            <a:ext cx="475488" cy="475488"/>
+          </a:xfrm>
+          <a:prstGeom prst="rect">
+            <a:avLst/>
+          </a:prstGeom>
+        </p:spPr>
+      </p:pic>
+      <p:sp>
+        <p:nvSpPr>
+          <p:cNvPr id="28" name="Text 23"/>
+          <p:cNvSpPr/>
+          <p:nvPr/>
+        </p:nvSpPr>
+        <p:spPr>
+          <a:xfrm>
+            <a:off x="4206240" y="2606040"/>
+            <a:ext cx="1335024" cy="320040"/>
+          </a:xfrm>
+          <a:prstGeom prst="rect">
+            <a:avLst/>
+          </a:prstGeom>
+          <a:noFill/>
+          <a:ln/>
+        </p:spPr>
+        <p:txBody>
+          <a:bodyPr wrap="square" rtlCol="0" anchor="ctr"/>
+          <a:lstStyle/>
+          <a:p>
+            <a:pPr algn="ctr" indent="0" marL="0">
+              <a:buNone/>
+            </a:pPr>
+            <a:r>
+              <a:rPr lang="en-US" sz="1150" b="1" dirty="0">
+                <a:solidFill>
+                  <a:srgbClr val="FFFFFF"/>
+                </a:solidFill>
+                <a:latin typeface="Calibri" pitchFamily="34" charset="0"/>
+                <a:ea typeface="Calibri" pitchFamily="34" charset="-122"/>
+                <a:cs typeface="Calibri" pitchFamily="34" charset="-120"/>
+              </a:rPr>
+              <a:t>YOLOv11</a:t>
+            </a:r>
+            <a:endParaRPr lang="en-US" sz="1150" dirty="0"/>
+          </a:p>
+        </p:txBody>
+      </p:sp>
+      <p:sp>
+        <p:nvSpPr>
+          <p:cNvPr id="29" name="Text 24"/>
+          <p:cNvSpPr/>
+          <p:nvPr/>
+        </p:nvSpPr>
+        <p:spPr>
+          <a:xfrm>
+            <a:off x="4206240" y="2907792"/>
+            <a:ext cx="1335024" cy="274320"/>
+          </a:xfrm>
+          <a:prstGeom prst="rect">
+            <a:avLst/>
+          </a:prstGeom>
+          <a:noFill/>
+          <a:ln/>
+        </p:spPr>
+        <p:txBody>
+          <a:bodyPr wrap="square" rtlCol="0" anchor="ctr"/>
+          <a:lstStyle/>
+          <a:p>
+            <a:pPr algn="ctr" indent="0" marL="0">
+              <a:buNone/>
+            </a:pPr>
+            <a:r>
+              <a:rPr lang="en-US" sz="900" dirty="0">
+                <a:solidFill>
+                  <a:srgbClr val="E7EEF3"/>
+                </a:solidFill>
+                <a:latin typeface="Calibri" pitchFamily="34" charset="0"/>
+                <a:ea typeface="Calibri" pitchFamily="34" charset="-122"/>
+                <a:cs typeface="Calibri" pitchFamily="34" charset="-120"/>
+              </a:rPr>
+              <a:t>dò vùng gãy</a:t>
+            </a:r>
+            <a:endParaRPr lang="en-US" sz="900" dirty="0"/>
+          </a:p>
+        </p:txBody>
+      </p:sp>
+      <p:sp>
+        <p:nvSpPr>
+          <p:cNvPr id="30" name="Shape 25"/>
+          <p:cNvSpPr/>
+          <p:nvPr/>
+        </p:nvSpPr>
+        <p:spPr>
+          <a:xfrm>
+            <a:off x="4133088" y="3520440"/>
+            <a:ext cx="1481328" cy="1234440"/>
+          </a:xfrm>
+          <a:prstGeom prst="roundRect">
+            <a:avLst>
+              <a:gd name="adj" fmla="val 7407"/>
+            </a:avLst>
+          </a:prstGeom>
+          <a:solidFill>
+            <a:srgbClr val="1C7293"/>
+          </a:solidFill>
+          <a:ln/>
+          <a:effectLst>
+            <a:outerShdw sx="100000" sy="100000" kx="0" ky="0" algn="bl" rotWithShape="0" blurRad="76200" dist="25400" dir="5400000">
+              <a:srgbClr val="9AA7B4">
+                <a:alpha val="28000"/>
+              </a:srgbClr>
+            </a:outerShdw>
+          </a:effectLst>
+        </p:spPr>
+      </p:sp>
+      <p:pic>
+        <p:nvPicPr>
+          <p:cNvPr id="31" name="Image 3" descr="/home/claude/output2/icons/fractal.png">    </p:cNvPr>
+          <p:cNvPicPr>
+            <a:picLocks noChangeAspect="1"/>
+          </p:cNvPicPr>
+          <p:nvPr/>
+        </p:nvPicPr>
+        <p:blipFill>
+          <a:blip r:embed="rId4"/>
+          <a:stretch>
+            <a:fillRect/>
+          </a:stretch>
+        </p:blipFill>
+        <p:spPr>
+          <a:xfrm>
+            <a:off x="4636008" y="3648456"/>
+            <a:ext cx="475488" cy="475488"/>
+          </a:xfrm>
+          <a:prstGeom prst="rect">
+            <a:avLst/>
+          </a:prstGeom>
+        </p:spPr>
+      </p:pic>
+      <p:sp>
+        <p:nvSpPr>
+          <p:cNvPr id="32" name="Text 26"/>
+          <p:cNvSpPr/>
+          <p:nvPr/>
+        </p:nvSpPr>
+        <p:spPr>
+          <a:xfrm>
+            <a:off x="4206240" y="4160520"/>
+            <a:ext cx="1335024" cy="320040"/>
+          </a:xfrm>
+          <a:prstGeom prst="rect">
+            <a:avLst/>
+          </a:prstGeom>
+          <a:noFill/>
+          <a:ln/>
+        </p:spPr>
+        <p:txBody>
+          <a:bodyPr wrap="square" rtlCol="0" anchor="ctr"/>
+          <a:lstStyle/>
+          <a:p>
+            <a:pPr algn="ctr" indent="0" marL="0">
+              <a:buNone/>
+            </a:pPr>
+            <a:r>
+              <a:rPr lang="en-US" sz="1150" b="1" dirty="0">
+                <a:solidFill>
+                  <a:srgbClr val="FFFFFF"/>
+                </a:solidFill>
+                <a:latin typeface="Calibri" pitchFamily="34" charset="0"/>
+                <a:ea typeface="Calibri" pitchFamily="34" charset="-122"/>
+                <a:cs typeface="Calibri" pitchFamily="34" charset="-120"/>
+              </a:rPr>
+              <a:t>Fractal</a:t>
+            </a:r>
+            <a:endParaRPr lang="en-US" sz="1150" dirty="0"/>
+          </a:p>
+        </p:txBody>
+      </p:sp>
+      <p:sp>
+        <p:nvSpPr>
+          <p:cNvPr id="33" name="Text 27"/>
+          <p:cNvSpPr/>
+          <p:nvPr/>
+        </p:nvSpPr>
+        <p:spPr>
+          <a:xfrm>
+            <a:off x="4206240" y="4462272"/>
+            <a:ext cx="1335024" cy="274320"/>
+          </a:xfrm>
+          <a:prstGeom prst="rect">
+            <a:avLst/>
+          </a:prstGeom>
+          <a:noFill/>
+          <a:ln/>
+        </p:spPr>
+        <p:txBody>
+          <a:bodyPr wrap="square" rtlCol="0" anchor="ctr"/>
+          <a:lstStyle/>
+          <a:p>
+            <a:pPr algn="ctr" indent="0" marL="0">
+              <a:buNone/>
+            </a:pPr>
+            <a:r>
+              <a:rPr lang="en-US" sz="900" dirty="0">
+                <a:solidFill>
+                  <a:srgbClr val="E7EEF3"/>
+                </a:solidFill>
+                <a:latin typeface="Calibri" pitchFamily="34" charset="0"/>
+                <a:ea typeface="Calibri" pitchFamily="34" charset="-122"/>
+                <a:cs typeface="Calibri" pitchFamily="34" charset="-120"/>
+              </a:rPr>
+              <a:t>đo độ gồ ghề viền</a:t>
+            </a:r>
+            <a:endParaRPr lang="en-US" sz="900" dirty="0"/>
+          </a:p>
+        </p:txBody>
+      </p:sp>
+      <p:sp>
+        <p:nvSpPr>
+          <p:cNvPr id="34" name="Shape 28"/>
+          <p:cNvSpPr/>
+          <p:nvPr/>
+        </p:nvSpPr>
+        <p:spPr>
+          <a:xfrm>
+            <a:off x="4087368" y="3360420"/>
+            <a:ext cx="0" cy="-777240"/>
+          </a:xfrm>
+          <a:prstGeom prst="line">
+            <a:avLst/>
+          </a:prstGeom>
+          <a:noFill/>
+          <a:ln w="22225">
+            <a:solidFill>
+              <a:srgbClr val="5B6774"/>
+            </a:solidFill>
+            <a:prstDash val="solid"/>
+            <a:tailEnd type="none"/>
+          </a:ln>
+        </p:spPr>
+      </p:sp>
+      <p:sp>
+        <p:nvSpPr>
+          <p:cNvPr id="35" name="Shape 29"/>
+          <p:cNvSpPr/>
+          <p:nvPr/>
+        </p:nvSpPr>
+        <p:spPr>
+          <a:xfrm>
+            <a:off x="4087368" y="3360420"/>
+            <a:ext cx="0" cy="777240"/>
+          </a:xfrm>
+          <a:prstGeom prst="line">
+            <a:avLst/>
+          </a:prstGeom>
+          <a:noFill/>
+          <a:ln w="22225">
+            <a:solidFill>
+              <a:srgbClr val="5B6774"/>
+            </a:solidFill>
+            <a:prstDash val="solid"/>
+            <a:tailEnd type="none"/>
+          </a:ln>
+        </p:spPr>
+      </p:sp>
+      <p:sp>
+        <p:nvSpPr>
+          <p:cNvPr id="36" name="Shape 30"/>
+          <p:cNvSpPr/>
+          <p:nvPr/>
+        </p:nvSpPr>
+        <p:spPr>
+          <a:xfrm>
+            <a:off x="4087368" y="2583180"/>
+            <a:ext cx="45720" cy="0"/>
+          </a:xfrm>
+          <a:prstGeom prst="line">
+            <a:avLst/>
+          </a:prstGeom>
+          <a:noFill/>
+          <a:ln w="22225">
+            <a:solidFill>
+              <a:srgbClr val="5B6774"/>
+            </a:solidFill>
+            <a:prstDash val="solid"/>
+            <a:tailEnd type="triangle"/>
+          </a:ln>
+        </p:spPr>
+      </p:sp>
+      <p:sp>
+        <p:nvSpPr>
+          <p:cNvPr id="37" name="Shape 31"/>
+          <p:cNvSpPr/>
+          <p:nvPr/>
+        </p:nvSpPr>
+        <p:spPr>
+          <a:xfrm>
+            <a:off x="4087368" y="4137660"/>
+            <a:ext cx="45720" cy="0"/>
+          </a:xfrm>
+          <a:prstGeom prst="line">
+            <a:avLst/>
+          </a:prstGeom>
+          <a:noFill/>
+          <a:ln w="22225">
+            <a:solidFill>
+              <a:srgbClr val="5B6774"/>
+            </a:solidFill>
+            <a:prstDash val="solid"/>
+            <a:tailEnd type="triangle"/>
+          </a:ln>
+        </p:spPr>
+      </p:sp>
+      <p:sp>
+        <p:nvSpPr>
+          <p:cNvPr id="38" name="Shape 32"/>
+          <p:cNvSpPr/>
+          <p:nvPr/>
+        </p:nvSpPr>
+        <p:spPr>
+          <a:xfrm>
+            <a:off x="5925312" y="2743200"/>
+            <a:ext cx="1481328" cy="1234440"/>
+          </a:xfrm>
+          <a:prstGeom prst="roundRect">
+            <a:avLst>
+              <a:gd name="adj" fmla="val 7407"/>
+            </a:avLst>
+          </a:prstGeom>
+          <a:solidFill>
+            <a:srgbClr val="D97C2B"/>
+          </a:solidFill>
+          <a:ln/>
+          <a:effectLst>
+            <a:outerShdw sx="100000" sy="100000" kx="0" ky="0" algn="bl" rotWithShape="0" blurRad="76200" dist="25400" dir="5400000">
+              <a:srgbClr val="9AA7B4">
+                <a:alpha val="28000"/>
+              </a:srgbClr>
+            </a:outerShdw>
+          </a:effectLst>
+        </p:spPr>
+      </p:sp>
+      <p:pic>
+        <p:nvPicPr>
+          <p:cNvPr id="39" name="Image 4" descr="/home/claude/output2/icons/filter.png">    </p:cNvPr>
+          <p:cNvPicPr>
+            <a:picLocks noChangeAspect="1"/>
+          </p:cNvPicPr>
+          <p:nvPr/>
+        </p:nvPicPr>
+        <p:blipFill>
+          <a:blip r:embed="rId5"/>
+          <a:stretch>
+            <a:fillRect/>
+          </a:stretch>
+        </p:blipFill>
+        <p:spPr>
+          <a:xfrm>
+            <a:off x="6428232" y="2871216"/>
+            <a:ext cx="475488" cy="475488"/>
+          </a:xfrm>
+          <a:prstGeom prst="rect">
+            <a:avLst/>
+          </a:prstGeom>
+        </p:spPr>
+      </p:pic>
+      <p:sp>
+        <p:nvSpPr>
+          <p:cNvPr id="40" name="Text 33"/>
+          <p:cNvSpPr/>
+          <p:nvPr/>
+        </p:nvSpPr>
+        <p:spPr>
+          <a:xfrm>
+            <a:off x="5998464" y="3383280"/>
+            <a:ext cx="1335024" cy="320040"/>
+          </a:xfrm>
+          <a:prstGeom prst="rect">
+            <a:avLst/>
+          </a:prstGeom>
+          <a:noFill/>
+          <a:ln/>
+        </p:spPr>
+        <p:txBody>
+          <a:bodyPr wrap="square" rtlCol="0" anchor="ctr"/>
+          <a:lstStyle/>
+          <a:p>
+            <a:pPr algn="ctr" indent="0" marL="0">
+              <a:buNone/>
+            </a:pPr>
+            <a:r>
+              <a:rPr lang="en-US" sz="1150" b="1" dirty="0">
+                <a:solidFill>
+                  <a:srgbClr val="FFFFFF"/>
+                </a:solidFill>
+                <a:latin typeface="Calibri" pitchFamily="34" charset="0"/>
+                <a:ea typeface="Calibri" pitchFamily="34" charset="-122"/>
+                <a:cs typeface="Calibri" pitchFamily="34" charset="-120"/>
+              </a:rPr>
+              <a:t>Gộp &amp; trích</a:t>
+            </a:r>
+            <a:endParaRPr lang="en-US" sz="1150" dirty="0"/>
+          </a:p>
+        </p:txBody>
+      </p:sp>
+      <p:sp>
+        <p:nvSpPr>
+          <p:cNvPr id="41" name="Text 34"/>
+          <p:cNvSpPr/>
+          <p:nvPr/>
+        </p:nvSpPr>
+        <p:spPr>
+          <a:xfrm>
+            <a:off x="5998464" y="3685032"/>
+            <a:ext cx="1335024" cy="274320"/>
+          </a:xfrm>
+          <a:prstGeom prst="rect">
+            <a:avLst/>
+          </a:prstGeom>
+          <a:noFill/>
+          <a:ln/>
+        </p:spPr>
+        <p:txBody>
+          <a:bodyPr wrap="square" rtlCol="0" anchor="ctr"/>
+          <a:lstStyle/>
+          <a:p>
+            <a:pPr algn="ctr" indent="0" marL="0">
+              <a:buNone/>
+            </a:pPr>
+            <a:r>
+              <a:rPr lang="en-US" sz="900" dirty="0">
+                <a:solidFill>
+                  <a:srgbClr val="E7EEF3"/>
+                </a:solidFill>
+                <a:latin typeface="Calibri" pitchFamily="34" charset="0"/>
+                <a:ea typeface="Calibri" pitchFamily="34" charset="-122"/>
+                <a:cs typeface="Calibri" pitchFamily="34" charset="-120"/>
+              </a:rPr>
+              <a:t>NMS + 9 đặc trưng</a:t>
+            </a:r>
+            <a:endParaRPr lang="en-US" sz="900" dirty="0"/>
+          </a:p>
+        </p:txBody>
+      </p:sp>
+      <p:sp>
+        <p:nvSpPr>
+          <p:cNvPr id="42" name="Shape 35"/>
+          <p:cNvSpPr/>
+          <p:nvPr/>
+        </p:nvSpPr>
+        <p:spPr>
+          <a:xfrm>
+            <a:off x="5660136" y="2583180"/>
+            <a:ext cx="0" cy="777240"/>
+          </a:xfrm>
+          <a:prstGeom prst="line">
+            <a:avLst/>
+          </a:prstGeom>
+          <a:noFill/>
+          <a:ln w="22225">
+            <a:solidFill>
+              <a:srgbClr val="5B6774"/>
+            </a:solidFill>
+            <a:prstDash val="solid"/>
+            <a:tailEnd type="none"/>
+          </a:ln>
+        </p:spPr>
+      </p:sp>
+      <p:sp>
+        <p:nvSpPr>
+          <p:cNvPr id="43" name="Shape 36"/>
+          <p:cNvSpPr/>
+          <p:nvPr/>
+        </p:nvSpPr>
+        <p:spPr>
+          <a:xfrm>
+            <a:off x="5660136" y="4137660"/>
+            <a:ext cx="0" cy="-777240"/>
+          </a:xfrm>
+          <a:prstGeom prst="line">
+            <a:avLst/>
+          </a:prstGeom>
+          <a:noFill/>
+          <a:ln w="22225">
+            <a:solidFill>
+              <a:srgbClr val="5B6774"/>
+            </a:solidFill>
+            <a:prstDash val="solid"/>
+            <a:tailEnd type="none"/>
+          </a:ln>
+        </p:spPr>
+      </p:sp>
+      <p:sp>
+        <p:nvSpPr>
+          <p:cNvPr id="44" name="Shape 37"/>
+          <p:cNvSpPr/>
+          <p:nvPr/>
+        </p:nvSpPr>
+        <p:spPr>
+          <a:xfrm>
+            <a:off x="5660136" y="2583180"/>
+            <a:ext cx="265176" cy="0"/>
+          </a:xfrm>
+          <a:prstGeom prst="line">
+            <a:avLst/>
+          </a:prstGeom>
+          <a:noFill/>
+          <a:ln w="22225">
+            <a:solidFill>
+              <a:srgbClr val="5B6774"/>
+            </a:solidFill>
+            <a:prstDash val="solid"/>
+            <a:tailEnd type="triangle"/>
+          </a:ln>
+        </p:spPr>
+      </p:sp>
+      <p:sp>
+        <p:nvSpPr>
+          <p:cNvPr id="45" name="Shape 38"/>
+          <p:cNvSpPr/>
+          <p:nvPr/>
+        </p:nvSpPr>
+        <p:spPr>
+          <a:xfrm>
+            <a:off x="5660136" y="4137660"/>
+            <a:ext cx="264262" cy="0"/>
+          </a:xfrm>
+          <a:prstGeom prst="line">
+            <a:avLst/>
+          </a:prstGeom>
+          <a:noFill/>
+          <a:ln w="22225">
+            <a:solidFill>
+              <a:srgbClr val="5B6774"/>
+            </a:solidFill>
+            <a:prstDash val="solid"/>
+            <a:tailEnd type="triangle"/>
+          </a:ln>
+        </p:spPr>
+      </p:sp>
+      <p:sp>
+        <p:nvSpPr>
+          <p:cNvPr id="46" name="Shape 39"/>
+          <p:cNvSpPr/>
+          <p:nvPr/>
+        </p:nvSpPr>
+        <p:spPr>
+          <a:xfrm>
+            <a:off x="7717536" y="2743200"/>
+            <a:ext cx="1481328" cy="1234440"/>
+          </a:xfrm>
+          <a:prstGeom prst="roundRect">
+            <a:avLst>
+              <a:gd name="adj" fmla="val 7407"/>
+            </a:avLst>
+          </a:prstGeom>
+          <a:solidFill>
+            <a:srgbClr val="D97C2B"/>
+          </a:solidFill>
+          <a:ln/>
+          <a:effectLst>
+            <a:outerShdw sx="100000" sy="100000" kx="0" ky="0" algn="bl" rotWithShape="0" blurRad="76200" dist="25400" dir="5400000">
+              <a:srgbClr val="9AA7B4">
+                <a:alpha val="28000"/>
+              </a:srgbClr>
+            </a:outerShdw>
+          </a:effectLst>
+        </p:spPr>
+      </p:sp>
+      <p:pic>
+        <p:nvPicPr>
+          <p:cNvPr id="47" name="Image 5" descr="/home/claude/output2/icons/anfis.png">    </p:cNvPr>
+          <p:cNvPicPr>
+            <a:picLocks noChangeAspect="1"/>
+          </p:cNvPicPr>
+          <p:nvPr/>
+        </p:nvPicPr>
+        <p:blipFill>
+          <a:blip r:embed="rId6"/>
+          <a:stretch>
+            <a:fillRect/>
+          </a:stretch>
+        </p:blipFill>
+        <p:spPr>
+          <a:xfrm>
+            <a:off x="8220456" y="2871216"/>
+            <a:ext cx="475488" cy="475488"/>
+          </a:xfrm>
+          <a:prstGeom prst="rect">
+            <a:avLst/>
+          </a:prstGeom>
+        </p:spPr>
+      </p:pic>
+      <p:sp>
+        <p:nvSpPr>
+          <p:cNvPr id="48" name="Text 40"/>
+          <p:cNvSpPr/>
+          <p:nvPr/>
+        </p:nvSpPr>
+        <p:spPr>
+          <a:xfrm>
+            <a:off x="7790688" y="3383280"/>
+            <a:ext cx="1335024" cy="320040"/>
+          </a:xfrm>
+          <a:prstGeom prst="rect">
+            <a:avLst/>
+          </a:prstGeom>
+          <a:noFill/>
+          <a:ln/>
+        </p:spPr>
+        <p:txBody>
+          <a:bodyPr wrap="square" rtlCol="0" anchor="ctr"/>
+          <a:lstStyle/>
+          <a:p>
+            <a:pPr algn="ctr" indent="0" marL="0">
+              <a:buNone/>
+            </a:pPr>
+            <a:r>
+              <a:rPr lang="en-US" sz="1150" b="1" dirty="0">
+                <a:solidFill>
+                  <a:srgbClr val="FFFFFF"/>
+                </a:solidFill>
+                <a:latin typeface="Calibri" pitchFamily="34" charset="0"/>
+                <a:ea typeface="Calibri" pitchFamily="34" charset="-122"/>
+                <a:cs typeface="Calibri" pitchFamily="34" charset="-120"/>
+              </a:rPr>
+              <a:t>ANFIS</a:t>
+            </a:r>
+            <a:endParaRPr lang="en-US" sz="1150" dirty="0"/>
+          </a:p>
+        </p:txBody>
+      </p:sp>
+      <p:sp>
+        <p:nvSpPr>
+          <p:cNvPr id="49" name="Text 41"/>
+          <p:cNvSpPr/>
+          <p:nvPr/>
+        </p:nvSpPr>
+        <p:spPr>
+          <a:xfrm>
+            <a:off x="7790688" y="3685032"/>
+            <a:ext cx="1335024" cy="274320"/>
+          </a:xfrm>
+          <a:prstGeom prst="rect">
+            <a:avLst/>
+          </a:prstGeom>
+          <a:noFill/>
+          <a:ln/>
+        </p:spPr>
+        <p:txBody>
+          <a:bodyPr wrap="square" rtlCol="0" anchor="ctr"/>
+          <a:lstStyle/>
+          <a:p>
+            <a:pPr algn="ctr" indent="0" marL="0">
+              <a:buNone/>
+            </a:pPr>
+            <a:r>
+              <a:rPr lang="en-US" sz="900" dirty="0">
+                <a:solidFill>
+                  <a:srgbClr val="E7EEF3"/>
+                </a:solidFill>
+                <a:latin typeface="Calibri" pitchFamily="34" charset="0"/>
+                <a:ea typeface="Calibri" pitchFamily="34" charset="-122"/>
+                <a:cs typeface="Calibri" pitchFamily="34" charset="-120"/>
+              </a:rPr>
+              <a:t>chấm điểm 0–100</a:t>
+            </a:r>
+            <a:endParaRPr lang="en-US" sz="900" dirty="0"/>
+          </a:p>
+        </p:txBody>
+      </p:sp>
+      <p:sp>
+        <p:nvSpPr>
+          <p:cNvPr id="50" name="Shape 42"/>
+          <p:cNvSpPr/>
+          <p:nvPr/>
+        </p:nvSpPr>
+        <p:spPr>
+          <a:xfrm>
+            <a:off x="7452360" y="3360420"/>
+            <a:ext cx="219456" cy="0"/>
+          </a:xfrm>
+          <a:prstGeom prst="line">
+            <a:avLst/>
+          </a:prstGeom>
+          <a:noFill/>
+          <a:ln w="22225">
+            <a:solidFill>
+              <a:srgbClr val="5B6774"/>
+            </a:solidFill>
+            <a:prstDash val="solid"/>
+            <a:tailEnd type="triangle"/>
+          </a:ln>
+        </p:spPr>
+      </p:sp>
+      <p:sp>
+        <p:nvSpPr>
+          <p:cNvPr id="51" name="Shape 43"/>
+          <p:cNvSpPr/>
+          <p:nvPr/>
+        </p:nvSpPr>
+        <p:spPr>
+          <a:xfrm>
+            <a:off x="9509760" y="2743200"/>
+            <a:ext cx="1481328" cy="1234440"/>
+          </a:xfrm>
+          <a:prstGeom prst="roundRect">
+            <a:avLst>
+              <a:gd name="adj" fmla="val 7407"/>
+            </a:avLst>
+          </a:prstGeom>
+          <a:solidFill>
+            <a:srgbClr val="1C7293"/>
+          </a:solidFill>
+          <a:ln/>
+          <a:effectLst>
+            <a:outerShdw sx="100000" sy="100000" kx="0" ky="0" algn="bl" rotWithShape="0" blurRad="76200" dist="25400" dir="5400000">
+              <a:srgbClr val="9AA7B4">
+                <a:alpha val="28000"/>
+              </a:srgbClr>
+            </a:outerShdw>
+          </a:effectLst>
+        </p:spPr>
+      </p:sp>
+      <p:pic>
+        <p:nvPicPr>
+          <p:cNvPr id="52" name="Image 6" descr="/home/claude/output2/icons/report.png">    </p:cNvPr>
+          <p:cNvPicPr>
+            <a:picLocks noChangeAspect="1"/>
+          </p:cNvPicPr>
+          <p:nvPr/>
+        </p:nvPicPr>
+        <p:blipFill>
+          <a:blip r:embed="rId7"/>
+          <a:stretch>
+            <a:fillRect/>
+          </a:stretch>
+        </p:blipFill>
+        <p:spPr>
+          <a:xfrm>
+            <a:off x="10012680" y="2871216"/>
+            <a:ext cx="475488" cy="475488"/>
+          </a:xfrm>
+          <a:prstGeom prst="rect">
+            <a:avLst/>
+          </a:prstGeom>
+        </p:spPr>
+      </p:pic>
+      <p:sp>
+        <p:nvSpPr>
+          <p:cNvPr id="53" name="Text 44"/>
+          <p:cNvSpPr/>
+          <p:nvPr/>
+        </p:nvSpPr>
+        <p:spPr>
+          <a:xfrm>
+            <a:off x="9582912" y="3383280"/>
+            <a:ext cx="1335024" cy="320040"/>
+          </a:xfrm>
+          <a:prstGeom prst="rect">
+            <a:avLst/>
+          </a:prstGeom>
+          <a:noFill/>
+          <a:ln/>
+        </p:spPr>
+        <p:txBody>
+          <a:bodyPr wrap="square" rtlCol="0" anchor="ctr"/>
+          <a:lstStyle/>
+          <a:p>
+            <a:pPr algn="ctr" indent="0" marL="0">
+              <a:buNone/>
+            </a:pPr>
+            <a:r>
+              <a:rPr lang="en-US" sz="1150" b="1" dirty="0">
+                <a:solidFill>
+                  <a:srgbClr val="FFFFFF"/>
+                </a:solidFill>
+                <a:latin typeface="Calibri" pitchFamily="34" charset="0"/>
+                <a:ea typeface="Calibri" pitchFamily="34" charset="-122"/>
+                <a:cs typeface="Calibri" pitchFamily="34" charset="-120"/>
+              </a:rPr>
+              <a:t>Kết quả</a:t>
+            </a:r>
+            <a:endParaRPr lang="en-US" sz="1150" dirty="0"/>
+          </a:p>
+        </p:txBody>
+      </p:sp>
+      <p:sp>
+        <p:nvSpPr>
+          <p:cNvPr id="54" name="Text 45"/>
+          <p:cNvSpPr/>
+          <p:nvPr/>
+        </p:nvSpPr>
+        <p:spPr>
+          <a:xfrm>
+            <a:off x="9582912" y="3685032"/>
+            <a:ext cx="1335024" cy="274320"/>
+          </a:xfrm>
+          <a:prstGeom prst="rect">
+            <a:avLst/>
+          </a:prstGeom>
+          <a:noFill/>
+          <a:ln/>
+        </p:spPr>
+        <p:txBody>
+          <a:bodyPr wrap="square" rtlCol="0" anchor="ctr"/>
+          <a:lstStyle/>
+          <a:p>
+            <a:pPr algn="ctr" indent="0" marL="0">
+              <a:buNone/>
+            </a:pPr>
+            <a:r>
+              <a:rPr lang="en-US" sz="900" dirty="0">
+                <a:solidFill>
+                  <a:srgbClr val="E7EEF3"/>
+                </a:solidFill>
+                <a:latin typeface="Calibri" pitchFamily="34" charset="0"/>
+                <a:ea typeface="Calibri" pitchFamily="34" charset="-122"/>
+                <a:cs typeface="Calibri" pitchFamily="34" charset="-120"/>
+              </a:rPr>
+              <a:t>score + risk_level</a:t>
+            </a:r>
+            <a:endParaRPr lang="en-US" sz="900" dirty="0"/>
+          </a:p>
+        </p:txBody>
+      </p:sp>
+      <p:sp>
+        <p:nvSpPr>
+          <p:cNvPr id="55" name="Shape 46"/>
+          <p:cNvSpPr/>
+          <p:nvPr/>
+        </p:nvSpPr>
+        <p:spPr>
+          <a:xfrm>
+            <a:off x="9244584" y="3360420"/>
+            <a:ext cx="219456" cy="0"/>
+          </a:xfrm>
+          <a:prstGeom prst="line">
+            <a:avLst/>
+          </a:prstGeom>
+          <a:noFill/>
+          <a:ln w="22225">
+            <a:solidFill>
+              <a:srgbClr val="5B6774"/>
+            </a:solidFill>
+            <a:prstDash val="solid"/>
+            <a:tailEnd type="triangle"/>
+          </a:ln>
+        </p:spPr>
+      </p:sp>
+      <p:sp>
+        <p:nvSpPr>
+          <p:cNvPr id="56" name="Text 47"/>
+          <p:cNvSpPr/>
+          <p:nvPr/>
+        </p:nvSpPr>
+        <p:spPr>
+          <a:xfrm>
+            <a:off x="548640" y="5532120"/>
+            <a:ext cx="11094415" cy="548640"/>
+          </a:xfrm>
+          <a:prstGeom prst="rect">
+            <a:avLst/>
+          </a:prstGeom>
+          <a:noFill/>
+          <a:ln/>
+        </p:spPr>
+        <p:txBody>
+          <a:bodyPr wrap="square" rtlCol="0" anchor="ctr"/>
+          <a:lstStyle/>
+          <a:p>
+            <a:pPr algn="ctr" indent="0" marL="0">
+              <a:buNone/>
+            </a:pPr>
+            <a:r>
+              <a:rPr lang="en-US" sz="1300" i="1" dirty="0">
+                <a:solidFill>
+                  <a:srgbClr val="5B6774"/>
+                </a:solidFill>
+                <a:latin typeface="Calibri" pitchFamily="34" charset="0"/>
+                <a:ea typeface="Calibri" pitchFamily="34" charset="-122"/>
+                <a:cs typeface="Calibri" pitchFamily="34" charset="-120"/>
+              </a:rPr>
+              <a:t>Toàn bộ quy trình chạy trong vài giây. Kết quả trả về Spring Boot gồm: ảnh đã khoanh vùng, điểm rủi ro (score), mức độ (risk_level) và mô tả gợi ý — bác sĩ xem và ra kết luận cuối cùng.</a:t>
+            </a:r>
+            <a:endParaRPr lang="en-US" sz="1300" dirty="0"/>
+          </a:p>
+        </p:txBody>
+      </p:sp>
+      <p:sp>
+        <p:nvSpPr>
+          <p:cNvPr id="57" name="Text 48"/>
           <p:cNvSpPr/>
           <p:nvPr/>
         </p:nvSpPr>
@@ -6650,7 +8301,7 @@
       </p:sp>
       <p:sp>
         <p:nvSpPr>
-          <p:cNvPr id="6" name="Text 3"/>
+          <p:cNvPr id="58" name="Text 49"/>
           <p:cNvSpPr/>
           <p:nvPr/>
         </p:nvSpPr>
@@ -6791,15 +8442,69 @@
                 <a:ea typeface="Cambria" pitchFamily="34" charset="-122"/>
                 <a:cs typeface="Cambria" pitchFamily="34" charset="-120"/>
               </a:rPr>
-              <a:t>Sơ đồ Use Case tổng quan</a:t>
+              <a:t>Thiết kế Actor — 5 vai trò</a:t>
             </a:r>
             <a:endParaRPr lang="en-US" sz="3000" dirty="0"/>
           </a:p>
         </p:txBody>
+      </p:sp>
+      <p:sp>
+        <p:nvSpPr>
+          <p:cNvPr id="4" name="Shape 2"/>
+          <p:cNvSpPr/>
+          <p:nvPr/>
+        </p:nvSpPr>
+        <p:spPr>
+          <a:xfrm>
+            <a:off x="548640" y="1965960"/>
+            <a:ext cx="1962851" cy="4114800"/>
+          </a:xfrm>
+          <a:prstGeom prst="roundRect">
+            <a:avLst>
+              <a:gd name="adj" fmla="val 4193"/>
+            </a:avLst>
+          </a:prstGeom>
+          <a:solidFill>
+            <a:srgbClr val="EEF3F8"/>
+          </a:solidFill>
+          <a:ln w="12700">
+            <a:solidFill>
+              <a:srgbClr val="D6DEE6"/>
+            </a:solidFill>
+            <a:prstDash val="solid"/>
+          </a:ln>
+          <a:effectLst>
+            <a:outerShdw sx="100000" sy="100000" kx="0" ky="0" algn="bl" rotWithShape="0" blurRad="101600" dist="38100" dir="5400000">
+              <a:srgbClr val="9AA7B4">
+                <a:alpha val="28000"/>
+              </a:srgbClr>
+            </a:outerShdw>
+          </a:effectLst>
+        </p:spPr>
+      </p:sp>
+      <p:sp>
+        <p:nvSpPr>
+          <p:cNvPr id="5" name="Shape 3"/>
+          <p:cNvSpPr/>
+          <p:nvPr/>
+        </p:nvSpPr>
+        <p:spPr>
+          <a:xfrm>
+            <a:off x="1050006" y="2354580"/>
+            <a:ext cx="960120" cy="960120"/>
+          </a:xfrm>
+          <a:prstGeom prst="ellipse">
+            <a:avLst/>
+          </a:prstGeom>
+          <a:solidFill>
+            <a:srgbClr val="12395C"/>
+          </a:solidFill>
+          <a:ln/>
+        </p:spPr>
       </p:sp>
       <p:pic>
         <p:nvPicPr>
-          <p:cNvPr id="4" name="Image 0" descr="/home/claude/diagrams/slide_usecase.png">    </p:cNvPr>
+          <p:cNvPr id="6" name="Image 0" descr="/home/claude/output2/icons/patient.png">    </p:cNvPr>
           <p:cNvPicPr>
             <a:picLocks noChangeAspect="1"/>
           </p:cNvPicPr>
@@ -6813,8 +8518,8 @@
         </p:blipFill>
         <p:spPr>
           <a:xfrm>
-            <a:off x="2246224" y="1463040"/>
-            <a:ext cx="7699248" cy="4983480"/>
+            <a:off x="1290036" y="2594610"/>
+            <a:ext cx="480060" cy="480060"/>
           </a:xfrm>
           <a:prstGeom prst="rect">
             <a:avLst/>
@@ -6823,7 +8528,904 @@
       </p:pic>
       <p:sp>
         <p:nvSpPr>
-          <p:cNvPr id="5" name="Text 2"/>
+          <p:cNvPr id="7" name="Text 4"/>
+          <p:cNvSpPr/>
+          <p:nvPr/>
+        </p:nvSpPr>
+        <p:spPr>
+          <a:xfrm>
+            <a:off x="640080" y="3474720"/>
+            <a:ext cx="1779971" cy="365760"/>
+          </a:xfrm>
+          <a:prstGeom prst="rect">
+            <a:avLst/>
+          </a:prstGeom>
+          <a:noFill/>
+          <a:ln/>
+        </p:spPr>
+        <p:txBody>
+          <a:bodyPr wrap="square" rtlCol="0" anchor="ctr"/>
+          <a:lstStyle/>
+          <a:p>
+            <a:pPr algn="ctr" indent="0" marL="0">
+              <a:buNone/>
+            </a:pPr>
+            <a:r>
+              <a:rPr lang="en-US" sz="1550" b="1" dirty="0">
+                <a:solidFill>
+                  <a:srgbClr val="12395C"/>
+                </a:solidFill>
+                <a:latin typeface="Cambria" pitchFamily="34" charset="0"/>
+                <a:ea typeface="Cambria" pitchFamily="34" charset="-122"/>
+                <a:cs typeface="Cambria" pitchFamily="34" charset="-120"/>
+              </a:rPr>
+              <a:t>Bệnh nhân</a:t>
+            </a:r>
+            <a:endParaRPr lang="en-US" sz="1550" dirty="0"/>
+          </a:p>
+        </p:txBody>
+      </p:sp>
+      <p:sp>
+        <p:nvSpPr>
+          <p:cNvPr id="8" name="Text 5"/>
+          <p:cNvSpPr/>
+          <p:nvPr/>
+        </p:nvSpPr>
+        <p:spPr>
+          <a:xfrm>
+            <a:off x="640080" y="3813048"/>
+            <a:ext cx="1779971" cy="256032"/>
+          </a:xfrm>
+          <a:prstGeom prst="rect">
+            <a:avLst/>
+          </a:prstGeom>
+          <a:noFill/>
+          <a:ln/>
+        </p:spPr>
+        <p:txBody>
+          <a:bodyPr wrap="square" rtlCol="0" anchor="ctr"/>
+          <a:lstStyle/>
+          <a:p>
+            <a:pPr algn="ctr" indent="0" marL="0">
+              <a:buNone/>
+            </a:pPr>
+            <a:r>
+              <a:rPr lang="en-US" sz="1000" i="1" dirty="0">
+                <a:solidFill>
+                  <a:srgbClr val="5B6774"/>
+                </a:solidFill>
+                <a:latin typeface="Calibri" pitchFamily="34" charset="0"/>
+                <a:ea typeface="Calibri" pitchFamily="34" charset="-122"/>
+                <a:cs typeface="Calibri" pitchFamily="34" charset="-120"/>
+              </a:rPr>
+              <a:t>Patient</a:t>
+            </a:r>
+            <a:endParaRPr lang="en-US" sz="1000" dirty="0"/>
+          </a:p>
+        </p:txBody>
+      </p:sp>
+      <p:sp>
+        <p:nvSpPr>
+          <p:cNvPr id="9" name="Text 6"/>
+          <p:cNvSpPr/>
+          <p:nvPr/>
+        </p:nvSpPr>
+        <p:spPr>
+          <a:xfrm>
+            <a:off x="713232" y="4206240"/>
+            <a:ext cx="1633667" cy="1737360"/>
+          </a:xfrm>
+          <a:prstGeom prst="rect">
+            <a:avLst/>
+          </a:prstGeom>
+          <a:noFill/>
+          <a:ln/>
+        </p:spPr>
+        <p:txBody>
+          <a:bodyPr wrap="square" rtlCol="0" anchor="t"/>
+          <a:lstStyle/>
+          <a:p>
+            <a:pPr algn="ctr" indent="0" marL="0">
+              <a:buNone/>
+            </a:pPr>
+            <a:r>
+              <a:rPr lang="en-US" sz="1100" dirty="0">
+                <a:solidFill>
+                  <a:srgbClr val="16212E"/>
+                </a:solidFill>
+                <a:latin typeface="Calibri" pitchFamily="34" charset="0"/>
+                <a:ea typeface="Calibri" pitchFamily="34" charset="-122"/>
+                <a:cs typeface="Calibri" pitchFamily="34" charset="-120"/>
+              </a:rPr>
+              <a:t>Đặt lịch khám, tự tải X-quang kiểm tra nhanh, xem kết quả &amp; hồ sơ.</a:t>
+            </a:r>
+            <a:endParaRPr lang="en-US" sz="1100" dirty="0"/>
+          </a:p>
+        </p:txBody>
+      </p:sp>
+      <p:sp>
+        <p:nvSpPr>
+          <p:cNvPr id="10" name="Shape 7"/>
+          <p:cNvSpPr/>
+          <p:nvPr/>
+        </p:nvSpPr>
+        <p:spPr>
+          <a:xfrm>
+            <a:off x="2831531" y="1965960"/>
+            <a:ext cx="1962851" cy="4114800"/>
+          </a:xfrm>
+          <a:prstGeom prst="roundRect">
+            <a:avLst>
+              <a:gd name="adj" fmla="val 4193"/>
+            </a:avLst>
+          </a:prstGeom>
+          <a:solidFill>
+            <a:srgbClr val="EEF3F8"/>
+          </a:solidFill>
+          <a:ln w="12700">
+            <a:solidFill>
+              <a:srgbClr val="D6DEE6"/>
+            </a:solidFill>
+            <a:prstDash val="solid"/>
+          </a:ln>
+          <a:effectLst>
+            <a:outerShdw sx="100000" sy="100000" kx="0" ky="0" algn="bl" rotWithShape="0" blurRad="101600" dist="38100" dir="5400000">
+              <a:srgbClr val="9AA7B4">
+                <a:alpha val="28000"/>
+              </a:srgbClr>
+            </a:outerShdw>
+          </a:effectLst>
+        </p:spPr>
+      </p:sp>
+      <p:sp>
+        <p:nvSpPr>
+          <p:cNvPr id="11" name="Shape 8"/>
+          <p:cNvSpPr/>
+          <p:nvPr/>
+        </p:nvSpPr>
+        <p:spPr>
+          <a:xfrm>
+            <a:off x="3332897" y="2354580"/>
+            <a:ext cx="960120" cy="960120"/>
+          </a:xfrm>
+          <a:prstGeom prst="ellipse">
+            <a:avLst/>
+          </a:prstGeom>
+          <a:solidFill>
+            <a:srgbClr val="1C7293"/>
+          </a:solidFill>
+          <a:ln/>
+        </p:spPr>
+      </p:sp>
+      <p:pic>
+        <p:nvPicPr>
+          <p:cNvPr id="12" name="Image 1" descr="/home/claude/output2/icons/receptionist.png">    </p:cNvPr>
+          <p:cNvPicPr>
+            <a:picLocks noChangeAspect="1"/>
+          </p:cNvPicPr>
+          <p:nvPr/>
+        </p:nvPicPr>
+        <p:blipFill>
+          <a:blip r:embed="rId2"/>
+          <a:stretch>
+            <a:fillRect/>
+          </a:stretch>
+        </p:blipFill>
+        <p:spPr>
+          <a:xfrm>
+            <a:off x="3572927" y="2594610"/>
+            <a:ext cx="480060" cy="480060"/>
+          </a:xfrm>
+          <a:prstGeom prst="rect">
+            <a:avLst/>
+          </a:prstGeom>
+        </p:spPr>
+      </p:pic>
+      <p:sp>
+        <p:nvSpPr>
+          <p:cNvPr id="13" name="Text 9"/>
+          <p:cNvSpPr/>
+          <p:nvPr/>
+        </p:nvSpPr>
+        <p:spPr>
+          <a:xfrm>
+            <a:off x="2922971" y="3474720"/>
+            <a:ext cx="1779971" cy="365760"/>
+          </a:xfrm>
+          <a:prstGeom prst="rect">
+            <a:avLst/>
+          </a:prstGeom>
+          <a:noFill/>
+          <a:ln/>
+        </p:spPr>
+        <p:txBody>
+          <a:bodyPr wrap="square" rtlCol="0" anchor="ctr"/>
+          <a:lstStyle/>
+          <a:p>
+            <a:pPr algn="ctr" indent="0" marL="0">
+              <a:buNone/>
+            </a:pPr>
+            <a:r>
+              <a:rPr lang="en-US" sz="1550" b="1" dirty="0">
+                <a:solidFill>
+                  <a:srgbClr val="12395C"/>
+                </a:solidFill>
+                <a:latin typeface="Cambria" pitchFamily="34" charset="0"/>
+                <a:ea typeface="Cambria" pitchFamily="34" charset="-122"/>
+                <a:cs typeface="Cambria" pitchFamily="34" charset="-120"/>
+              </a:rPr>
+              <a:t>Lễ tân</a:t>
+            </a:r>
+            <a:endParaRPr lang="en-US" sz="1550" dirty="0"/>
+          </a:p>
+        </p:txBody>
+      </p:sp>
+      <p:sp>
+        <p:nvSpPr>
+          <p:cNvPr id="14" name="Text 10"/>
+          <p:cNvSpPr/>
+          <p:nvPr/>
+        </p:nvSpPr>
+        <p:spPr>
+          <a:xfrm>
+            <a:off x="2922971" y="3813048"/>
+            <a:ext cx="1779971" cy="256032"/>
+          </a:xfrm>
+          <a:prstGeom prst="rect">
+            <a:avLst/>
+          </a:prstGeom>
+          <a:noFill/>
+          <a:ln/>
+        </p:spPr>
+        <p:txBody>
+          <a:bodyPr wrap="square" rtlCol="0" anchor="ctr"/>
+          <a:lstStyle/>
+          <a:p>
+            <a:pPr algn="ctr" indent="0" marL="0">
+              <a:buNone/>
+            </a:pPr>
+            <a:r>
+              <a:rPr lang="en-US" sz="1000" i="1" dirty="0">
+                <a:solidFill>
+                  <a:srgbClr val="5B6774"/>
+                </a:solidFill>
+                <a:latin typeface="Calibri" pitchFamily="34" charset="0"/>
+                <a:ea typeface="Calibri" pitchFamily="34" charset="-122"/>
+                <a:cs typeface="Calibri" pitchFamily="34" charset="-120"/>
+              </a:rPr>
+              <a:t>Receptionist</a:t>
+            </a:r>
+            <a:endParaRPr lang="en-US" sz="1000" dirty="0"/>
+          </a:p>
+        </p:txBody>
+      </p:sp>
+      <p:sp>
+        <p:nvSpPr>
+          <p:cNvPr id="15" name="Text 11"/>
+          <p:cNvSpPr/>
+          <p:nvPr/>
+        </p:nvSpPr>
+        <p:spPr>
+          <a:xfrm>
+            <a:off x="2996123" y="4206240"/>
+            <a:ext cx="1633667" cy="1737360"/>
+          </a:xfrm>
+          <a:prstGeom prst="rect">
+            <a:avLst/>
+          </a:prstGeom>
+          <a:noFill/>
+          <a:ln/>
+        </p:spPr>
+        <p:txBody>
+          <a:bodyPr wrap="square" rtlCol="0" anchor="t"/>
+          <a:lstStyle/>
+          <a:p>
+            <a:pPr algn="ctr" indent="0" marL="0">
+              <a:buNone/>
+            </a:pPr>
+            <a:r>
+              <a:rPr lang="en-US" sz="1100" dirty="0">
+                <a:solidFill>
+                  <a:srgbClr val="16212E"/>
+                </a:solidFill>
+                <a:latin typeface="Calibri" pitchFamily="34" charset="0"/>
+                <a:ea typeface="Calibri" pitchFamily="34" charset="-122"/>
+                <a:cs typeface="Calibri" pitchFamily="34" charset="-120"/>
+              </a:rPr>
+              <a:t>Quản lý lịch hẹn, check-in, gọi số khám, tiếp nhận khách vãng lai.</a:t>
+            </a:r>
+            <a:endParaRPr lang="en-US" sz="1100" dirty="0"/>
+          </a:p>
+        </p:txBody>
+      </p:sp>
+      <p:sp>
+        <p:nvSpPr>
+          <p:cNvPr id="16" name="Shape 12"/>
+          <p:cNvSpPr/>
+          <p:nvPr/>
+        </p:nvSpPr>
+        <p:spPr>
+          <a:xfrm>
+            <a:off x="5114422" y="1965960"/>
+            <a:ext cx="1962851" cy="4114800"/>
+          </a:xfrm>
+          <a:prstGeom prst="roundRect">
+            <a:avLst>
+              <a:gd name="adj" fmla="val 4193"/>
+            </a:avLst>
+          </a:prstGeom>
+          <a:solidFill>
+            <a:srgbClr val="EEF3F8"/>
+          </a:solidFill>
+          <a:ln w="12700">
+            <a:solidFill>
+              <a:srgbClr val="D6DEE6"/>
+            </a:solidFill>
+            <a:prstDash val="solid"/>
+          </a:ln>
+          <a:effectLst>
+            <a:outerShdw sx="100000" sy="100000" kx="0" ky="0" algn="bl" rotWithShape="0" blurRad="101600" dist="38100" dir="5400000">
+              <a:srgbClr val="9AA7B4">
+                <a:alpha val="28000"/>
+              </a:srgbClr>
+            </a:outerShdw>
+          </a:effectLst>
+        </p:spPr>
+      </p:sp>
+      <p:sp>
+        <p:nvSpPr>
+          <p:cNvPr id="17" name="Shape 13"/>
+          <p:cNvSpPr/>
+          <p:nvPr/>
+        </p:nvSpPr>
+        <p:spPr>
+          <a:xfrm>
+            <a:off x="5615788" y="2354580"/>
+            <a:ext cx="960120" cy="960120"/>
+          </a:xfrm>
+          <a:prstGeom prst="ellipse">
+            <a:avLst/>
+          </a:prstGeom>
+          <a:solidFill>
+            <a:srgbClr val="D97C2B"/>
+          </a:solidFill>
+          <a:ln/>
+        </p:spPr>
+      </p:sp>
+      <p:pic>
+        <p:nvPicPr>
+          <p:cNvPr id="18" name="Image 2" descr="/home/claude/output2/icons/technician.png">    </p:cNvPr>
+          <p:cNvPicPr>
+            <a:picLocks noChangeAspect="1"/>
+          </p:cNvPicPr>
+          <p:nvPr/>
+        </p:nvPicPr>
+        <p:blipFill>
+          <a:blip r:embed="rId3"/>
+          <a:stretch>
+            <a:fillRect/>
+          </a:stretch>
+        </p:blipFill>
+        <p:spPr>
+          <a:xfrm>
+            <a:off x="5855818" y="2594610"/>
+            <a:ext cx="480060" cy="480060"/>
+          </a:xfrm>
+          <a:prstGeom prst="rect">
+            <a:avLst/>
+          </a:prstGeom>
+        </p:spPr>
+      </p:pic>
+      <p:sp>
+        <p:nvSpPr>
+          <p:cNvPr id="19" name="Text 14"/>
+          <p:cNvSpPr/>
+          <p:nvPr/>
+        </p:nvSpPr>
+        <p:spPr>
+          <a:xfrm>
+            <a:off x="5205862" y="3474720"/>
+            <a:ext cx="1779971" cy="365760"/>
+          </a:xfrm>
+          <a:prstGeom prst="rect">
+            <a:avLst/>
+          </a:prstGeom>
+          <a:noFill/>
+          <a:ln/>
+        </p:spPr>
+        <p:txBody>
+          <a:bodyPr wrap="square" rtlCol="0" anchor="ctr"/>
+          <a:lstStyle/>
+          <a:p>
+            <a:pPr algn="ctr" indent="0" marL="0">
+              <a:buNone/>
+            </a:pPr>
+            <a:r>
+              <a:rPr lang="en-US" sz="1550" b="1" dirty="0">
+                <a:solidFill>
+                  <a:srgbClr val="12395C"/>
+                </a:solidFill>
+                <a:latin typeface="Cambria" pitchFamily="34" charset="0"/>
+                <a:ea typeface="Cambria" pitchFamily="34" charset="-122"/>
+                <a:cs typeface="Cambria" pitchFamily="34" charset="-120"/>
+              </a:rPr>
+              <a:t>Kỹ thuật viên</a:t>
+            </a:r>
+            <a:endParaRPr lang="en-US" sz="1550" dirty="0"/>
+          </a:p>
+        </p:txBody>
+      </p:sp>
+      <p:sp>
+        <p:nvSpPr>
+          <p:cNvPr id="20" name="Text 15"/>
+          <p:cNvSpPr/>
+          <p:nvPr/>
+        </p:nvSpPr>
+        <p:spPr>
+          <a:xfrm>
+            <a:off x="5205862" y="3813048"/>
+            <a:ext cx="1779971" cy="256032"/>
+          </a:xfrm>
+          <a:prstGeom prst="rect">
+            <a:avLst/>
+          </a:prstGeom>
+          <a:noFill/>
+          <a:ln/>
+        </p:spPr>
+        <p:txBody>
+          <a:bodyPr wrap="square" rtlCol="0" anchor="ctr"/>
+          <a:lstStyle/>
+          <a:p>
+            <a:pPr algn="ctr" indent="0" marL="0">
+              <a:buNone/>
+            </a:pPr>
+            <a:r>
+              <a:rPr lang="en-US" sz="1000" i="1" dirty="0">
+                <a:solidFill>
+                  <a:srgbClr val="5B6774"/>
+                </a:solidFill>
+                <a:latin typeface="Calibri" pitchFamily="34" charset="0"/>
+                <a:ea typeface="Calibri" pitchFamily="34" charset="-122"/>
+                <a:cs typeface="Calibri" pitchFamily="34" charset="-120"/>
+              </a:rPr>
+              <a:t>Technician</a:t>
+            </a:r>
+            <a:endParaRPr lang="en-US" sz="1000" dirty="0"/>
+          </a:p>
+        </p:txBody>
+      </p:sp>
+      <p:sp>
+        <p:nvSpPr>
+          <p:cNvPr id="21" name="Text 16"/>
+          <p:cNvSpPr/>
+          <p:nvPr/>
+        </p:nvSpPr>
+        <p:spPr>
+          <a:xfrm>
+            <a:off x="5279014" y="4206240"/>
+            <a:ext cx="1633667" cy="1737360"/>
+          </a:xfrm>
+          <a:prstGeom prst="rect">
+            <a:avLst/>
+          </a:prstGeom>
+          <a:noFill/>
+          <a:ln/>
+        </p:spPr>
+        <p:txBody>
+          <a:bodyPr wrap="square" rtlCol="0" anchor="t"/>
+          <a:lstStyle/>
+          <a:p>
+            <a:pPr algn="ctr" indent="0" marL="0">
+              <a:buNone/>
+            </a:pPr>
+            <a:r>
+              <a:rPr lang="en-US" sz="1100" dirty="0">
+                <a:solidFill>
+                  <a:srgbClr val="16212E"/>
+                </a:solidFill>
+                <a:latin typeface="Calibri" pitchFamily="34" charset="0"/>
+                <a:ea typeface="Calibri" pitchFamily="34" charset="-122"/>
+                <a:cs typeface="Calibri" pitchFamily="34" charset="-120"/>
+              </a:rPr>
+              <a:t>Chụp &amp; tải ảnh X-quang, gửi ảnh cho AI Service phân tích.</a:t>
+            </a:r>
+            <a:endParaRPr lang="en-US" sz="1100" dirty="0"/>
+          </a:p>
+        </p:txBody>
+      </p:sp>
+      <p:sp>
+        <p:nvSpPr>
+          <p:cNvPr id="22" name="Shape 17"/>
+          <p:cNvSpPr/>
+          <p:nvPr/>
+        </p:nvSpPr>
+        <p:spPr>
+          <a:xfrm>
+            <a:off x="7397313" y="1965960"/>
+            <a:ext cx="1962851" cy="4114800"/>
+          </a:xfrm>
+          <a:prstGeom prst="roundRect">
+            <a:avLst>
+              <a:gd name="adj" fmla="val 4193"/>
+            </a:avLst>
+          </a:prstGeom>
+          <a:solidFill>
+            <a:srgbClr val="EEF3F8"/>
+          </a:solidFill>
+          <a:ln w="12700">
+            <a:solidFill>
+              <a:srgbClr val="D6DEE6"/>
+            </a:solidFill>
+            <a:prstDash val="solid"/>
+          </a:ln>
+          <a:effectLst>
+            <a:outerShdw sx="100000" sy="100000" kx="0" ky="0" algn="bl" rotWithShape="0" blurRad="101600" dist="38100" dir="5400000">
+              <a:srgbClr val="9AA7B4">
+                <a:alpha val="28000"/>
+              </a:srgbClr>
+            </a:outerShdw>
+          </a:effectLst>
+        </p:spPr>
+      </p:sp>
+      <p:sp>
+        <p:nvSpPr>
+          <p:cNvPr id="23" name="Shape 18"/>
+          <p:cNvSpPr/>
+          <p:nvPr/>
+        </p:nvSpPr>
+        <p:spPr>
+          <a:xfrm>
+            <a:off x="7898679" y="2354580"/>
+            <a:ext cx="960120" cy="960120"/>
+          </a:xfrm>
+          <a:prstGeom prst="ellipse">
+            <a:avLst/>
+          </a:prstGeom>
+          <a:solidFill>
+            <a:srgbClr val="12395C"/>
+          </a:solidFill>
+          <a:ln/>
+        </p:spPr>
+      </p:sp>
+      <p:pic>
+        <p:nvPicPr>
+          <p:cNvPr id="24" name="Image 3" descr="/home/claude/output2/icons/doctor.png">    </p:cNvPr>
+          <p:cNvPicPr>
+            <a:picLocks noChangeAspect="1"/>
+          </p:cNvPicPr>
+          <p:nvPr/>
+        </p:nvPicPr>
+        <p:blipFill>
+          <a:blip r:embed="rId4"/>
+          <a:stretch>
+            <a:fillRect/>
+          </a:stretch>
+        </p:blipFill>
+        <p:spPr>
+          <a:xfrm>
+            <a:off x="8138709" y="2594610"/>
+            <a:ext cx="480060" cy="480060"/>
+          </a:xfrm>
+          <a:prstGeom prst="rect">
+            <a:avLst/>
+          </a:prstGeom>
+        </p:spPr>
+      </p:pic>
+      <p:sp>
+        <p:nvSpPr>
+          <p:cNvPr id="25" name="Text 19"/>
+          <p:cNvSpPr/>
+          <p:nvPr/>
+        </p:nvSpPr>
+        <p:spPr>
+          <a:xfrm>
+            <a:off x="7488753" y="3474720"/>
+            <a:ext cx="1779971" cy="365760"/>
+          </a:xfrm>
+          <a:prstGeom prst="rect">
+            <a:avLst/>
+          </a:prstGeom>
+          <a:noFill/>
+          <a:ln/>
+        </p:spPr>
+        <p:txBody>
+          <a:bodyPr wrap="square" rtlCol="0" anchor="ctr"/>
+          <a:lstStyle/>
+          <a:p>
+            <a:pPr algn="ctr" indent="0" marL="0">
+              <a:buNone/>
+            </a:pPr>
+            <a:r>
+              <a:rPr lang="en-US" sz="1550" b="1" dirty="0">
+                <a:solidFill>
+                  <a:srgbClr val="12395C"/>
+                </a:solidFill>
+                <a:latin typeface="Cambria" pitchFamily="34" charset="0"/>
+                <a:ea typeface="Cambria" pitchFamily="34" charset="-122"/>
+                <a:cs typeface="Cambria" pitchFamily="34" charset="-120"/>
+              </a:rPr>
+              <a:t>Bác sĩ</a:t>
+            </a:r>
+            <a:endParaRPr lang="en-US" sz="1550" dirty="0"/>
+          </a:p>
+        </p:txBody>
+      </p:sp>
+      <p:sp>
+        <p:nvSpPr>
+          <p:cNvPr id="26" name="Text 20"/>
+          <p:cNvSpPr/>
+          <p:nvPr/>
+        </p:nvSpPr>
+        <p:spPr>
+          <a:xfrm>
+            <a:off x="7488753" y="3813048"/>
+            <a:ext cx="1779971" cy="256032"/>
+          </a:xfrm>
+          <a:prstGeom prst="rect">
+            <a:avLst/>
+          </a:prstGeom>
+          <a:noFill/>
+          <a:ln/>
+        </p:spPr>
+        <p:txBody>
+          <a:bodyPr wrap="square" rtlCol="0" anchor="ctr"/>
+          <a:lstStyle/>
+          <a:p>
+            <a:pPr algn="ctr" indent="0" marL="0">
+              <a:buNone/>
+            </a:pPr>
+            <a:r>
+              <a:rPr lang="en-US" sz="1000" i="1" dirty="0">
+                <a:solidFill>
+                  <a:srgbClr val="5B6774"/>
+                </a:solidFill>
+                <a:latin typeface="Calibri" pitchFamily="34" charset="0"/>
+                <a:ea typeface="Calibri" pitchFamily="34" charset="-122"/>
+                <a:cs typeface="Calibri" pitchFamily="34" charset="-120"/>
+              </a:rPr>
+              <a:t>Doctor</a:t>
+            </a:r>
+            <a:endParaRPr lang="en-US" sz="1000" dirty="0"/>
+          </a:p>
+        </p:txBody>
+      </p:sp>
+      <p:sp>
+        <p:nvSpPr>
+          <p:cNvPr id="27" name="Text 21"/>
+          <p:cNvSpPr/>
+          <p:nvPr/>
+        </p:nvSpPr>
+        <p:spPr>
+          <a:xfrm>
+            <a:off x="7561905" y="4206240"/>
+            <a:ext cx="1633667" cy="1737360"/>
+          </a:xfrm>
+          <a:prstGeom prst="rect">
+            <a:avLst/>
+          </a:prstGeom>
+          <a:noFill/>
+          <a:ln/>
+        </p:spPr>
+        <p:txBody>
+          <a:bodyPr wrap="square" rtlCol="0" anchor="t"/>
+          <a:lstStyle/>
+          <a:p>
+            <a:pPr algn="ctr" indent="0" marL="0">
+              <a:buNone/>
+            </a:pPr>
+            <a:r>
+              <a:rPr lang="en-US" sz="1100" dirty="0">
+                <a:solidFill>
+                  <a:srgbClr val="16212E"/>
+                </a:solidFill>
+                <a:latin typeface="Calibri" pitchFamily="34" charset="0"/>
+                <a:ea typeface="Calibri" pitchFamily="34" charset="-122"/>
+                <a:cs typeface="Calibri" pitchFamily="34" charset="-120"/>
+              </a:rPr>
+              <a:t>Duyệt kết quả AI, ghi kết luận chẩn đoán cuối cùng.</a:t>
+            </a:r>
+            <a:endParaRPr lang="en-US" sz="1100" dirty="0"/>
+          </a:p>
+        </p:txBody>
+      </p:sp>
+      <p:sp>
+        <p:nvSpPr>
+          <p:cNvPr id="28" name="Shape 22"/>
+          <p:cNvSpPr/>
+          <p:nvPr/>
+        </p:nvSpPr>
+        <p:spPr>
+          <a:xfrm>
+            <a:off x="9680204" y="1965960"/>
+            <a:ext cx="1962851" cy="4114800"/>
+          </a:xfrm>
+          <a:prstGeom prst="roundRect">
+            <a:avLst>
+              <a:gd name="adj" fmla="val 4193"/>
+            </a:avLst>
+          </a:prstGeom>
+          <a:solidFill>
+            <a:srgbClr val="EEF3F8"/>
+          </a:solidFill>
+          <a:ln w="12700">
+            <a:solidFill>
+              <a:srgbClr val="D6DEE6"/>
+            </a:solidFill>
+            <a:prstDash val="solid"/>
+          </a:ln>
+          <a:effectLst>
+            <a:outerShdw sx="100000" sy="100000" kx="0" ky="0" algn="bl" rotWithShape="0" blurRad="101600" dist="38100" dir="5400000">
+              <a:srgbClr val="9AA7B4">
+                <a:alpha val="28000"/>
+              </a:srgbClr>
+            </a:outerShdw>
+          </a:effectLst>
+        </p:spPr>
+      </p:sp>
+      <p:sp>
+        <p:nvSpPr>
+          <p:cNvPr id="29" name="Shape 23"/>
+          <p:cNvSpPr/>
+          <p:nvPr/>
+        </p:nvSpPr>
+        <p:spPr>
+          <a:xfrm>
+            <a:off x="10181570" y="2354580"/>
+            <a:ext cx="960120" cy="960120"/>
+          </a:xfrm>
+          <a:prstGeom prst="ellipse">
+            <a:avLst/>
+          </a:prstGeom>
+          <a:solidFill>
+            <a:srgbClr val="1C7293"/>
+          </a:solidFill>
+          <a:ln/>
+        </p:spPr>
+      </p:sp>
+      <p:pic>
+        <p:nvPicPr>
+          <p:cNvPr id="30" name="Image 4" descr="/home/claude/output2/icons/admin.png">    </p:cNvPr>
+          <p:cNvPicPr>
+            <a:picLocks noChangeAspect="1"/>
+          </p:cNvPicPr>
+          <p:nvPr/>
+        </p:nvPicPr>
+        <p:blipFill>
+          <a:blip r:embed="rId5"/>
+          <a:stretch>
+            <a:fillRect/>
+          </a:stretch>
+        </p:blipFill>
+        <p:spPr>
+          <a:xfrm>
+            <a:off x="10421600" y="2594610"/>
+            <a:ext cx="480060" cy="480060"/>
+          </a:xfrm>
+          <a:prstGeom prst="rect">
+            <a:avLst/>
+          </a:prstGeom>
+        </p:spPr>
+      </p:pic>
+      <p:sp>
+        <p:nvSpPr>
+          <p:cNvPr id="31" name="Text 24"/>
+          <p:cNvSpPr/>
+          <p:nvPr/>
+        </p:nvSpPr>
+        <p:spPr>
+          <a:xfrm>
+            <a:off x="9771644" y="3474720"/>
+            <a:ext cx="1779971" cy="365760"/>
+          </a:xfrm>
+          <a:prstGeom prst="rect">
+            <a:avLst/>
+          </a:prstGeom>
+          <a:noFill/>
+          <a:ln/>
+        </p:spPr>
+        <p:txBody>
+          <a:bodyPr wrap="square" rtlCol="0" anchor="ctr"/>
+          <a:lstStyle/>
+          <a:p>
+            <a:pPr algn="ctr" indent="0" marL="0">
+              <a:buNone/>
+            </a:pPr>
+            <a:r>
+              <a:rPr lang="en-US" sz="1550" b="1" dirty="0">
+                <a:solidFill>
+                  <a:srgbClr val="12395C"/>
+                </a:solidFill>
+                <a:latin typeface="Cambria" pitchFamily="34" charset="0"/>
+                <a:ea typeface="Cambria" pitchFamily="34" charset="-122"/>
+                <a:cs typeface="Cambria" pitchFamily="34" charset="-120"/>
+              </a:rPr>
+              <a:t>Quản trị viên</a:t>
+            </a:r>
+            <a:endParaRPr lang="en-US" sz="1550" dirty="0"/>
+          </a:p>
+        </p:txBody>
+      </p:sp>
+      <p:sp>
+        <p:nvSpPr>
+          <p:cNvPr id="32" name="Text 25"/>
+          <p:cNvSpPr/>
+          <p:nvPr/>
+        </p:nvSpPr>
+        <p:spPr>
+          <a:xfrm>
+            <a:off x="9771644" y="3813048"/>
+            <a:ext cx="1779971" cy="256032"/>
+          </a:xfrm>
+          <a:prstGeom prst="rect">
+            <a:avLst/>
+          </a:prstGeom>
+          <a:noFill/>
+          <a:ln/>
+        </p:spPr>
+        <p:txBody>
+          <a:bodyPr wrap="square" rtlCol="0" anchor="ctr"/>
+          <a:lstStyle/>
+          <a:p>
+            <a:pPr algn="ctr" indent="0" marL="0">
+              <a:buNone/>
+            </a:pPr>
+            <a:r>
+              <a:rPr lang="en-US" sz="1000" i="1" dirty="0">
+                <a:solidFill>
+                  <a:srgbClr val="5B6774"/>
+                </a:solidFill>
+                <a:latin typeface="Calibri" pitchFamily="34" charset="0"/>
+                <a:ea typeface="Calibri" pitchFamily="34" charset="-122"/>
+                <a:cs typeface="Calibri" pitchFamily="34" charset="-120"/>
+              </a:rPr>
+              <a:t>Admin</a:t>
+            </a:r>
+            <a:endParaRPr lang="en-US" sz="1000" dirty="0"/>
+          </a:p>
+        </p:txBody>
+      </p:sp>
+      <p:sp>
+        <p:nvSpPr>
+          <p:cNvPr id="33" name="Text 26"/>
+          <p:cNvSpPr/>
+          <p:nvPr/>
+        </p:nvSpPr>
+        <p:spPr>
+          <a:xfrm>
+            <a:off x="9844796" y="4206240"/>
+            <a:ext cx="1633667" cy="1737360"/>
+          </a:xfrm>
+          <a:prstGeom prst="rect">
+            <a:avLst/>
+          </a:prstGeom>
+          <a:noFill/>
+          <a:ln/>
+        </p:spPr>
+        <p:txBody>
+          <a:bodyPr wrap="square" rtlCol="0" anchor="t"/>
+          <a:lstStyle/>
+          <a:p>
+            <a:pPr algn="ctr" indent="0" marL="0">
+              <a:buNone/>
+            </a:pPr>
+            <a:r>
+              <a:rPr lang="en-US" sz="1100" dirty="0">
+                <a:solidFill>
+                  <a:srgbClr val="16212E"/>
+                </a:solidFill>
+                <a:latin typeface="Calibri" pitchFamily="34" charset="0"/>
+                <a:ea typeface="Calibri" pitchFamily="34" charset="-122"/>
+                <a:cs typeface="Calibri" pitchFamily="34" charset="-120"/>
+              </a:rPr>
+              <a:t>Quản lý người dùng/vai trò, giám sát AI, cấu hình hệ thống.</a:t>
+            </a:r>
+            <a:endParaRPr lang="en-US" sz="1100" dirty="0"/>
+          </a:p>
+        </p:txBody>
+      </p:sp>
+      <p:sp>
+        <p:nvSpPr>
+          <p:cNvPr id="34" name="Text 27"/>
           <p:cNvSpPr/>
           <p:nvPr/>
         </p:nvSpPr>
@@ -6862,7 +9464,7 @@
       </p:sp>
       <p:sp>
         <p:nvSpPr>
-          <p:cNvPr id="6" name="Text 3"/>
+          <p:cNvPr id="35" name="Text 28"/>
           <p:cNvSpPr/>
           <p:nvPr/>
         </p:nvSpPr>
@@ -6964,6 +9566,430 @@
                 <a:ea typeface="Calibri" pitchFamily="34" charset="-122"/>
                 <a:cs typeface="Calibri" pitchFamily="34" charset="-120"/>
               </a:rPr>
+              <a:t>THIẾT KẾ HỆ THỐNG</a:t>
+            </a:r>
+            <a:endParaRPr lang="en-US" sz="1300" dirty="0"/>
+          </a:p>
+        </p:txBody>
+      </p:sp>
+      <p:sp>
+        <p:nvSpPr>
+          <p:cNvPr id="3" name="Text 1"/>
+          <p:cNvSpPr/>
+          <p:nvPr/>
+        </p:nvSpPr>
+        <p:spPr>
+          <a:xfrm>
+            <a:off x="548640" y="749808"/>
+            <a:ext cx="11094415" cy="594360"/>
+          </a:xfrm>
+          <a:prstGeom prst="rect">
+            <a:avLst/>
+          </a:prstGeom>
+          <a:noFill/>
+          <a:ln/>
+        </p:spPr>
+        <p:txBody>
+          <a:bodyPr wrap="square" rtlCol="0" anchor="ctr"/>
+          <a:lstStyle/>
+          <a:p>
+            <a:pPr indent="0" marL="0">
+              <a:buNone/>
+            </a:pPr>
+            <a:r>
+              <a:rPr lang="en-US" sz="3000" b="1" dirty="0">
+                <a:solidFill>
+                  <a:srgbClr val="12395C"/>
+                </a:solidFill>
+                <a:latin typeface="Cambria" pitchFamily="34" charset="0"/>
+                <a:ea typeface="Cambria" pitchFamily="34" charset="-122"/>
+                <a:cs typeface="Cambria" pitchFamily="34" charset="-120"/>
+              </a:rPr>
+              <a:t>Sơ đồ ngữ cảnh (Context Diagram)</a:t>
+            </a:r>
+            <a:endParaRPr lang="en-US" sz="3000" dirty="0"/>
+          </a:p>
+        </p:txBody>
+      </p:sp>
+      <p:pic>
+        <p:nvPicPr>
+          <p:cNvPr id="4" name="Image 0" descr="/home/claude/diagrams/slide_context.png">    </p:cNvPr>
+          <p:cNvPicPr>
+            <a:picLocks noChangeAspect="1"/>
+          </p:cNvPicPr>
+          <p:nvPr/>
+        </p:nvPicPr>
+        <p:blipFill>
+          <a:blip r:embed="rId1"/>
+          <a:stretch>
+            <a:fillRect/>
+          </a:stretch>
+        </p:blipFill>
+        <p:spPr>
+          <a:xfrm>
+            <a:off x="2488540" y="1463040"/>
+            <a:ext cx="7214616" cy="4983480"/>
+          </a:xfrm>
+          <a:prstGeom prst="rect">
+            <a:avLst/>
+          </a:prstGeom>
+        </p:spPr>
+      </p:pic>
+      <p:sp>
+        <p:nvSpPr>
+          <p:cNvPr id="5" name="Text 2"/>
+          <p:cNvSpPr/>
+          <p:nvPr/>
+        </p:nvSpPr>
+        <p:spPr>
+          <a:xfrm>
+            <a:off x="457200" y="6446520"/>
+            <a:ext cx="5486400" cy="274320"/>
+          </a:xfrm>
+          <a:prstGeom prst="rect">
+            <a:avLst/>
+          </a:prstGeom>
+          <a:noFill/>
+          <a:ln/>
+        </p:spPr>
+        <p:txBody>
+          <a:bodyPr wrap="square" rtlCol="0" anchor="ctr"/>
+          <a:lstStyle/>
+          <a:p>
+            <a:pPr algn="l" indent="0" marL="0">
+              <a:buNone/>
+            </a:pPr>
+            <a:r>
+              <a:rPr lang="en-US" sz="1000" dirty="0">
+                <a:solidFill>
+                  <a:srgbClr val="5B6774"/>
+                </a:solidFill>
+                <a:latin typeface="Calibri" pitchFamily="34" charset="0"/>
+                <a:ea typeface="Calibri" pitchFamily="34" charset="-122"/>
+                <a:cs typeface="Calibri" pitchFamily="34" charset="-120"/>
+              </a:rPr>
+              <a:t>MediScan-AI — Kịch bản thuyết trình</a:t>
+            </a:r>
+            <a:endParaRPr lang="en-US" sz="1000" dirty="0"/>
+          </a:p>
+        </p:txBody>
+      </p:sp>
+      <p:sp>
+        <p:nvSpPr>
+          <p:cNvPr id="6" name="Text 3"/>
+          <p:cNvSpPr/>
+          <p:nvPr/>
+        </p:nvSpPr>
+        <p:spPr>
+          <a:xfrm>
+            <a:off x="11277295" y="6446520"/>
+            <a:ext cx="457200" cy="274320"/>
+          </a:xfrm>
+          <a:prstGeom prst="rect">
+            <a:avLst/>
+          </a:prstGeom>
+          <a:noFill/>
+          <a:ln/>
+        </p:spPr>
+        <p:txBody>
+          <a:bodyPr wrap="square" rtlCol="0" anchor="ctr"/>
+          <a:lstStyle/>
+          <a:p>
+            <a:pPr algn="r" indent="0" marL="0">
+              <a:buNone/>
+            </a:pPr>
+            <a:r>
+              <a:rPr lang="en-US" sz="1000" dirty="0">
+                <a:solidFill>
+                  <a:srgbClr val="5B6774"/>
+                </a:solidFill>
+                <a:latin typeface="Calibri" pitchFamily="34" charset="0"/>
+                <a:ea typeface="Calibri" pitchFamily="34" charset="-122"/>
+                <a:cs typeface="Calibri" pitchFamily="34" charset="-120"/>
+              </a:rPr>
+              <a:t>14</a:t>
+            </a:r>
+            <a:endParaRPr lang="en-US" sz="1000" dirty="0"/>
+          </a:p>
+        </p:txBody>
+      </p:sp>
+    </p:spTree>
+  </p:cSld>
+  <p:clrMapOvr>
+    <a:masterClrMapping/>
+  </p:clrMapOvr>
+</p:sld>
+</file>
+
+<file path=ppt/slides/slide16.xml><?xml version="1.0" encoding="utf-8"?>
+<p:sld xmlns:a="http://schemas.openxmlformats.org/drawingml/2006/main" xmlns:r="http://schemas.openxmlformats.org/officeDocument/2006/relationships" xmlns:p="http://schemas.openxmlformats.org/presentationml/2006/main">
+  <p:cSld name="Slide 16">
+    <p:bg>
+      <p:bgPr>
+        <a:solidFill>
+          <a:srgbClr val="FFFFFF"/>
+        </a:solidFill>
+      </p:bgPr>
+    </p:bg>
+    <p:spTree>
+      <p:nvGrpSpPr>
+        <p:cNvPr id="1" name=""/>
+        <p:cNvGrpSpPr/>
+        <p:nvPr/>
+      </p:nvGrpSpPr>
+      <p:grpSpPr>
+        <a:xfrm>
+          <a:off x="0" y="0"/>
+          <a:ext cx="0" cy="0"/>
+          <a:chOff x="0" y="0"/>
+          <a:chExt cx="0" cy="0"/>
+        </a:xfrm>
+      </p:grpSpPr>
+      <p:sp>
+        <p:nvSpPr>
+          <p:cNvPr id="2" name="Text 0"/>
+          <p:cNvSpPr/>
+          <p:nvPr/>
+        </p:nvSpPr>
+        <p:spPr>
+          <a:xfrm>
+            <a:off x="548640" y="457200"/>
+            <a:ext cx="11094415" cy="292608"/>
+          </a:xfrm>
+          <a:prstGeom prst="rect">
+            <a:avLst/>
+          </a:prstGeom>
+          <a:noFill/>
+          <a:ln/>
+        </p:spPr>
+        <p:txBody>
+          <a:bodyPr wrap="square" rtlCol="0" anchor="ctr"/>
+          <a:lstStyle/>
+          <a:p>
+            <a:pPr indent="0" marL="0">
+              <a:buNone/>
+            </a:pPr>
+            <a:r>
+              <a:rPr lang="en-US" sz="1300" b="1" spc="200" kern="0" dirty="0">
+                <a:solidFill>
+                  <a:srgbClr val="D97C2B"/>
+                </a:solidFill>
+                <a:latin typeface="Calibri" pitchFamily="34" charset="0"/>
+                <a:ea typeface="Calibri" pitchFamily="34" charset="-122"/>
+                <a:cs typeface="Calibri" pitchFamily="34" charset="-120"/>
+              </a:rPr>
+              <a:t>THIẾT KẾ HỆ THỐNG</a:t>
+            </a:r>
+            <a:endParaRPr lang="en-US" sz="1300" dirty="0"/>
+          </a:p>
+        </p:txBody>
+      </p:sp>
+      <p:sp>
+        <p:nvSpPr>
+          <p:cNvPr id="3" name="Text 1"/>
+          <p:cNvSpPr/>
+          <p:nvPr/>
+        </p:nvSpPr>
+        <p:spPr>
+          <a:xfrm>
+            <a:off x="548640" y="749808"/>
+            <a:ext cx="11094415" cy="594360"/>
+          </a:xfrm>
+          <a:prstGeom prst="rect">
+            <a:avLst/>
+          </a:prstGeom>
+          <a:noFill/>
+          <a:ln/>
+        </p:spPr>
+        <p:txBody>
+          <a:bodyPr wrap="square" rtlCol="0" anchor="ctr"/>
+          <a:lstStyle/>
+          <a:p>
+            <a:pPr indent="0" marL="0">
+              <a:buNone/>
+            </a:pPr>
+            <a:r>
+              <a:rPr lang="en-US" sz="3000" b="1" dirty="0">
+                <a:solidFill>
+                  <a:srgbClr val="12395C"/>
+                </a:solidFill>
+                <a:latin typeface="Cambria" pitchFamily="34" charset="0"/>
+                <a:ea typeface="Cambria" pitchFamily="34" charset="-122"/>
+                <a:cs typeface="Cambria" pitchFamily="34" charset="-120"/>
+              </a:rPr>
+              <a:t>Sơ đồ Use Case tổng quan</a:t>
+            </a:r>
+            <a:endParaRPr lang="en-US" sz="3000" dirty="0"/>
+          </a:p>
+        </p:txBody>
+      </p:sp>
+      <p:pic>
+        <p:nvPicPr>
+          <p:cNvPr id="4" name="Image 0" descr="/home/claude/diagrams/slide_usecase.png">    </p:cNvPr>
+          <p:cNvPicPr>
+            <a:picLocks noChangeAspect="1"/>
+          </p:cNvPicPr>
+          <p:nvPr/>
+        </p:nvPicPr>
+        <p:blipFill>
+          <a:blip r:embed="rId1"/>
+          <a:stretch>
+            <a:fillRect/>
+          </a:stretch>
+        </p:blipFill>
+        <p:spPr>
+          <a:xfrm>
+            <a:off x="2246224" y="1463040"/>
+            <a:ext cx="7699248" cy="4983480"/>
+          </a:xfrm>
+          <a:prstGeom prst="rect">
+            <a:avLst/>
+          </a:prstGeom>
+        </p:spPr>
+      </p:pic>
+      <p:sp>
+        <p:nvSpPr>
+          <p:cNvPr id="5" name="Text 2"/>
+          <p:cNvSpPr/>
+          <p:nvPr/>
+        </p:nvSpPr>
+        <p:spPr>
+          <a:xfrm>
+            <a:off x="457200" y="6446520"/>
+            <a:ext cx="5486400" cy="274320"/>
+          </a:xfrm>
+          <a:prstGeom prst="rect">
+            <a:avLst/>
+          </a:prstGeom>
+          <a:noFill/>
+          <a:ln/>
+        </p:spPr>
+        <p:txBody>
+          <a:bodyPr wrap="square" rtlCol="0" anchor="ctr"/>
+          <a:lstStyle/>
+          <a:p>
+            <a:pPr algn="l" indent="0" marL="0">
+              <a:buNone/>
+            </a:pPr>
+            <a:r>
+              <a:rPr lang="en-US" sz="1000" dirty="0">
+                <a:solidFill>
+                  <a:srgbClr val="5B6774"/>
+                </a:solidFill>
+                <a:latin typeface="Calibri" pitchFamily="34" charset="0"/>
+                <a:ea typeface="Calibri" pitchFamily="34" charset="-122"/>
+                <a:cs typeface="Calibri" pitchFamily="34" charset="-120"/>
+              </a:rPr>
+              <a:t>MediScan-AI — Kịch bản thuyết trình</a:t>
+            </a:r>
+            <a:endParaRPr lang="en-US" sz="1000" dirty="0"/>
+          </a:p>
+        </p:txBody>
+      </p:sp>
+      <p:sp>
+        <p:nvSpPr>
+          <p:cNvPr id="6" name="Text 3"/>
+          <p:cNvSpPr/>
+          <p:nvPr/>
+        </p:nvSpPr>
+        <p:spPr>
+          <a:xfrm>
+            <a:off x="11277295" y="6446520"/>
+            <a:ext cx="457200" cy="274320"/>
+          </a:xfrm>
+          <a:prstGeom prst="rect">
+            <a:avLst/>
+          </a:prstGeom>
+          <a:noFill/>
+          <a:ln/>
+        </p:spPr>
+        <p:txBody>
+          <a:bodyPr wrap="square" rtlCol="0" anchor="ctr"/>
+          <a:lstStyle/>
+          <a:p>
+            <a:pPr algn="r" indent="0" marL="0">
+              <a:buNone/>
+            </a:pPr>
+            <a:r>
+              <a:rPr lang="en-US" sz="1000" dirty="0">
+                <a:solidFill>
+                  <a:srgbClr val="5B6774"/>
+                </a:solidFill>
+                <a:latin typeface="Calibri" pitchFamily="34" charset="0"/>
+                <a:ea typeface="Calibri" pitchFamily="34" charset="-122"/>
+                <a:cs typeface="Calibri" pitchFamily="34" charset="-120"/>
+              </a:rPr>
+              <a:t>15</a:t>
+            </a:r>
+            <a:endParaRPr lang="en-US" sz="1000" dirty="0"/>
+          </a:p>
+        </p:txBody>
+      </p:sp>
+    </p:spTree>
+  </p:cSld>
+  <p:clrMapOvr>
+    <a:masterClrMapping/>
+  </p:clrMapOvr>
+</p:sld>
+</file>
+
+<file path=ppt/slides/slide17.xml><?xml version="1.0" encoding="utf-8"?>
+<p:sld xmlns:a="http://schemas.openxmlformats.org/drawingml/2006/main" xmlns:r="http://schemas.openxmlformats.org/officeDocument/2006/relationships" xmlns:p="http://schemas.openxmlformats.org/presentationml/2006/main">
+  <p:cSld name="Slide 17">
+    <p:bg>
+      <p:bgPr>
+        <a:solidFill>
+          <a:srgbClr val="FFFFFF"/>
+        </a:solidFill>
+      </p:bgPr>
+    </p:bg>
+    <p:spTree>
+      <p:nvGrpSpPr>
+        <p:cNvPr id="1" name=""/>
+        <p:cNvGrpSpPr/>
+        <p:nvPr/>
+      </p:nvGrpSpPr>
+      <p:grpSpPr>
+        <a:xfrm>
+          <a:off x="0" y="0"/>
+          <a:ext cx="0" cy="0"/>
+          <a:chOff x="0" y="0"/>
+          <a:chExt cx="0" cy="0"/>
+        </a:xfrm>
+      </p:grpSpPr>
+      <p:sp>
+        <p:nvSpPr>
+          <p:cNvPr id="2" name="Text 0"/>
+          <p:cNvSpPr/>
+          <p:nvPr/>
+        </p:nvSpPr>
+        <p:spPr>
+          <a:xfrm>
+            <a:off x="548640" y="457200"/>
+            <a:ext cx="11094415" cy="292608"/>
+          </a:xfrm>
+          <a:prstGeom prst="rect">
+            <a:avLst/>
+          </a:prstGeom>
+          <a:noFill/>
+          <a:ln/>
+        </p:spPr>
+        <p:txBody>
+          <a:bodyPr wrap="square" rtlCol="0" anchor="ctr"/>
+          <a:lstStyle/>
+          <a:p>
+            <a:pPr indent="0" marL="0">
+              <a:buNone/>
+            </a:pPr>
+            <a:r>
+              <a:rPr lang="en-US" sz="1300" b="1" spc="200" kern="0" dirty="0">
+                <a:solidFill>
+                  <a:srgbClr val="D97C2B"/>
+                </a:solidFill>
+                <a:latin typeface="Calibri" pitchFamily="34" charset="0"/>
+                <a:ea typeface="Calibri" pitchFamily="34" charset="-122"/>
+                <a:cs typeface="Calibri" pitchFamily="34" charset="-120"/>
+              </a:rPr>
               <a:t>KẾT LUẬN</a:t>
             </a:r>
             <a:endParaRPr lang="en-US" sz="1300" dirty="0"/>
@@ -7479,7 +10505,7 @@
                 <a:ea typeface="Calibri" pitchFamily="34" charset="-122"/>
                 <a:cs typeface="Calibri" pitchFamily="34" charset="-120"/>
               </a:rPr>
-              <a:t>14</a:t>
+              <a:t>16</a:t>
             </a:r>
             <a:endParaRPr lang="en-US" sz="1000" dirty="0"/>
           </a:p>
@@ -7493,9 +10519,9 @@
 </p:sld>
 </file>
 
-<file path=ppt/slides/slide16.xml><?xml version="1.0" encoding="utf-8"?>
+<file path=ppt/slides/slide18.xml><?xml version="1.0" encoding="utf-8"?>
 <p:sld xmlns:a="http://schemas.openxmlformats.org/drawingml/2006/main" xmlns:r="http://schemas.openxmlformats.org/officeDocument/2006/relationships" xmlns:p="http://schemas.openxmlformats.org/presentationml/2006/main">
-  <p:cSld name="Slide 16">
+  <p:cSld name="Slide 18">
     <p:bg>
       <p:bgPr>
         <a:solidFill>
